--- a/SANSONE VITO/02_sansoneVito.pptx
+++ b/SANSONE VITO/02_sansoneVito.pptx
@@ -4,6 +4,9 @@
   <p:sldMasterIdLst>
     <p:sldMasterId id="2147483738" r:id="rId1"/>
   </p:sldMasterIdLst>
+  <p:notesMasterIdLst>
+    <p:notesMasterId r:id="rId17"/>
+  </p:notesMasterIdLst>
   <p:sldIdLst>
     <p:sldId id="256" r:id="rId2"/>
     <p:sldId id="257" r:id="rId3"/>
@@ -15,7 +18,11 @@
     <p:sldId id="264" r:id="rId9"/>
     <p:sldId id="265" r:id="rId10"/>
     <p:sldId id="266" r:id="rId11"/>
-    <p:sldId id="262" r:id="rId12"/>
+    <p:sldId id="267" r:id="rId12"/>
+    <p:sldId id="268" r:id="rId13"/>
+    <p:sldId id="269" r:id="rId14"/>
+    <p:sldId id="270" r:id="rId15"/>
+    <p:sldId id="262" r:id="rId16"/>
   </p:sldIdLst>
   <p:sldSz cx="12192000" cy="6858000"/>
   <p:notesSz cx="6858000" cy="9144000"/>
@@ -130,6 +137,355 @@
 </p1510:revInfo>
 </file>
 
+<file path=ppt/notesMasters/notesMaster1.xml><?xml version="1.0" encoding="utf-8"?>
+<p:notesMaster xmlns:a="http://schemas.openxmlformats.org/drawingml/2006/main" xmlns:r="http://schemas.openxmlformats.org/officeDocument/2006/relationships" xmlns:p="http://schemas.openxmlformats.org/presentationml/2006/main">
+  <p:cSld>
+    <p:bg>
+      <p:bgRef idx="1001">
+        <a:schemeClr val="bg1"/>
+      </p:bgRef>
+    </p:bg>
+    <p:spTree>
+      <p:nvGrpSpPr>
+        <p:cNvPr id="1" name=""/>
+        <p:cNvGrpSpPr/>
+        <p:nvPr/>
+      </p:nvGrpSpPr>
+      <p:grpSpPr>
+        <a:xfrm>
+          <a:off x="0" y="0"/>
+          <a:ext cx="0" cy="0"/>
+          <a:chOff x="0" y="0"/>
+          <a:chExt cx="0" cy="0"/>
+        </a:xfrm>
+      </p:grpSpPr>
+      <p:sp>
+        <p:nvSpPr>
+          <p:cNvPr id="2" name="Segnaposto intestazione 1"/>
+          <p:cNvSpPr>
+            <a:spLocks noGrp="1"/>
+          </p:cNvSpPr>
+          <p:nvPr>
+            <p:ph type="hdr" sz="quarter"/>
+          </p:nvPr>
+        </p:nvSpPr>
+        <p:spPr>
+          <a:xfrm>
+            <a:off x="0" y="0"/>
+            <a:ext cx="2971800" cy="458788"/>
+          </a:xfrm>
+          <a:prstGeom prst="rect">
+            <a:avLst/>
+          </a:prstGeom>
+        </p:spPr>
+        <p:txBody>
+          <a:bodyPr vert="horz" lIns="91440" tIns="45720" rIns="91440" bIns="45720" rtlCol="0"/>
+          <a:lstStyle>
+            <a:lvl1pPr algn="l">
+              <a:defRPr sz="1200"/>
+            </a:lvl1pPr>
+          </a:lstStyle>
+          <a:p>
+            <a:endParaRPr lang="it-IT"/>
+          </a:p>
+        </p:txBody>
+      </p:sp>
+      <p:sp>
+        <p:nvSpPr>
+          <p:cNvPr id="3" name="Segnaposto data 2"/>
+          <p:cNvSpPr>
+            <a:spLocks noGrp="1"/>
+          </p:cNvSpPr>
+          <p:nvPr>
+            <p:ph type="dt" idx="1"/>
+          </p:nvPr>
+        </p:nvSpPr>
+        <p:spPr>
+          <a:xfrm>
+            <a:off x="3884613" y="0"/>
+            <a:ext cx="2971800" cy="458788"/>
+          </a:xfrm>
+          <a:prstGeom prst="rect">
+            <a:avLst/>
+          </a:prstGeom>
+        </p:spPr>
+        <p:txBody>
+          <a:bodyPr vert="horz" lIns="91440" tIns="45720" rIns="91440" bIns="45720" rtlCol="0"/>
+          <a:lstStyle>
+            <a:lvl1pPr algn="r">
+              <a:defRPr sz="1200"/>
+            </a:lvl1pPr>
+          </a:lstStyle>
+          <a:p>
+            <a:fld id="{945A0315-AB91-42BB-B4E1-FAC864053F08}" type="datetimeFigureOut">
+              <a:rPr lang="it-IT" smtClean="0"/>
+              <a:t>12/04/2026</a:t>
+            </a:fld>
+            <a:endParaRPr lang="it-IT"/>
+          </a:p>
+        </p:txBody>
+      </p:sp>
+      <p:sp>
+        <p:nvSpPr>
+          <p:cNvPr id="4" name="Segnaposto immagine diapositiva 3"/>
+          <p:cNvSpPr>
+            <a:spLocks noGrp="1" noRot="1" noChangeAspect="1"/>
+          </p:cNvSpPr>
+          <p:nvPr>
+            <p:ph type="sldImg" idx="2"/>
+          </p:nvPr>
+        </p:nvSpPr>
+        <p:spPr>
+          <a:xfrm>
+            <a:off x="685800" y="1143000"/>
+            <a:ext cx="5486400" cy="3086100"/>
+          </a:xfrm>
+          <a:prstGeom prst="rect">
+            <a:avLst/>
+          </a:prstGeom>
+          <a:noFill/>
+          <a:ln w="12700">
+            <a:solidFill>
+              <a:prstClr val="black"/>
+            </a:solidFill>
+          </a:ln>
+        </p:spPr>
+        <p:txBody>
+          <a:bodyPr vert="horz" lIns="91440" tIns="45720" rIns="91440" bIns="45720" rtlCol="0" anchor="ctr"/>
+          <a:lstStyle/>
+          <a:p>
+            <a:endParaRPr lang="it-IT"/>
+          </a:p>
+        </p:txBody>
+      </p:sp>
+      <p:sp>
+        <p:nvSpPr>
+          <p:cNvPr id="5" name="Segnaposto note 4"/>
+          <p:cNvSpPr>
+            <a:spLocks noGrp="1"/>
+          </p:cNvSpPr>
+          <p:nvPr>
+            <p:ph type="body" sz="quarter" idx="3"/>
+          </p:nvPr>
+        </p:nvSpPr>
+        <p:spPr>
+          <a:xfrm>
+            <a:off x="685800" y="4400550"/>
+            <a:ext cx="5486400" cy="3600450"/>
+          </a:xfrm>
+          <a:prstGeom prst="rect">
+            <a:avLst/>
+          </a:prstGeom>
+        </p:spPr>
+        <p:txBody>
+          <a:bodyPr vert="horz" lIns="91440" tIns="45720" rIns="91440" bIns="45720" rtlCol="0"/>
+          <a:lstStyle/>
+          <a:p>
+            <a:pPr lvl="0"/>
+            <a:r>
+              <a:rPr lang="it-IT"/>
+              <a:t>Fare clic per modificare gli stili del testo dello schema</a:t>
+            </a:r>
+          </a:p>
+          <a:p>
+            <a:pPr lvl="1"/>
+            <a:r>
+              <a:rPr lang="it-IT"/>
+              <a:t>Secondo livello</a:t>
+            </a:r>
+          </a:p>
+          <a:p>
+            <a:pPr lvl="2"/>
+            <a:r>
+              <a:rPr lang="it-IT"/>
+              <a:t>Terzo livello</a:t>
+            </a:r>
+          </a:p>
+          <a:p>
+            <a:pPr lvl="3"/>
+            <a:r>
+              <a:rPr lang="it-IT"/>
+              <a:t>Quarto livello</a:t>
+            </a:r>
+          </a:p>
+          <a:p>
+            <a:pPr lvl="4"/>
+            <a:r>
+              <a:rPr lang="it-IT"/>
+              <a:t>Quinto livello</a:t>
+            </a:r>
+          </a:p>
+        </p:txBody>
+      </p:sp>
+      <p:sp>
+        <p:nvSpPr>
+          <p:cNvPr id="6" name="Segnaposto piè di pagina 5"/>
+          <p:cNvSpPr>
+            <a:spLocks noGrp="1"/>
+          </p:cNvSpPr>
+          <p:nvPr>
+            <p:ph type="ftr" sz="quarter" idx="4"/>
+          </p:nvPr>
+        </p:nvSpPr>
+        <p:spPr>
+          <a:xfrm>
+            <a:off x="0" y="8685213"/>
+            <a:ext cx="2971800" cy="458787"/>
+          </a:xfrm>
+          <a:prstGeom prst="rect">
+            <a:avLst/>
+          </a:prstGeom>
+        </p:spPr>
+        <p:txBody>
+          <a:bodyPr vert="horz" lIns="91440" tIns="45720" rIns="91440" bIns="45720" rtlCol="0" anchor="b"/>
+          <a:lstStyle>
+            <a:lvl1pPr algn="l">
+              <a:defRPr sz="1200"/>
+            </a:lvl1pPr>
+          </a:lstStyle>
+          <a:p>
+            <a:endParaRPr lang="it-IT"/>
+          </a:p>
+        </p:txBody>
+      </p:sp>
+      <p:sp>
+        <p:nvSpPr>
+          <p:cNvPr id="7" name="Segnaposto numero diapositiva 6"/>
+          <p:cNvSpPr>
+            <a:spLocks noGrp="1"/>
+          </p:cNvSpPr>
+          <p:nvPr>
+            <p:ph type="sldNum" sz="quarter" idx="5"/>
+          </p:nvPr>
+        </p:nvSpPr>
+        <p:spPr>
+          <a:xfrm>
+            <a:off x="3884613" y="8685213"/>
+            <a:ext cx="2971800" cy="458787"/>
+          </a:xfrm>
+          <a:prstGeom prst="rect">
+            <a:avLst/>
+          </a:prstGeom>
+        </p:spPr>
+        <p:txBody>
+          <a:bodyPr vert="horz" lIns="91440" tIns="45720" rIns="91440" bIns="45720" rtlCol="0" anchor="b"/>
+          <a:lstStyle>
+            <a:lvl1pPr algn="r">
+              <a:defRPr sz="1200"/>
+            </a:lvl1pPr>
+          </a:lstStyle>
+          <a:p>
+            <a:fld id="{983BEE1C-5A38-4F60-A043-0082E6CBB831}" type="slidenum">
+              <a:rPr lang="it-IT" smtClean="0"/>
+              <a:t>‹N›</a:t>
+            </a:fld>
+            <a:endParaRPr lang="it-IT"/>
+          </a:p>
+        </p:txBody>
+      </p:sp>
+    </p:spTree>
+    <p:extLst>
+      <p:ext uri="{BB962C8B-B14F-4D97-AF65-F5344CB8AC3E}">
+        <p14:creationId xmlns:p14="http://schemas.microsoft.com/office/powerpoint/2010/main" val="3514060658"/>
+      </p:ext>
+    </p:extLst>
+  </p:cSld>
+  <p:clrMap bg1="lt1" tx1="dk1" bg2="lt2" tx2="dk2" accent1="accent1" accent2="accent2" accent3="accent3" accent4="accent4" accent5="accent5" accent6="accent6" hlink="hlink" folHlink="folHlink"/>
+  <p:notesStyle>
+    <a:lvl1pPr marL="0" algn="l" defTabSz="914400" rtl="0" eaLnBrk="1" latinLnBrk="0" hangingPunct="1">
+      <a:defRPr sz="1200" kern="1200">
+        <a:solidFill>
+          <a:schemeClr val="tx1"/>
+        </a:solidFill>
+        <a:latin typeface="+mn-lt"/>
+        <a:ea typeface="+mn-ea"/>
+        <a:cs typeface="+mn-cs"/>
+      </a:defRPr>
+    </a:lvl1pPr>
+    <a:lvl2pPr marL="457200" algn="l" defTabSz="914400" rtl="0" eaLnBrk="1" latinLnBrk="0" hangingPunct="1">
+      <a:defRPr sz="1200" kern="1200">
+        <a:solidFill>
+          <a:schemeClr val="tx1"/>
+        </a:solidFill>
+        <a:latin typeface="+mn-lt"/>
+        <a:ea typeface="+mn-ea"/>
+        <a:cs typeface="+mn-cs"/>
+      </a:defRPr>
+    </a:lvl2pPr>
+    <a:lvl3pPr marL="914400" algn="l" defTabSz="914400" rtl="0" eaLnBrk="1" latinLnBrk="0" hangingPunct="1">
+      <a:defRPr sz="1200" kern="1200">
+        <a:solidFill>
+          <a:schemeClr val="tx1"/>
+        </a:solidFill>
+        <a:latin typeface="+mn-lt"/>
+        <a:ea typeface="+mn-ea"/>
+        <a:cs typeface="+mn-cs"/>
+      </a:defRPr>
+    </a:lvl3pPr>
+    <a:lvl4pPr marL="1371600" algn="l" defTabSz="914400" rtl="0" eaLnBrk="1" latinLnBrk="0" hangingPunct="1">
+      <a:defRPr sz="1200" kern="1200">
+        <a:solidFill>
+          <a:schemeClr val="tx1"/>
+        </a:solidFill>
+        <a:latin typeface="+mn-lt"/>
+        <a:ea typeface="+mn-ea"/>
+        <a:cs typeface="+mn-cs"/>
+      </a:defRPr>
+    </a:lvl4pPr>
+    <a:lvl5pPr marL="1828800" algn="l" defTabSz="914400" rtl="0" eaLnBrk="1" latinLnBrk="0" hangingPunct="1">
+      <a:defRPr sz="1200" kern="1200">
+        <a:solidFill>
+          <a:schemeClr val="tx1"/>
+        </a:solidFill>
+        <a:latin typeface="+mn-lt"/>
+        <a:ea typeface="+mn-ea"/>
+        <a:cs typeface="+mn-cs"/>
+      </a:defRPr>
+    </a:lvl5pPr>
+    <a:lvl6pPr marL="2286000" algn="l" defTabSz="914400" rtl="0" eaLnBrk="1" latinLnBrk="0" hangingPunct="1">
+      <a:defRPr sz="1200" kern="1200">
+        <a:solidFill>
+          <a:schemeClr val="tx1"/>
+        </a:solidFill>
+        <a:latin typeface="+mn-lt"/>
+        <a:ea typeface="+mn-ea"/>
+        <a:cs typeface="+mn-cs"/>
+      </a:defRPr>
+    </a:lvl6pPr>
+    <a:lvl7pPr marL="2743200" algn="l" defTabSz="914400" rtl="0" eaLnBrk="1" latinLnBrk="0" hangingPunct="1">
+      <a:defRPr sz="1200" kern="1200">
+        <a:solidFill>
+          <a:schemeClr val="tx1"/>
+        </a:solidFill>
+        <a:latin typeface="+mn-lt"/>
+        <a:ea typeface="+mn-ea"/>
+        <a:cs typeface="+mn-cs"/>
+      </a:defRPr>
+    </a:lvl7pPr>
+    <a:lvl8pPr marL="3200400" algn="l" defTabSz="914400" rtl="0" eaLnBrk="1" latinLnBrk="0" hangingPunct="1">
+      <a:defRPr sz="1200" kern="1200">
+        <a:solidFill>
+          <a:schemeClr val="tx1"/>
+        </a:solidFill>
+        <a:latin typeface="+mn-lt"/>
+        <a:ea typeface="+mn-ea"/>
+        <a:cs typeface="+mn-cs"/>
+      </a:defRPr>
+    </a:lvl8pPr>
+    <a:lvl9pPr marL="3657600" algn="l" defTabSz="914400" rtl="0" eaLnBrk="1" latinLnBrk="0" hangingPunct="1">
+      <a:defRPr sz="1200" kern="1200">
+        <a:solidFill>
+          <a:schemeClr val="tx1"/>
+        </a:solidFill>
+        <a:latin typeface="+mn-lt"/>
+        <a:ea typeface="+mn-ea"/>
+        <a:cs typeface="+mn-cs"/>
+      </a:defRPr>
+    </a:lvl9pPr>
+  </p:notesStyle>
+</p:notesMaster>
+</file>
+
 <file path=ppt/slideLayouts/slideLayout1.xml><?xml version="1.0" encoding="utf-8"?>
 <p:sldLayout xmlns:a="http://schemas.openxmlformats.org/drawingml/2006/main" xmlns:r="http://schemas.openxmlformats.org/officeDocument/2006/relationships" xmlns:p="http://schemas.openxmlformats.org/presentationml/2006/main" type="title" preserve="1">
   <p:cSld name="Title Slide">
@@ -281,9 +637,9 @@
           <a:bodyPr/>
           <a:lstStyle/>
           <a:p>
-            <a:fld id="{79C5A860-F335-4252-AA00-24FB67ED2982}" type="datetime1">
-              <a:rPr lang="en-US" smtClean="0"/>
-              <a:t>2/20/2026</a:t>
+            <a:fld id="{E1DDE1AA-7750-41E1-8655-1AAE09A604D1}" type="datetime1">
+              <a:rPr lang="it-IT" smtClean="0"/>
+              <a:t>12/04/2026</a:t>
             </a:fld>
             <a:endParaRPr lang="en-US"/>
           </a:p>
@@ -492,9 +848,9 @@
           <a:bodyPr/>
           <a:lstStyle/>
           <a:p>
-            <a:fld id="{46AB1048-0047-48CA-88BA-D69B470942CF}" type="datetime1">
-              <a:rPr lang="en-US" smtClean="0"/>
-              <a:t>2/20/2026</a:t>
+            <a:fld id="{E8FA5500-4136-4AB9-9087-ADAFE989EAF3}" type="datetime1">
+              <a:rPr lang="it-IT" smtClean="0"/>
+              <a:t>12/04/2026</a:t>
             </a:fld>
             <a:endParaRPr lang="en-US"/>
           </a:p>
@@ -714,9 +1070,9 @@
           <a:bodyPr/>
           <a:lstStyle/>
           <a:p>
-            <a:fld id="{5BD83879-648C-49A9-81A2-0EF5946532D0}" type="datetime1">
-              <a:rPr lang="en-US" smtClean="0"/>
-              <a:t>2/20/2026</a:t>
+            <a:fld id="{0266D5AA-7CFC-4F5E-9B64-63ECA51A1816}" type="datetime1">
+              <a:rPr lang="it-IT" smtClean="0"/>
+              <a:t>12/04/2026</a:t>
             </a:fld>
             <a:endParaRPr lang="en-US"/>
           </a:p>
@@ -924,9 +1280,9 @@
           <a:bodyPr/>
           <a:lstStyle/>
           <a:p>
-            <a:fld id="{D04BC802-30E3-4658-9CCA-F873646FEC67}" type="datetime1">
-              <a:rPr lang="en-US" smtClean="0"/>
-              <a:t>2/20/2026</a:t>
+            <a:fld id="{0CD92521-F359-4416-B703-1D6311607461}" type="datetime1">
+              <a:rPr lang="it-IT" smtClean="0"/>
+              <a:t>12/04/2026</a:t>
             </a:fld>
             <a:endParaRPr lang="en-US"/>
           </a:p>
@@ -1214,9 +1570,9 @@
           <a:bodyPr/>
           <a:lstStyle/>
           <a:p>
-            <a:fld id="{0AB227A3-19CE-4153-81CE-64EB7AB094B3}" type="datetime1">
-              <a:rPr lang="en-US" smtClean="0"/>
-              <a:t>2/20/2026</a:t>
+            <a:fld id="{183A8135-DE0F-4E83-A4C9-FEC634C57DBA}" type="datetime1">
+              <a:rPr lang="it-IT" smtClean="0"/>
+              <a:t>12/04/2026</a:t>
             </a:fld>
             <a:endParaRPr lang="en-US"/>
           </a:p>
@@ -1493,9 +1849,9 @@
           <a:bodyPr/>
           <a:lstStyle/>
           <a:p>
-            <a:fld id="{B819A100-10F6-477E-8847-29D479EF1C92}" type="datetime1">
-              <a:rPr lang="en-US" smtClean="0"/>
-              <a:t>2/20/2026</a:t>
+            <a:fld id="{4F58BDF6-99D5-4D3F-92C4-7528D8635F42}" type="datetime1">
+              <a:rPr lang="it-IT" smtClean="0"/>
+              <a:t>12/04/2026</a:t>
             </a:fld>
             <a:endParaRPr lang="en-US"/>
           </a:p>
@@ -1919,9 +2275,9 @@
           <a:bodyPr/>
           <a:lstStyle/>
           <a:p>
-            <a:fld id="{5DF128AB-198A-495F-8475-FDB360C9873F}" type="datetime1">
-              <a:rPr lang="en-US" smtClean="0"/>
-              <a:t>2/20/2026</a:t>
+            <a:fld id="{0D6AB7B6-7EF4-4572-9743-FDCA2C59F339}" type="datetime1">
+              <a:rPr lang="it-IT" smtClean="0"/>
+              <a:t>12/04/2026</a:t>
             </a:fld>
             <a:endParaRPr lang="en-US"/>
           </a:p>
@@ -2072,9 +2428,9 @@
           <a:bodyPr/>
           <a:lstStyle/>
           <a:p>
-            <a:fld id="{021A235E-F8FD-479F-9FC7-18BE84110877}" type="datetime1">
-              <a:rPr lang="en-US" smtClean="0"/>
-              <a:t>2/20/2026</a:t>
+            <a:fld id="{F6B12CCE-49C5-4DAC-BBBF-413498642E51}" type="datetime1">
+              <a:rPr lang="it-IT" smtClean="0"/>
+              <a:t>12/04/2026</a:t>
             </a:fld>
             <a:endParaRPr lang="en-US"/>
           </a:p>
@@ -2197,9 +2553,9 @@
           <a:bodyPr/>
           <a:lstStyle/>
           <a:p>
-            <a:fld id="{E890F09B-68DA-462E-9DB4-4C9ADAB8CBCC}" type="datetime1">
-              <a:rPr lang="en-US" smtClean="0"/>
-              <a:t>2/20/2026</a:t>
+            <a:fld id="{5C86C131-9FC8-4B4A-B198-5764DD09F762}" type="datetime1">
+              <a:rPr lang="it-IT" smtClean="0"/>
+              <a:t>12/04/2026</a:t>
             </a:fld>
             <a:endParaRPr lang="en-US"/>
           </a:p>
@@ -2528,9 +2884,9 @@
           <a:bodyPr/>
           <a:lstStyle/>
           <a:p>
-            <a:fld id="{17AC4E36-FABE-47EB-AA7F-C19A93824617}" type="datetime1">
-              <a:rPr lang="en-US" smtClean="0"/>
-              <a:t>2/20/2026</a:t>
+            <a:fld id="{DB98B0FF-AAB2-49E9-A785-765060CA9DC1}" type="datetime1">
+              <a:rPr lang="it-IT" smtClean="0"/>
+              <a:t>12/04/2026</a:t>
             </a:fld>
             <a:endParaRPr lang="en-US"/>
           </a:p>
@@ -2837,9 +3193,9 @@
           <a:bodyPr/>
           <a:lstStyle/>
           <a:p>
-            <a:fld id="{F199CE6B-5DE6-4A2D-B72E-5E8969F9F56F}" type="datetime1">
-              <a:rPr lang="en-US" smtClean="0"/>
-              <a:t>2/20/2026</a:t>
+            <a:fld id="{3086047F-5CFF-40EF-8A9D-C0DECB40C345}" type="datetime1">
+              <a:rPr lang="it-IT" smtClean="0"/>
+              <a:t>12/04/2026</a:t>
             </a:fld>
             <a:endParaRPr lang="en-US"/>
           </a:p>
@@ -3707,9 +4063,9 @@
             </a:lvl1pPr>
           </a:lstStyle>
           <a:p>
-            <a:fld id="{F481A142-DA77-4A5F-AD1F-14E6C18F0F5F}" type="datetime1">
-              <a:rPr lang="en-US" smtClean="0"/>
-              <a:t>2/20/2026</a:t>
+            <a:fld id="{5F36A129-ED9F-4E58-BE13-1ABCD9F0794C}" type="datetime1">
+              <a:rPr lang="it-IT" smtClean="0"/>
+              <a:t>12/04/2026</a:t>
             </a:fld>
             <a:endParaRPr lang="en-US" dirty="0"/>
           </a:p>
@@ -3841,7 +4197,7 @@
       </p:transition>
     </mc:Fallback>
   </mc:AlternateContent>
-  <p:hf sldNum="0" hdr="0" ftr="0" dt="0"/>
+  <p:hf sldNum="0" hdr="0" ftr="0"/>
   <p:txStyles>
     <p:titleStyle>
       <a:lvl1pPr algn="l" defTabSz="914400" rtl="0" eaLnBrk="1" latinLnBrk="0" hangingPunct="1">
@@ -4577,6 +4933,35 @@
           </a:custGeom>
         </p:spPr>
       </p:pic>
+      <p:sp>
+        <p:nvSpPr>
+          <p:cNvPr id="5" name="Segnaposto data 4">
+            <a:extLst>
+              <a:ext uri="{FF2B5EF4-FFF2-40B4-BE49-F238E27FC236}">
+                <a16:creationId xmlns:a16="http://schemas.microsoft.com/office/drawing/2014/main" id="{029FE05D-C1E6-2525-BF7F-E5011182B4E3}"/>
+              </a:ext>
+            </a:extLst>
+          </p:cNvPr>
+          <p:cNvSpPr>
+            <a:spLocks noGrp="1"/>
+          </p:cNvSpPr>
+          <p:nvPr>
+            <p:ph type="dt" sz="half" idx="10"/>
+          </p:nvPr>
+        </p:nvSpPr>
+        <p:spPr/>
+        <p:txBody>
+          <a:bodyPr/>
+          <a:lstStyle/>
+          <a:p>
+            <a:fld id="{B19F9A7C-9B03-415C-A20A-13DDF9531281}" type="datetime1">
+              <a:rPr lang="it-IT" sz="1400" smtClean="0"/>
+              <a:t>12/04/2026</a:t>
+            </a:fld>
+            <a:endParaRPr lang="en-US" dirty="0"/>
+          </a:p>
+        </p:txBody>
+      </p:sp>
     </p:spTree>
     <p:extLst>
       <p:ext uri="{BB962C8B-B14F-4D97-AF65-F5344CB8AC3E}">
@@ -4587,14 +4972,14 @@
   <p:clrMapOvr>
     <a:overrideClrMapping bg1="dk1" tx1="lt1" bg2="dk2" tx2="lt2" accent1="accent1" accent2="accent2" accent3="accent3" accent4="accent4" accent5="accent5" accent6="accent6" hlink="hlink" folHlink="folHlink"/>
   </p:clrMapOvr>
-  <mc:AlternateContent xmlns:mc="http://schemas.openxmlformats.org/markup-compatibility/2006" xmlns:p159="http://schemas.microsoft.com/office/powerpoint/2015/09/main">
-    <mc:Choice Requires="p159">
-      <p:transition xmlns:p14="http://schemas.microsoft.com/office/powerpoint/2010/main" spd="slow" p14:dur="2000">
-        <p159:morph option="byObject"/>
+  <mc:AlternateContent xmlns:mc="http://schemas.openxmlformats.org/markup-compatibility/2006">
+    <mc:Choice xmlns:p14="http://schemas.microsoft.com/office/powerpoint/2010/main" Requires="p14">
+      <p:transition spd="med" p14:dur="700">
+        <p:fade/>
       </p:transition>
     </mc:Choice>
-    <mc:Fallback xmlns="">
-      <p:transition spd="slow">
+    <mc:Fallback>
+      <p:transition spd="med">
         <p:fade/>
       </p:transition>
     </mc:Fallback>
@@ -5115,6 +5500,35 @@
           </a:extLst>
         </p:spPr>
       </p:pic>
+      <p:sp>
+        <p:nvSpPr>
+          <p:cNvPr id="3" name="Segnaposto data 2">
+            <a:extLst>
+              <a:ext uri="{FF2B5EF4-FFF2-40B4-BE49-F238E27FC236}">
+                <a16:creationId xmlns:a16="http://schemas.microsoft.com/office/drawing/2014/main" id="{6DD42179-3B5D-4631-900A-DF9D894152BE}"/>
+              </a:ext>
+            </a:extLst>
+          </p:cNvPr>
+          <p:cNvSpPr>
+            <a:spLocks noGrp="1"/>
+          </p:cNvSpPr>
+          <p:nvPr>
+            <p:ph type="dt" sz="half" idx="10"/>
+          </p:nvPr>
+        </p:nvSpPr>
+        <p:spPr/>
+        <p:txBody>
+          <a:bodyPr/>
+          <a:lstStyle/>
+          <a:p>
+            <a:fld id="{ED602ACF-52CC-4020-BE7D-B5B6895516DC}" type="datetime1">
+              <a:rPr lang="it-IT" smtClean="0"/>
+              <a:t>12/04/2026</a:t>
+            </a:fld>
+            <a:endParaRPr lang="en-US"/>
+          </a:p>
+        </p:txBody>
+      </p:sp>
     </p:spTree>
     <p:extLst>
       <p:ext uri="{BB962C8B-B14F-4D97-AF65-F5344CB8AC3E}">
@@ -5148,6 +5562,6300 @@
         <p:cNvPr id="1" name="">
           <a:extLst>
             <a:ext uri="{FF2B5EF4-FFF2-40B4-BE49-F238E27FC236}">
+              <a16:creationId xmlns:a16="http://schemas.microsoft.com/office/drawing/2014/main" id="{A9A40015-C1AC-8A3B-6B3C-5CD77DE27006}"/>
+            </a:ext>
+          </a:extLst>
+        </p:cNvPr>
+        <p:cNvGrpSpPr/>
+        <p:nvPr/>
+      </p:nvGrpSpPr>
+      <p:grpSpPr>
+        <a:xfrm>
+          <a:off x="0" y="0"/>
+          <a:ext cx="0" cy="0"/>
+          <a:chOff x="0" y="0"/>
+          <a:chExt cx="0" cy="0"/>
+        </a:xfrm>
+      </p:grpSpPr>
+      <p:sp>
+        <p:nvSpPr>
+          <p:cNvPr id="2" name="Titolo 1">
+            <a:extLst>
+              <a:ext uri="{FF2B5EF4-FFF2-40B4-BE49-F238E27FC236}">
+                <a16:creationId xmlns:a16="http://schemas.microsoft.com/office/drawing/2014/main" id="{1F288E86-EB39-D1DE-AAC0-35B484C9785A}"/>
+              </a:ext>
+            </a:extLst>
+          </p:cNvPr>
+          <p:cNvSpPr>
+            <a:spLocks noGrp="1"/>
+          </p:cNvSpPr>
+          <p:nvPr>
+            <p:ph type="title"/>
+          </p:nvPr>
+        </p:nvSpPr>
+        <p:spPr>
+          <a:xfrm>
+            <a:off x="609600" y="589415"/>
+            <a:ext cx="10972800" cy="1325563"/>
+          </a:xfrm>
+        </p:spPr>
+        <p:txBody>
+          <a:bodyPr>
+            <a:normAutofit/>
+          </a:bodyPr>
+          <a:lstStyle/>
+          <a:p>
+            <a:r>
+              <a:rPr lang="it-IT" sz="6600" b="1" dirty="0"/>
+              <a:t>PARTIZIONE FISSA </a:t>
+            </a:r>
+            <a:endParaRPr lang="it-IT" sz="6600" b="1" dirty="0">
+              <a:cs typeface="Posterama"/>
+            </a:endParaRPr>
+          </a:p>
+        </p:txBody>
+      </p:sp>
+      <p:sp>
+        <p:nvSpPr>
+          <p:cNvPr id="4" name="CasellaDiTesto 3">
+            <a:extLst>
+              <a:ext uri="{FF2B5EF4-FFF2-40B4-BE49-F238E27FC236}">
+                <a16:creationId xmlns:a16="http://schemas.microsoft.com/office/drawing/2014/main" id="{F90A7D63-18ED-CFA7-939D-778AF44ABA9B}"/>
+              </a:ext>
+            </a:extLst>
+          </p:cNvPr>
+          <p:cNvSpPr txBox="1"/>
+          <p:nvPr/>
+        </p:nvSpPr>
+        <p:spPr>
+          <a:xfrm>
+            <a:off x="609600" y="2490281"/>
+            <a:ext cx="9294783" cy="1877437"/>
+          </a:xfrm>
+          <a:prstGeom prst="rect">
+            <a:avLst/>
+          </a:prstGeom>
+          <a:noFill/>
+        </p:spPr>
+        <p:txBody>
+          <a:bodyPr wrap="square" rtlCol="0">
+            <a:spAutoFit/>
+          </a:bodyPr>
+          <a:lstStyle/>
+          <a:p>
+            <a:pPr marL="285750" indent="-285750">
+              <a:buFont typeface="Arial" panose="020B0604020202020204" pitchFamily="34" charset="0"/>
+              <a:buChar char="•"/>
+            </a:pPr>
+            <a:r>
+              <a:rPr lang="it-IT" sz="2800" b="1" dirty="0"/>
+              <a:t>LA DIMENSIONE DELLA PARTIZIONE È GIÀ DEFINITA</a:t>
+            </a:r>
+          </a:p>
+          <a:p>
+            <a:pPr marL="742950" lvl="1" indent="-285750">
+              <a:buFont typeface="Arial" panose="020B0604020202020204" pitchFamily="34" charset="0"/>
+              <a:buChar char="•"/>
+            </a:pPr>
+            <a:r>
+              <a:rPr lang="it-IT" sz="2400" b="1" dirty="0"/>
+              <a:t>Frammentazione interna</a:t>
+            </a:r>
+          </a:p>
+          <a:p>
+            <a:pPr marL="742950" lvl="1" indent="-285750">
+              <a:buFont typeface="Arial" panose="020B0604020202020204" pitchFamily="34" charset="0"/>
+              <a:buChar char="•"/>
+            </a:pPr>
+            <a:r>
+              <a:rPr lang="it-IT" sz="2400" b="1" dirty="0"/>
+              <a:t>Frammentazione esterna</a:t>
+            </a:r>
+          </a:p>
+          <a:p>
+            <a:pPr marL="285750" indent="-285750">
+              <a:buFont typeface="Arial" panose="020B0604020202020204" pitchFamily="34" charset="0"/>
+              <a:buChar char="•"/>
+            </a:pPr>
+            <a:endParaRPr lang="it-IT" sz="3600" dirty="0"/>
+          </a:p>
+        </p:txBody>
+      </p:sp>
+      <p:sp>
+        <p:nvSpPr>
+          <p:cNvPr id="3" name="Segnaposto data 2">
+            <a:extLst>
+              <a:ext uri="{FF2B5EF4-FFF2-40B4-BE49-F238E27FC236}">
+                <a16:creationId xmlns:a16="http://schemas.microsoft.com/office/drawing/2014/main" id="{AA162EE9-67C8-0B0C-4C49-4F1876F2A09D}"/>
+              </a:ext>
+            </a:extLst>
+          </p:cNvPr>
+          <p:cNvSpPr>
+            <a:spLocks noGrp="1"/>
+          </p:cNvSpPr>
+          <p:nvPr>
+            <p:ph type="dt" sz="half" idx="10"/>
+          </p:nvPr>
+        </p:nvSpPr>
+        <p:spPr/>
+        <p:txBody>
+          <a:bodyPr/>
+          <a:lstStyle/>
+          <a:p>
+            <a:fld id="{A926690C-7C63-4D9C-BB1C-7BE3C87A4DA0}" type="datetime1">
+              <a:rPr lang="it-IT" smtClean="0"/>
+              <a:t>12/04/2026</a:t>
+            </a:fld>
+            <a:endParaRPr lang="en-US"/>
+          </a:p>
+        </p:txBody>
+      </p:sp>
+    </p:spTree>
+    <p:extLst>
+      <p:ext uri="{BB962C8B-B14F-4D97-AF65-F5344CB8AC3E}">
+        <p14:creationId xmlns:p14="http://schemas.microsoft.com/office/powerpoint/2010/main" val="277174174"/>
+      </p:ext>
+    </p:extLst>
+  </p:cSld>
+  <p:clrMapOvr>
+    <a:masterClrMapping/>
+  </p:clrMapOvr>
+  <mc:AlternateContent xmlns:mc="http://schemas.openxmlformats.org/markup-compatibility/2006">
+    <mc:Choice xmlns:p159="http://schemas.microsoft.com/office/powerpoint/2015/09/main" Requires="p159">
+      <p:transition xmlns:p14="http://schemas.microsoft.com/office/powerpoint/2010/main" spd="slow" p14:dur="2000">
+        <p159:morph option="byObject"/>
+      </p:transition>
+    </mc:Choice>
+    <mc:Fallback>
+      <p:transition spd="slow">
+        <p:fade/>
+      </p:transition>
+    </mc:Fallback>
+  </mc:AlternateContent>
+</p:sld>
+</file>
+
+<file path=ppt/slides/slide12.xml><?xml version="1.0" encoding="utf-8"?>
+<p:sld xmlns:a="http://schemas.openxmlformats.org/drawingml/2006/main" xmlns:r="http://schemas.openxmlformats.org/officeDocument/2006/relationships" xmlns:p="http://schemas.openxmlformats.org/presentationml/2006/main">
+  <p:cSld>
+    <p:spTree>
+      <p:nvGrpSpPr>
+        <p:cNvPr id="1" name="">
+          <a:extLst>
+            <a:ext uri="{FF2B5EF4-FFF2-40B4-BE49-F238E27FC236}">
+              <a16:creationId xmlns:a16="http://schemas.microsoft.com/office/drawing/2014/main" id="{3DBDE2ED-E64E-6C50-76EF-8349B6F3019D}"/>
+            </a:ext>
+          </a:extLst>
+        </p:cNvPr>
+        <p:cNvGrpSpPr/>
+        <p:nvPr/>
+      </p:nvGrpSpPr>
+      <p:grpSpPr>
+        <a:xfrm>
+          <a:off x="0" y="0"/>
+          <a:ext cx="0" cy="0"/>
+          <a:chOff x="0" y="0"/>
+          <a:chExt cx="0" cy="0"/>
+        </a:xfrm>
+      </p:grpSpPr>
+      <p:sp>
+        <p:nvSpPr>
+          <p:cNvPr id="2" name="Titolo 1">
+            <a:extLst>
+              <a:ext uri="{FF2B5EF4-FFF2-40B4-BE49-F238E27FC236}">
+                <a16:creationId xmlns:a16="http://schemas.microsoft.com/office/drawing/2014/main" id="{CE250072-3FB2-AE3A-8125-3BFF8D739581}"/>
+              </a:ext>
+            </a:extLst>
+          </p:cNvPr>
+          <p:cNvSpPr>
+            <a:spLocks noGrp="1"/>
+          </p:cNvSpPr>
+          <p:nvPr>
+            <p:ph type="title"/>
+          </p:nvPr>
+        </p:nvSpPr>
+        <p:spPr>
+          <a:xfrm>
+            <a:off x="906780" y="812923"/>
+            <a:ext cx="10972800" cy="1325563"/>
+          </a:xfrm>
+        </p:spPr>
+        <p:txBody>
+          <a:bodyPr>
+            <a:normAutofit/>
+          </a:bodyPr>
+          <a:lstStyle/>
+          <a:p>
+            <a:r>
+              <a:rPr lang="it-IT" sz="6600" b="1" dirty="0"/>
+              <a:t>PARTIZIONE VARIABILE </a:t>
+            </a:r>
+            <a:endParaRPr lang="it-IT" sz="6600" b="1" dirty="0">
+              <a:cs typeface="Posterama"/>
+            </a:endParaRPr>
+          </a:p>
+        </p:txBody>
+      </p:sp>
+      <p:sp>
+        <p:nvSpPr>
+          <p:cNvPr id="4" name="CasellaDiTesto 3">
+            <a:extLst>
+              <a:ext uri="{FF2B5EF4-FFF2-40B4-BE49-F238E27FC236}">
+                <a16:creationId xmlns:a16="http://schemas.microsoft.com/office/drawing/2014/main" id="{A1F57201-87BF-F66B-63EF-9627A7B9672A}"/>
+              </a:ext>
+            </a:extLst>
+          </p:cNvPr>
+          <p:cNvSpPr txBox="1"/>
+          <p:nvPr/>
+        </p:nvSpPr>
+        <p:spPr>
+          <a:xfrm>
+            <a:off x="1030514" y="2461252"/>
+            <a:ext cx="10130971" cy="2246769"/>
+          </a:xfrm>
+          <a:prstGeom prst="rect">
+            <a:avLst/>
+          </a:prstGeom>
+          <a:noFill/>
+        </p:spPr>
+        <p:txBody>
+          <a:bodyPr wrap="square" rtlCol="0">
+            <a:spAutoFit/>
+          </a:bodyPr>
+          <a:lstStyle/>
+          <a:p>
+            <a:pPr marL="285750" indent="-285750">
+              <a:buFont typeface="Arial" panose="020B0604020202020204" pitchFamily="34" charset="0"/>
+              <a:buChar char="•"/>
+            </a:pPr>
+            <a:r>
+              <a:rPr lang="it-IT" sz="2800" b="1" dirty="0"/>
+              <a:t>LA DIMENSIONE DELLA PARTIZIONE Può ESSERE MODIFICATA</a:t>
+            </a:r>
+          </a:p>
+          <a:p>
+            <a:pPr marL="742950" lvl="1" indent="-285750">
+              <a:buFont typeface="Arial" panose="020B0604020202020204" pitchFamily="34" charset="0"/>
+              <a:buChar char="•"/>
+            </a:pPr>
+            <a:r>
+              <a:rPr lang="it-IT" sz="2800" b="1" dirty="0"/>
+              <a:t>First </a:t>
+            </a:r>
+            <a:r>
+              <a:rPr lang="it-IT" sz="2800" b="1" dirty="0" err="1"/>
+              <a:t>fit</a:t>
+            </a:r>
+            <a:endParaRPr lang="it-IT" sz="2800" b="1" dirty="0"/>
+          </a:p>
+          <a:p>
+            <a:pPr marL="742950" lvl="1" indent="-285750">
+              <a:buFont typeface="Arial" panose="020B0604020202020204" pitchFamily="34" charset="0"/>
+              <a:buChar char="•"/>
+            </a:pPr>
+            <a:r>
+              <a:rPr lang="it-IT" sz="2800" b="1" dirty="0"/>
+              <a:t>Best </a:t>
+            </a:r>
+            <a:r>
+              <a:rPr lang="it-IT" sz="2800" b="1" dirty="0" err="1"/>
+              <a:t>fit</a:t>
+            </a:r>
+            <a:endParaRPr lang="it-IT" sz="2800" b="1" dirty="0"/>
+          </a:p>
+          <a:p>
+            <a:pPr marL="742950" lvl="1" indent="-285750">
+              <a:buFont typeface="Arial" panose="020B0604020202020204" pitchFamily="34" charset="0"/>
+              <a:buChar char="•"/>
+            </a:pPr>
+            <a:r>
+              <a:rPr lang="it-IT" sz="2800" b="1" dirty="0"/>
+              <a:t>Next </a:t>
+            </a:r>
+            <a:r>
+              <a:rPr lang="it-IT" sz="2800" b="1" dirty="0" err="1"/>
+              <a:t>fit</a:t>
+            </a:r>
+            <a:endParaRPr lang="it-IT" sz="2800" b="1" dirty="0"/>
+          </a:p>
+          <a:p>
+            <a:pPr marL="742950" lvl="1" indent="-285750">
+              <a:buFont typeface="Arial" panose="020B0604020202020204" pitchFamily="34" charset="0"/>
+              <a:buChar char="•"/>
+            </a:pPr>
+            <a:r>
+              <a:rPr lang="it-IT" sz="2800" b="1" dirty="0" err="1"/>
+              <a:t>Worst</a:t>
+            </a:r>
+            <a:r>
+              <a:rPr lang="it-IT" sz="2800" b="1" dirty="0"/>
+              <a:t> </a:t>
+            </a:r>
+            <a:r>
+              <a:rPr lang="it-IT" sz="2800" b="1" dirty="0" err="1"/>
+              <a:t>fit</a:t>
+            </a:r>
+            <a:endParaRPr lang="it-IT" sz="2800" b="1" dirty="0"/>
+          </a:p>
+        </p:txBody>
+      </p:sp>
+      <p:sp>
+        <p:nvSpPr>
+          <p:cNvPr id="3" name="Segnaposto data 2">
+            <a:extLst>
+              <a:ext uri="{FF2B5EF4-FFF2-40B4-BE49-F238E27FC236}">
+                <a16:creationId xmlns:a16="http://schemas.microsoft.com/office/drawing/2014/main" id="{9F905636-194A-F47B-8F3F-62DE5B835155}"/>
+              </a:ext>
+            </a:extLst>
+          </p:cNvPr>
+          <p:cNvSpPr>
+            <a:spLocks noGrp="1"/>
+          </p:cNvSpPr>
+          <p:nvPr>
+            <p:ph type="dt" sz="half" idx="10"/>
+          </p:nvPr>
+        </p:nvSpPr>
+        <p:spPr/>
+        <p:txBody>
+          <a:bodyPr/>
+          <a:lstStyle/>
+          <a:p>
+            <a:fld id="{62CB12B2-0025-4A86-BE42-B942EACE0A5F}" type="datetime1">
+              <a:rPr lang="it-IT" smtClean="0"/>
+              <a:t>12/04/2026</a:t>
+            </a:fld>
+            <a:endParaRPr lang="en-US"/>
+          </a:p>
+        </p:txBody>
+      </p:sp>
+    </p:spTree>
+    <p:extLst>
+      <p:ext uri="{BB962C8B-B14F-4D97-AF65-F5344CB8AC3E}">
+        <p14:creationId xmlns:p14="http://schemas.microsoft.com/office/powerpoint/2010/main" val="2017999786"/>
+      </p:ext>
+    </p:extLst>
+  </p:cSld>
+  <p:clrMapOvr>
+    <a:masterClrMapping/>
+  </p:clrMapOvr>
+  <mc:AlternateContent xmlns:mc="http://schemas.openxmlformats.org/markup-compatibility/2006">
+    <mc:Choice xmlns:p159="http://schemas.microsoft.com/office/powerpoint/2015/09/main" Requires="p159">
+      <p:transition xmlns:p14="http://schemas.microsoft.com/office/powerpoint/2010/main" spd="slow" p14:dur="2000">
+        <p159:morph option="byObject"/>
+      </p:transition>
+    </mc:Choice>
+    <mc:Fallback>
+      <p:transition spd="slow">
+        <p:fade/>
+      </p:transition>
+    </mc:Fallback>
+  </mc:AlternateContent>
+</p:sld>
+</file>
+
+<file path=ppt/slides/slide13.xml><?xml version="1.0" encoding="utf-8"?>
+<p:sld xmlns:a="http://schemas.openxmlformats.org/drawingml/2006/main" xmlns:r="http://schemas.openxmlformats.org/officeDocument/2006/relationships" xmlns:p="http://schemas.openxmlformats.org/presentationml/2006/main">
+  <p:cSld>
+    <p:spTree>
+      <p:nvGrpSpPr>
+        <p:cNvPr id="1" name="">
+          <a:extLst>
+            <a:ext uri="{FF2B5EF4-FFF2-40B4-BE49-F238E27FC236}">
+              <a16:creationId xmlns:a16="http://schemas.microsoft.com/office/drawing/2014/main" id="{4C9B68BE-6774-552D-32F2-D1781CDCA7CF}"/>
+            </a:ext>
+          </a:extLst>
+        </p:cNvPr>
+        <p:cNvGrpSpPr/>
+        <p:nvPr/>
+      </p:nvGrpSpPr>
+      <p:grpSpPr>
+        <a:xfrm>
+          <a:off x="0" y="0"/>
+          <a:ext cx="0" cy="0"/>
+          <a:chOff x="0" y="0"/>
+          <a:chExt cx="0" cy="0"/>
+        </a:xfrm>
+      </p:grpSpPr>
+      <p:sp>
+        <p:nvSpPr>
+          <p:cNvPr id="2" name="Titolo 1">
+            <a:extLst>
+              <a:ext uri="{FF2B5EF4-FFF2-40B4-BE49-F238E27FC236}">
+                <a16:creationId xmlns:a16="http://schemas.microsoft.com/office/drawing/2014/main" id="{A587BB4D-7E3A-5798-3593-8D0B524CF475}"/>
+              </a:ext>
+            </a:extLst>
+          </p:cNvPr>
+          <p:cNvSpPr>
+            <a:spLocks noGrp="1"/>
+          </p:cNvSpPr>
+          <p:nvPr>
+            <p:ph type="title"/>
+          </p:nvPr>
+        </p:nvSpPr>
+        <p:spPr>
+          <a:xfrm>
+            <a:off x="906780" y="812923"/>
+            <a:ext cx="10972800" cy="1325563"/>
+          </a:xfrm>
+        </p:spPr>
+        <p:txBody>
+          <a:bodyPr>
+            <a:normAutofit/>
+          </a:bodyPr>
+          <a:lstStyle/>
+          <a:p>
+            <a:r>
+              <a:rPr lang="it-IT" sz="6600" b="1" dirty="0"/>
+              <a:t>PAGINAZIONE</a:t>
+            </a:r>
+            <a:endParaRPr lang="it-IT" sz="6600" b="1" dirty="0">
+              <a:cs typeface="Posterama"/>
+            </a:endParaRPr>
+          </a:p>
+        </p:txBody>
+      </p:sp>
+      <p:sp>
+        <p:nvSpPr>
+          <p:cNvPr id="4" name="CasellaDiTesto 3">
+            <a:extLst>
+              <a:ext uri="{FF2B5EF4-FFF2-40B4-BE49-F238E27FC236}">
+                <a16:creationId xmlns:a16="http://schemas.microsoft.com/office/drawing/2014/main" id="{2A293B1D-10A7-69CA-1664-5B7FE460F724}"/>
+              </a:ext>
+            </a:extLst>
+          </p:cNvPr>
+          <p:cNvSpPr txBox="1"/>
+          <p:nvPr/>
+        </p:nvSpPr>
+        <p:spPr>
+          <a:xfrm>
+            <a:off x="1030514" y="2461252"/>
+            <a:ext cx="10130971" cy="523220"/>
+          </a:xfrm>
+          <a:prstGeom prst="rect">
+            <a:avLst/>
+          </a:prstGeom>
+          <a:noFill/>
+        </p:spPr>
+        <p:txBody>
+          <a:bodyPr wrap="square" rtlCol="0">
+            <a:spAutoFit/>
+          </a:bodyPr>
+          <a:lstStyle/>
+          <a:p>
+            <a:pPr marL="285750" indent="-285750">
+              <a:buFont typeface="Arial" panose="020B0604020202020204" pitchFamily="34" charset="0"/>
+              <a:buChar char="•"/>
+            </a:pPr>
+            <a:r>
+              <a:rPr lang="it-IT" sz="2800" b="1" dirty="0"/>
+              <a:t>Programmi e memoria sono organizzati in pagine</a:t>
+            </a:r>
+          </a:p>
+        </p:txBody>
+      </p:sp>
+      <p:sp>
+        <p:nvSpPr>
+          <p:cNvPr id="3" name="Segnaposto data 2">
+            <a:extLst>
+              <a:ext uri="{FF2B5EF4-FFF2-40B4-BE49-F238E27FC236}">
+                <a16:creationId xmlns:a16="http://schemas.microsoft.com/office/drawing/2014/main" id="{1B066ED1-00A6-A747-0BAF-D059B417F28B}"/>
+              </a:ext>
+            </a:extLst>
+          </p:cNvPr>
+          <p:cNvSpPr>
+            <a:spLocks noGrp="1"/>
+          </p:cNvSpPr>
+          <p:nvPr>
+            <p:ph type="dt" sz="half" idx="10"/>
+          </p:nvPr>
+        </p:nvSpPr>
+        <p:spPr/>
+        <p:txBody>
+          <a:bodyPr/>
+          <a:lstStyle/>
+          <a:p>
+            <a:fld id="{62CB12B2-0025-4A86-BE42-B942EACE0A5F}" type="datetime1">
+              <a:rPr lang="it-IT" smtClean="0"/>
+              <a:t>12/04/2026</a:t>
+            </a:fld>
+            <a:endParaRPr lang="en-US"/>
+          </a:p>
+        </p:txBody>
+      </p:sp>
+      <p:graphicFrame>
+        <p:nvGraphicFramePr>
+          <p:cNvPr id="6" name="Tabella 5">
+            <a:extLst>
+              <a:ext uri="{FF2B5EF4-FFF2-40B4-BE49-F238E27FC236}">
+                <a16:creationId xmlns:a16="http://schemas.microsoft.com/office/drawing/2014/main" id="{8A295571-F329-7348-4CB1-F748AA28CC4B}"/>
+              </a:ext>
+            </a:extLst>
+          </p:cNvPr>
+          <p:cNvGraphicFramePr>
+            <a:graphicFrameLocks noGrp="1"/>
+          </p:cNvGraphicFramePr>
+          <p:nvPr>
+            <p:extLst>
+              <p:ext uri="{D42A27DB-BD31-4B8C-83A1-F6EECF244321}">
+                <p14:modId xmlns:p14="http://schemas.microsoft.com/office/powerpoint/2010/main" val="4276924990"/>
+              </p:ext>
+            </p:extLst>
+          </p:nvPr>
+        </p:nvGraphicFramePr>
+        <p:xfrm>
+          <a:off x="1342934" y="3177697"/>
+          <a:ext cx="8128000" cy="695831"/>
+        </p:xfrm>
+        <a:graphic>
+          <a:graphicData uri="http://schemas.openxmlformats.org/drawingml/2006/table">
+            <a:tbl>
+              <a:tblPr firstRow="1" bandRow="1">
+                <a:tableStyleId>{5C22544A-7EE6-4342-B048-85BDC9FD1C3A}</a:tableStyleId>
+              </a:tblPr>
+              <a:tblGrid>
+                <a:gridCol w="812800">
+                  <a:extLst>
+                    <a:ext uri="{9D8B030D-6E8A-4147-A177-3AD203B41FA5}">
+                      <a16:colId xmlns:a16="http://schemas.microsoft.com/office/drawing/2014/main" val="1694205"/>
+                    </a:ext>
+                  </a:extLst>
+                </a:gridCol>
+                <a:gridCol w="812800">
+                  <a:extLst>
+                    <a:ext uri="{9D8B030D-6E8A-4147-A177-3AD203B41FA5}">
+                      <a16:colId xmlns:a16="http://schemas.microsoft.com/office/drawing/2014/main" val="2408768007"/>
+                    </a:ext>
+                  </a:extLst>
+                </a:gridCol>
+                <a:gridCol w="812800">
+                  <a:extLst>
+                    <a:ext uri="{9D8B030D-6E8A-4147-A177-3AD203B41FA5}">
+                      <a16:colId xmlns:a16="http://schemas.microsoft.com/office/drawing/2014/main" val="3916070965"/>
+                    </a:ext>
+                  </a:extLst>
+                </a:gridCol>
+                <a:gridCol w="812800">
+                  <a:extLst>
+                    <a:ext uri="{9D8B030D-6E8A-4147-A177-3AD203B41FA5}">
+                      <a16:colId xmlns:a16="http://schemas.microsoft.com/office/drawing/2014/main" val="2884860139"/>
+                    </a:ext>
+                  </a:extLst>
+                </a:gridCol>
+                <a:gridCol w="812800">
+                  <a:extLst>
+                    <a:ext uri="{9D8B030D-6E8A-4147-A177-3AD203B41FA5}">
+                      <a16:colId xmlns:a16="http://schemas.microsoft.com/office/drawing/2014/main" val="2083948861"/>
+                    </a:ext>
+                  </a:extLst>
+                </a:gridCol>
+                <a:gridCol w="812800">
+                  <a:extLst>
+                    <a:ext uri="{9D8B030D-6E8A-4147-A177-3AD203B41FA5}">
+                      <a16:colId xmlns:a16="http://schemas.microsoft.com/office/drawing/2014/main" val="2358120665"/>
+                    </a:ext>
+                  </a:extLst>
+                </a:gridCol>
+                <a:gridCol w="812800">
+                  <a:extLst>
+                    <a:ext uri="{9D8B030D-6E8A-4147-A177-3AD203B41FA5}">
+                      <a16:colId xmlns:a16="http://schemas.microsoft.com/office/drawing/2014/main" val="4245474789"/>
+                    </a:ext>
+                  </a:extLst>
+                </a:gridCol>
+                <a:gridCol w="812800">
+                  <a:extLst>
+                    <a:ext uri="{9D8B030D-6E8A-4147-A177-3AD203B41FA5}">
+                      <a16:colId xmlns:a16="http://schemas.microsoft.com/office/drawing/2014/main" val="1139398879"/>
+                    </a:ext>
+                  </a:extLst>
+                </a:gridCol>
+                <a:gridCol w="812800">
+                  <a:extLst>
+                    <a:ext uri="{9D8B030D-6E8A-4147-A177-3AD203B41FA5}">
+                      <a16:colId xmlns:a16="http://schemas.microsoft.com/office/drawing/2014/main" val="298107426"/>
+                    </a:ext>
+                  </a:extLst>
+                </a:gridCol>
+                <a:gridCol w="812800">
+                  <a:extLst>
+                    <a:ext uri="{9D8B030D-6E8A-4147-A177-3AD203B41FA5}">
+                      <a16:colId xmlns:a16="http://schemas.microsoft.com/office/drawing/2014/main" val="1975393176"/>
+                    </a:ext>
+                  </a:extLst>
+                </a:gridCol>
+              </a:tblGrid>
+              <a:tr h="695831">
+                <a:tc>
+                  <a:txBody>
+                    <a:bodyPr/>
+                    <a:lstStyle/>
+                    <a:p>
+                      <a:endParaRPr lang="it-IT" dirty="0"/>
+                    </a:p>
+                  </a:txBody>
+                  <a:tcPr>
+                    <a:lnL w="12700" cap="flat" cmpd="sng" algn="ctr">
+                      <a:solidFill>
+                        <a:schemeClr val="tx1"/>
+                      </a:solidFill>
+                      <a:prstDash val="solid"/>
+                      <a:round/>
+                      <a:headEnd type="none" w="med" len="med"/>
+                      <a:tailEnd type="none" w="med" len="med"/>
+                    </a:lnL>
+                    <a:lnR w="12700" cap="flat" cmpd="sng" algn="ctr">
+                      <a:solidFill>
+                        <a:schemeClr val="tx1"/>
+                      </a:solidFill>
+                      <a:prstDash val="solid"/>
+                      <a:round/>
+                      <a:headEnd type="none" w="med" len="med"/>
+                      <a:tailEnd type="none" w="med" len="med"/>
+                    </a:lnR>
+                    <a:lnT w="12700" cap="flat" cmpd="sng" algn="ctr">
+                      <a:solidFill>
+                        <a:schemeClr val="tx1"/>
+                      </a:solidFill>
+                      <a:prstDash val="solid"/>
+                      <a:round/>
+                      <a:headEnd type="none" w="med" len="med"/>
+                      <a:tailEnd type="none" w="med" len="med"/>
+                    </a:lnT>
+                    <a:lnB w="12700" cap="flat" cmpd="sng" algn="ctr">
+                      <a:solidFill>
+                        <a:schemeClr val="tx1"/>
+                      </a:solidFill>
+                      <a:prstDash val="solid"/>
+                      <a:round/>
+                      <a:headEnd type="none" w="med" len="med"/>
+                      <a:tailEnd type="none" w="med" len="med"/>
+                    </a:lnB>
+                    <a:solidFill>
+                      <a:schemeClr val="accent1">
+                        <a:lumMod val="60000"/>
+                        <a:lumOff val="40000"/>
+                      </a:schemeClr>
+                    </a:solidFill>
+                  </a:tcPr>
+                </a:tc>
+                <a:tc>
+                  <a:txBody>
+                    <a:bodyPr/>
+                    <a:lstStyle/>
+                    <a:p>
+                      <a:endParaRPr lang="it-IT" dirty="0"/>
+                    </a:p>
+                  </a:txBody>
+                  <a:tcPr>
+                    <a:lnL w="12700" cap="flat" cmpd="sng" algn="ctr">
+                      <a:solidFill>
+                        <a:schemeClr val="tx1"/>
+                      </a:solidFill>
+                      <a:prstDash val="solid"/>
+                      <a:round/>
+                      <a:headEnd type="none" w="med" len="med"/>
+                      <a:tailEnd type="none" w="med" len="med"/>
+                    </a:lnL>
+                    <a:lnR w="12700" cap="flat" cmpd="sng" algn="ctr">
+                      <a:solidFill>
+                        <a:schemeClr val="tx1"/>
+                      </a:solidFill>
+                      <a:prstDash val="solid"/>
+                      <a:round/>
+                      <a:headEnd type="none" w="med" len="med"/>
+                      <a:tailEnd type="none" w="med" len="med"/>
+                    </a:lnR>
+                    <a:lnT w="12700" cap="flat" cmpd="sng" algn="ctr">
+                      <a:solidFill>
+                        <a:schemeClr val="tx1"/>
+                      </a:solidFill>
+                      <a:prstDash val="solid"/>
+                      <a:round/>
+                      <a:headEnd type="none" w="med" len="med"/>
+                      <a:tailEnd type="none" w="med" len="med"/>
+                    </a:lnT>
+                    <a:lnB w="12700" cap="flat" cmpd="sng" algn="ctr">
+                      <a:solidFill>
+                        <a:schemeClr val="tx1"/>
+                      </a:solidFill>
+                      <a:prstDash val="solid"/>
+                      <a:round/>
+                      <a:headEnd type="none" w="med" len="med"/>
+                      <a:tailEnd type="none" w="med" len="med"/>
+                    </a:lnB>
+                    <a:solidFill>
+                      <a:schemeClr val="accent1">
+                        <a:lumMod val="60000"/>
+                        <a:lumOff val="40000"/>
+                      </a:schemeClr>
+                    </a:solidFill>
+                  </a:tcPr>
+                </a:tc>
+                <a:tc>
+                  <a:txBody>
+                    <a:bodyPr/>
+                    <a:lstStyle/>
+                    <a:p>
+                      <a:endParaRPr lang="it-IT" dirty="0"/>
+                    </a:p>
+                  </a:txBody>
+                  <a:tcPr>
+                    <a:lnL w="12700" cap="flat" cmpd="sng" algn="ctr">
+                      <a:solidFill>
+                        <a:schemeClr val="tx1"/>
+                      </a:solidFill>
+                      <a:prstDash val="solid"/>
+                      <a:round/>
+                      <a:headEnd type="none" w="med" len="med"/>
+                      <a:tailEnd type="none" w="med" len="med"/>
+                    </a:lnL>
+                    <a:lnR w="12700" cap="flat" cmpd="sng" algn="ctr">
+                      <a:solidFill>
+                        <a:schemeClr val="tx1"/>
+                      </a:solidFill>
+                      <a:prstDash val="solid"/>
+                      <a:round/>
+                      <a:headEnd type="none" w="med" len="med"/>
+                      <a:tailEnd type="none" w="med" len="med"/>
+                    </a:lnR>
+                    <a:lnT w="12700" cap="flat" cmpd="sng" algn="ctr">
+                      <a:solidFill>
+                        <a:schemeClr val="tx1"/>
+                      </a:solidFill>
+                      <a:prstDash val="solid"/>
+                      <a:round/>
+                      <a:headEnd type="none" w="med" len="med"/>
+                      <a:tailEnd type="none" w="med" len="med"/>
+                    </a:lnT>
+                    <a:lnB w="12700" cap="flat" cmpd="sng" algn="ctr">
+                      <a:solidFill>
+                        <a:schemeClr val="tx1"/>
+                      </a:solidFill>
+                      <a:prstDash val="solid"/>
+                      <a:round/>
+                      <a:headEnd type="none" w="med" len="med"/>
+                      <a:tailEnd type="none" w="med" len="med"/>
+                    </a:lnB>
+                    <a:solidFill>
+                      <a:schemeClr val="accent1">
+                        <a:lumMod val="60000"/>
+                        <a:lumOff val="40000"/>
+                      </a:schemeClr>
+                    </a:solidFill>
+                  </a:tcPr>
+                </a:tc>
+                <a:tc>
+                  <a:txBody>
+                    <a:bodyPr/>
+                    <a:lstStyle/>
+                    <a:p>
+                      <a:endParaRPr lang="it-IT" dirty="0"/>
+                    </a:p>
+                  </a:txBody>
+                  <a:tcPr>
+                    <a:lnL w="12700" cap="flat" cmpd="sng" algn="ctr">
+                      <a:solidFill>
+                        <a:schemeClr val="tx1"/>
+                      </a:solidFill>
+                      <a:prstDash val="solid"/>
+                      <a:round/>
+                      <a:headEnd type="none" w="med" len="med"/>
+                      <a:tailEnd type="none" w="med" len="med"/>
+                    </a:lnL>
+                    <a:lnR w="12700" cap="flat" cmpd="sng" algn="ctr">
+                      <a:solidFill>
+                        <a:schemeClr val="tx1"/>
+                      </a:solidFill>
+                      <a:prstDash val="solid"/>
+                      <a:round/>
+                      <a:headEnd type="none" w="med" len="med"/>
+                      <a:tailEnd type="none" w="med" len="med"/>
+                    </a:lnR>
+                    <a:lnT w="12700" cap="flat" cmpd="sng" algn="ctr">
+                      <a:solidFill>
+                        <a:schemeClr val="tx1"/>
+                      </a:solidFill>
+                      <a:prstDash val="solid"/>
+                      <a:round/>
+                      <a:headEnd type="none" w="med" len="med"/>
+                      <a:tailEnd type="none" w="med" len="med"/>
+                    </a:lnT>
+                    <a:lnB w="12700" cap="flat" cmpd="sng" algn="ctr">
+                      <a:solidFill>
+                        <a:schemeClr val="tx1"/>
+                      </a:solidFill>
+                      <a:prstDash val="solid"/>
+                      <a:round/>
+                      <a:headEnd type="none" w="med" len="med"/>
+                      <a:tailEnd type="none" w="med" len="med"/>
+                    </a:lnB>
+                    <a:solidFill>
+                      <a:schemeClr val="tx2">
+                        <a:lumMod val="40000"/>
+                        <a:lumOff val="60000"/>
+                      </a:schemeClr>
+                    </a:solidFill>
+                  </a:tcPr>
+                </a:tc>
+                <a:tc>
+                  <a:txBody>
+                    <a:bodyPr/>
+                    <a:lstStyle/>
+                    <a:p>
+                      <a:endParaRPr lang="it-IT" dirty="0"/>
+                    </a:p>
+                  </a:txBody>
+                  <a:tcPr>
+                    <a:lnL w="12700" cap="flat" cmpd="sng" algn="ctr">
+                      <a:solidFill>
+                        <a:schemeClr val="tx1"/>
+                      </a:solidFill>
+                      <a:prstDash val="solid"/>
+                      <a:round/>
+                      <a:headEnd type="none" w="med" len="med"/>
+                      <a:tailEnd type="none" w="med" len="med"/>
+                    </a:lnL>
+                    <a:lnR w="12700" cap="flat" cmpd="sng" algn="ctr">
+                      <a:solidFill>
+                        <a:schemeClr val="tx1"/>
+                      </a:solidFill>
+                      <a:prstDash val="solid"/>
+                      <a:round/>
+                      <a:headEnd type="none" w="med" len="med"/>
+                      <a:tailEnd type="none" w="med" len="med"/>
+                    </a:lnR>
+                    <a:lnT w="12700" cap="flat" cmpd="sng" algn="ctr">
+                      <a:solidFill>
+                        <a:schemeClr val="tx1"/>
+                      </a:solidFill>
+                      <a:prstDash val="solid"/>
+                      <a:round/>
+                      <a:headEnd type="none" w="med" len="med"/>
+                      <a:tailEnd type="none" w="med" len="med"/>
+                    </a:lnT>
+                    <a:lnB w="12700" cap="flat" cmpd="sng" algn="ctr">
+                      <a:solidFill>
+                        <a:schemeClr val="tx1"/>
+                      </a:solidFill>
+                      <a:prstDash val="solid"/>
+                      <a:round/>
+                      <a:headEnd type="none" w="med" len="med"/>
+                      <a:tailEnd type="none" w="med" len="med"/>
+                    </a:lnB>
+                    <a:solidFill>
+                      <a:schemeClr val="tx2">
+                        <a:lumMod val="40000"/>
+                        <a:lumOff val="60000"/>
+                      </a:schemeClr>
+                    </a:solidFill>
+                  </a:tcPr>
+                </a:tc>
+                <a:tc>
+                  <a:txBody>
+                    <a:bodyPr/>
+                    <a:lstStyle/>
+                    <a:p>
+                      <a:endParaRPr lang="it-IT" dirty="0"/>
+                    </a:p>
+                  </a:txBody>
+                  <a:tcPr>
+                    <a:lnL w="12700" cap="flat" cmpd="sng" algn="ctr">
+                      <a:solidFill>
+                        <a:schemeClr val="tx1"/>
+                      </a:solidFill>
+                      <a:prstDash val="solid"/>
+                      <a:round/>
+                      <a:headEnd type="none" w="med" len="med"/>
+                      <a:tailEnd type="none" w="med" len="med"/>
+                    </a:lnL>
+                    <a:lnR w="12700" cap="flat" cmpd="sng" algn="ctr">
+                      <a:solidFill>
+                        <a:schemeClr val="tx1"/>
+                      </a:solidFill>
+                      <a:prstDash val="solid"/>
+                      <a:round/>
+                      <a:headEnd type="none" w="med" len="med"/>
+                      <a:tailEnd type="none" w="med" len="med"/>
+                    </a:lnR>
+                    <a:lnT w="12700" cap="flat" cmpd="sng" algn="ctr">
+                      <a:solidFill>
+                        <a:schemeClr val="tx1"/>
+                      </a:solidFill>
+                      <a:prstDash val="solid"/>
+                      <a:round/>
+                      <a:headEnd type="none" w="med" len="med"/>
+                      <a:tailEnd type="none" w="med" len="med"/>
+                    </a:lnT>
+                    <a:lnB w="12700" cap="flat" cmpd="sng" algn="ctr">
+                      <a:solidFill>
+                        <a:schemeClr val="tx1"/>
+                      </a:solidFill>
+                      <a:prstDash val="solid"/>
+                      <a:round/>
+                      <a:headEnd type="none" w="med" len="med"/>
+                      <a:tailEnd type="none" w="med" len="med"/>
+                    </a:lnB>
+                    <a:solidFill>
+                      <a:schemeClr val="bg1">
+                        <a:lumMod val="95000"/>
+                      </a:schemeClr>
+                    </a:solidFill>
+                  </a:tcPr>
+                </a:tc>
+                <a:tc>
+                  <a:txBody>
+                    <a:bodyPr/>
+                    <a:lstStyle/>
+                    <a:p>
+                      <a:endParaRPr lang="it-IT" dirty="0">
+                        <a:solidFill>
+                          <a:schemeClr val="bg2"/>
+                        </a:solidFill>
+                      </a:endParaRPr>
+                    </a:p>
+                  </a:txBody>
+                  <a:tcPr>
+                    <a:lnL w="12700" cap="flat" cmpd="sng" algn="ctr">
+                      <a:solidFill>
+                        <a:schemeClr val="tx1"/>
+                      </a:solidFill>
+                      <a:prstDash val="solid"/>
+                      <a:round/>
+                      <a:headEnd type="none" w="med" len="med"/>
+                      <a:tailEnd type="none" w="med" len="med"/>
+                    </a:lnL>
+                    <a:lnR w="12700" cap="flat" cmpd="sng" algn="ctr">
+                      <a:solidFill>
+                        <a:schemeClr val="tx1"/>
+                      </a:solidFill>
+                      <a:prstDash val="solid"/>
+                      <a:round/>
+                      <a:headEnd type="none" w="med" len="med"/>
+                      <a:tailEnd type="none" w="med" len="med"/>
+                    </a:lnR>
+                    <a:lnT w="12700" cap="flat" cmpd="sng" algn="ctr">
+                      <a:solidFill>
+                        <a:schemeClr val="tx1"/>
+                      </a:solidFill>
+                      <a:prstDash val="solid"/>
+                      <a:round/>
+                      <a:headEnd type="none" w="med" len="med"/>
+                      <a:tailEnd type="none" w="med" len="med"/>
+                    </a:lnT>
+                    <a:lnB w="12700" cap="flat" cmpd="sng" algn="ctr">
+                      <a:solidFill>
+                        <a:schemeClr val="tx1"/>
+                      </a:solidFill>
+                      <a:prstDash val="solid"/>
+                      <a:round/>
+                      <a:headEnd type="none" w="med" len="med"/>
+                      <a:tailEnd type="none" w="med" len="med"/>
+                    </a:lnB>
+                    <a:solidFill>
+                      <a:schemeClr val="bg1">
+                        <a:lumMod val="95000"/>
+                      </a:schemeClr>
+                    </a:solidFill>
+                  </a:tcPr>
+                </a:tc>
+                <a:tc>
+                  <a:txBody>
+                    <a:bodyPr/>
+                    <a:lstStyle/>
+                    <a:p>
+                      <a:endParaRPr lang="it-IT" dirty="0"/>
+                    </a:p>
+                  </a:txBody>
+                  <a:tcPr>
+                    <a:lnL w="12700" cap="flat" cmpd="sng" algn="ctr">
+                      <a:solidFill>
+                        <a:schemeClr val="tx1"/>
+                      </a:solidFill>
+                      <a:prstDash val="solid"/>
+                      <a:round/>
+                      <a:headEnd type="none" w="med" len="med"/>
+                      <a:tailEnd type="none" w="med" len="med"/>
+                    </a:lnL>
+                    <a:lnR w="12700" cap="flat" cmpd="sng" algn="ctr">
+                      <a:solidFill>
+                        <a:schemeClr val="tx1"/>
+                      </a:solidFill>
+                      <a:prstDash val="solid"/>
+                      <a:round/>
+                      <a:headEnd type="none" w="med" len="med"/>
+                      <a:tailEnd type="none" w="med" len="med"/>
+                    </a:lnR>
+                    <a:lnT w="12700" cap="flat" cmpd="sng" algn="ctr">
+                      <a:solidFill>
+                        <a:schemeClr val="tx1"/>
+                      </a:solidFill>
+                      <a:prstDash val="solid"/>
+                      <a:round/>
+                      <a:headEnd type="none" w="med" len="med"/>
+                      <a:tailEnd type="none" w="med" len="med"/>
+                    </a:lnT>
+                    <a:lnB w="12700" cap="flat" cmpd="sng" algn="ctr">
+                      <a:solidFill>
+                        <a:schemeClr val="tx1"/>
+                      </a:solidFill>
+                      <a:prstDash val="solid"/>
+                      <a:round/>
+                      <a:headEnd type="none" w="med" len="med"/>
+                      <a:tailEnd type="none" w="med" len="med"/>
+                    </a:lnB>
+                    <a:solidFill>
+                      <a:schemeClr val="bg1">
+                        <a:lumMod val="95000"/>
+                      </a:schemeClr>
+                    </a:solidFill>
+                  </a:tcPr>
+                </a:tc>
+                <a:tc>
+                  <a:txBody>
+                    <a:bodyPr/>
+                    <a:lstStyle/>
+                    <a:p>
+                      <a:endParaRPr lang="it-IT" dirty="0"/>
+                    </a:p>
+                  </a:txBody>
+                  <a:tcPr>
+                    <a:lnL w="12700" cap="flat" cmpd="sng" algn="ctr">
+                      <a:solidFill>
+                        <a:schemeClr val="tx1"/>
+                      </a:solidFill>
+                      <a:prstDash val="solid"/>
+                      <a:round/>
+                      <a:headEnd type="none" w="med" len="med"/>
+                      <a:tailEnd type="none" w="med" len="med"/>
+                    </a:lnL>
+                    <a:lnR w="12700" cap="flat" cmpd="sng" algn="ctr">
+                      <a:solidFill>
+                        <a:schemeClr val="tx1"/>
+                      </a:solidFill>
+                      <a:prstDash val="solid"/>
+                      <a:round/>
+                      <a:headEnd type="none" w="med" len="med"/>
+                      <a:tailEnd type="none" w="med" len="med"/>
+                    </a:lnR>
+                    <a:lnT w="12700" cap="flat" cmpd="sng" algn="ctr">
+                      <a:solidFill>
+                        <a:schemeClr val="tx1"/>
+                      </a:solidFill>
+                      <a:prstDash val="solid"/>
+                      <a:round/>
+                      <a:headEnd type="none" w="med" len="med"/>
+                      <a:tailEnd type="none" w="med" len="med"/>
+                    </a:lnT>
+                    <a:lnB w="12700" cap="flat" cmpd="sng" algn="ctr">
+                      <a:solidFill>
+                        <a:schemeClr val="tx1"/>
+                      </a:solidFill>
+                      <a:prstDash val="solid"/>
+                      <a:round/>
+                      <a:headEnd type="none" w="med" len="med"/>
+                      <a:tailEnd type="none" w="med" len="med"/>
+                    </a:lnB>
+                    <a:solidFill>
+                      <a:schemeClr val="bg1">
+                        <a:lumMod val="95000"/>
+                      </a:schemeClr>
+                    </a:solidFill>
+                  </a:tcPr>
+                </a:tc>
+                <a:tc>
+                  <a:txBody>
+                    <a:bodyPr/>
+                    <a:lstStyle/>
+                    <a:p>
+                      <a:endParaRPr lang="it-IT" dirty="0"/>
+                    </a:p>
+                  </a:txBody>
+                  <a:tcPr>
+                    <a:lnL w="12700" cap="flat" cmpd="sng" algn="ctr">
+                      <a:solidFill>
+                        <a:schemeClr val="tx1"/>
+                      </a:solidFill>
+                      <a:prstDash val="solid"/>
+                      <a:round/>
+                      <a:headEnd type="none" w="med" len="med"/>
+                      <a:tailEnd type="none" w="med" len="med"/>
+                    </a:lnL>
+                    <a:lnR w="12700" cap="flat" cmpd="sng" algn="ctr">
+                      <a:solidFill>
+                        <a:schemeClr val="tx1"/>
+                      </a:solidFill>
+                      <a:prstDash val="solid"/>
+                      <a:round/>
+                      <a:headEnd type="none" w="med" len="med"/>
+                      <a:tailEnd type="none" w="med" len="med"/>
+                    </a:lnR>
+                    <a:lnT w="12700" cap="flat" cmpd="sng" algn="ctr">
+                      <a:solidFill>
+                        <a:schemeClr val="tx1"/>
+                      </a:solidFill>
+                      <a:prstDash val="solid"/>
+                      <a:round/>
+                      <a:headEnd type="none" w="med" len="med"/>
+                      <a:tailEnd type="none" w="med" len="med"/>
+                    </a:lnT>
+                    <a:lnB w="12700" cap="flat" cmpd="sng" algn="ctr">
+                      <a:solidFill>
+                        <a:schemeClr val="tx1"/>
+                      </a:solidFill>
+                      <a:prstDash val="solid"/>
+                      <a:round/>
+                      <a:headEnd type="none" w="med" len="med"/>
+                      <a:tailEnd type="none" w="med" len="med"/>
+                    </a:lnB>
+                    <a:solidFill>
+                      <a:schemeClr val="bg1">
+                        <a:lumMod val="95000"/>
+                      </a:schemeClr>
+                    </a:solidFill>
+                  </a:tcPr>
+                </a:tc>
+                <a:extLst>
+                  <a:ext uri="{0D108BD9-81ED-4DB2-BD59-A6C34878D82A}">
+                    <a16:rowId xmlns:a16="http://schemas.microsoft.com/office/drawing/2014/main" val="775609398"/>
+                  </a:ext>
+                </a:extLst>
+              </a:tr>
+            </a:tbl>
+          </a:graphicData>
+        </a:graphic>
+      </p:graphicFrame>
+      <p:graphicFrame>
+        <p:nvGraphicFramePr>
+          <p:cNvPr id="7" name="Tabella 6">
+            <a:extLst>
+              <a:ext uri="{FF2B5EF4-FFF2-40B4-BE49-F238E27FC236}">
+                <a16:creationId xmlns:a16="http://schemas.microsoft.com/office/drawing/2014/main" id="{D5905293-202E-7DF3-C79E-26B06C2E1B9B}"/>
+              </a:ext>
+            </a:extLst>
+          </p:cNvPr>
+          <p:cNvGraphicFramePr>
+            <a:graphicFrameLocks noGrp="1"/>
+          </p:cNvGraphicFramePr>
+          <p:nvPr>
+            <p:extLst>
+              <p:ext uri="{D42A27DB-BD31-4B8C-83A1-F6EECF244321}">
+                <p14:modId xmlns:p14="http://schemas.microsoft.com/office/powerpoint/2010/main" val="2303217959"/>
+              </p:ext>
+            </p:extLst>
+          </p:nvPr>
+        </p:nvGraphicFramePr>
+        <p:xfrm>
+          <a:off x="1342934" y="3891336"/>
+          <a:ext cx="8128000" cy="365760"/>
+        </p:xfrm>
+        <a:graphic>
+          <a:graphicData uri="http://schemas.openxmlformats.org/drawingml/2006/table">
+            <a:tbl>
+              <a:tblPr firstRow="1" bandRow="1">
+                <a:tableStyleId>{5C22544A-7EE6-4342-B048-85BDC9FD1C3A}</a:tableStyleId>
+              </a:tblPr>
+              <a:tblGrid>
+                <a:gridCol w="812800">
+                  <a:extLst>
+                    <a:ext uri="{9D8B030D-6E8A-4147-A177-3AD203B41FA5}">
+                      <a16:colId xmlns:a16="http://schemas.microsoft.com/office/drawing/2014/main" val="1694205"/>
+                    </a:ext>
+                  </a:extLst>
+                </a:gridCol>
+                <a:gridCol w="812800">
+                  <a:extLst>
+                    <a:ext uri="{9D8B030D-6E8A-4147-A177-3AD203B41FA5}">
+                      <a16:colId xmlns:a16="http://schemas.microsoft.com/office/drawing/2014/main" val="2408768007"/>
+                    </a:ext>
+                  </a:extLst>
+                </a:gridCol>
+                <a:gridCol w="812800">
+                  <a:extLst>
+                    <a:ext uri="{9D8B030D-6E8A-4147-A177-3AD203B41FA5}">
+                      <a16:colId xmlns:a16="http://schemas.microsoft.com/office/drawing/2014/main" val="3916070965"/>
+                    </a:ext>
+                  </a:extLst>
+                </a:gridCol>
+                <a:gridCol w="812800">
+                  <a:extLst>
+                    <a:ext uri="{9D8B030D-6E8A-4147-A177-3AD203B41FA5}">
+                      <a16:colId xmlns:a16="http://schemas.microsoft.com/office/drawing/2014/main" val="2884860139"/>
+                    </a:ext>
+                  </a:extLst>
+                </a:gridCol>
+                <a:gridCol w="812800">
+                  <a:extLst>
+                    <a:ext uri="{9D8B030D-6E8A-4147-A177-3AD203B41FA5}">
+                      <a16:colId xmlns:a16="http://schemas.microsoft.com/office/drawing/2014/main" val="2083948861"/>
+                    </a:ext>
+                  </a:extLst>
+                </a:gridCol>
+                <a:gridCol w="812800">
+                  <a:extLst>
+                    <a:ext uri="{9D8B030D-6E8A-4147-A177-3AD203B41FA5}">
+                      <a16:colId xmlns:a16="http://schemas.microsoft.com/office/drawing/2014/main" val="2358120665"/>
+                    </a:ext>
+                  </a:extLst>
+                </a:gridCol>
+                <a:gridCol w="812800">
+                  <a:extLst>
+                    <a:ext uri="{9D8B030D-6E8A-4147-A177-3AD203B41FA5}">
+                      <a16:colId xmlns:a16="http://schemas.microsoft.com/office/drawing/2014/main" val="4245474789"/>
+                    </a:ext>
+                  </a:extLst>
+                </a:gridCol>
+                <a:gridCol w="812800">
+                  <a:extLst>
+                    <a:ext uri="{9D8B030D-6E8A-4147-A177-3AD203B41FA5}">
+                      <a16:colId xmlns:a16="http://schemas.microsoft.com/office/drawing/2014/main" val="1139398879"/>
+                    </a:ext>
+                  </a:extLst>
+                </a:gridCol>
+                <a:gridCol w="812800">
+                  <a:extLst>
+                    <a:ext uri="{9D8B030D-6E8A-4147-A177-3AD203B41FA5}">
+                      <a16:colId xmlns:a16="http://schemas.microsoft.com/office/drawing/2014/main" val="298107426"/>
+                    </a:ext>
+                  </a:extLst>
+                </a:gridCol>
+                <a:gridCol w="812800">
+                  <a:extLst>
+                    <a:ext uri="{9D8B030D-6E8A-4147-A177-3AD203B41FA5}">
+                      <a16:colId xmlns:a16="http://schemas.microsoft.com/office/drawing/2014/main" val="1975393176"/>
+                    </a:ext>
+                  </a:extLst>
+                </a:gridCol>
+              </a:tblGrid>
+              <a:tr h="284508">
+                <a:tc>
+                  <a:txBody>
+                    <a:bodyPr/>
+                    <a:lstStyle/>
+                    <a:p>
+                      <a:r>
+                        <a:rPr lang="it-IT" dirty="0"/>
+                        <a:t>P1</a:t>
+                      </a:r>
+                    </a:p>
+                  </a:txBody>
+                  <a:tcPr>
+                    <a:lnL w="12700" cap="flat" cmpd="sng" algn="ctr">
+                      <a:solidFill>
+                        <a:schemeClr val="tx1"/>
+                      </a:solidFill>
+                      <a:prstDash val="solid"/>
+                      <a:round/>
+                      <a:headEnd type="none" w="med" len="med"/>
+                      <a:tailEnd type="none" w="med" len="med"/>
+                    </a:lnL>
+                    <a:lnR w="12700" cap="flat" cmpd="sng" algn="ctr">
+                      <a:solidFill>
+                        <a:schemeClr val="tx1"/>
+                      </a:solidFill>
+                      <a:prstDash val="solid"/>
+                      <a:round/>
+                      <a:headEnd type="none" w="med" len="med"/>
+                      <a:tailEnd type="none" w="med" len="med"/>
+                    </a:lnR>
+                    <a:lnT w="12700" cap="flat" cmpd="sng" algn="ctr">
+                      <a:solidFill>
+                        <a:schemeClr val="tx1"/>
+                      </a:solidFill>
+                      <a:prstDash val="solid"/>
+                      <a:round/>
+                      <a:headEnd type="none" w="med" len="med"/>
+                      <a:tailEnd type="none" w="med" len="med"/>
+                    </a:lnT>
+                    <a:lnB w="12700" cap="flat" cmpd="sng" algn="ctr">
+                      <a:solidFill>
+                        <a:schemeClr val="tx1"/>
+                      </a:solidFill>
+                      <a:prstDash val="solid"/>
+                      <a:round/>
+                      <a:headEnd type="none" w="med" len="med"/>
+                      <a:tailEnd type="none" w="med" len="med"/>
+                    </a:lnB>
+                    <a:solidFill>
+                      <a:schemeClr val="accent1">
+                        <a:lumMod val="60000"/>
+                        <a:lumOff val="40000"/>
+                      </a:schemeClr>
+                    </a:solidFill>
+                  </a:tcPr>
+                </a:tc>
+                <a:tc>
+                  <a:txBody>
+                    <a:bodyPr/>
+                    <a:lstStyle/>
+                    <a:p>
+                      <a:r>
+                        <a:rPr lang="it-IT" dirty="0"/>
+                        <a:t>P1</a:t>
+                      </a:r>
+                    </a:p>
+                  </a:txBody>
+                  <a:tcPr>
+                    <a:lnL w="12700" cap="flat" cmpd="sng" algn="ctr">
+                      <a:solidFill>
+                        <a:schemeClr val="tx1"/>
+                      </a:solidFill>
+                      <a:prstDash val="solid"/>
+                      <a:round/>
+                      <a:headEnd type="none" w="med" len="med"/>
+                      <a:tailEnd type="none" w="med" len="med"/>
+                    </a:lnL>
+                    <a:lnR w="12700" cap="flat" cmpd="sng" algn="ctr">
+                      <a:solidFill>
+                        <a:schemeClr val="tx1"/>
+                      </a:solidFill>
+                      <a:prstDash val="solid"/>
+                      <a:round/>
+                      <a:headEnd type="none" w="med" len="med"/>
+                      <a:tailEnd type="none" w="med" len="med"/>
+                    </a:lnR>
+                    <a:lnT w="12700" cap="flat" cmpd="sng" algn="ctr">
+                      <a:solidFill>
+                        <a:schemeClr val="tx1"/>
+                      </a:solidFill>
+                      <a:prstDash val="solid"/>
+                      <a:round/>
+                      <a:headEnd type="none" w="med" len="med"/>
+                      <a:tailEnd type="none" w="med" len="med"/>
+                    </a:lnT>
+                    <a:lnB w="12700" cap="flat" cmpd="sng" algn="ctr">
+                      <a:solidFill>
+                        <a:schemeClr val="tx1"/>
+                      </a:solidFill>
+                      <a:prstDash val="solid"/>
+                      <a:round/>
+                      <a:headEnd type="none" w="med" len="med"/>
+                      <a:tailEnd type="none" w="med" len="med"/>
+                    </a:lnB>
+                    <a:solidFill>
+                      <a:schemeClr val="accent1">
+                        <a:lumMod val="60000"/>
+                        <a:lumOff val="40000"/>
+                      </a:schemeClr>
+                    </a:solidFill>
+                  </a:tcPr>
+                </a:tc>
+                <a:tc>
+                  <a:txBody>
+                    <a:bodyPr/>
+                    <a:lstStyle/>
+                    <a:p>
+                      <a:r>
+                        <a:rPr lang="it-IT" dirty="0"/>
+                        <a:t>P1</a:t>
+                      </a:r>
+                    </a:p>
+                  </a:txBody>
+                  <a:tcPr>
+                    <a:lnL w="12700" cap="flat" cmpd="sng" algn="ctr">
+                      <a:solidFill>
+                        <a:schemeClr val="tx1"/>
+                      </a:solidFill>
+                      <a:prstDash val="solid"/>
+                      <a:round/>
+                      <a:headEnd type="none" w="med" len="med"/>
+                      <a:tailEnd type="none" w="med" len="med"/>
+                    </a:lnL>
+                    <a:lnR w="12700" cap="flat" cmpd="sng" algn="ctr">
+                      <a:solidFill>
+                        <a:schemeClr val="tx1"/>
+                      </a:solidFill>
+                      <a:prstDash val="solid"/>
+                      <a:round/>
+                      <a:headEnd type="none" w="med" len="med"/>
+                      <a:tailEnd type="none" w="med" len="med"/>
+                    </a:lnR>
+                    <a:lnT w="12700" cap="flat" cmpd="sng" algn="ctr">
+                      <a:solidFill>
+                        <a:schemeClr val="tx1"/>
+                      </a:solidFill>
+                      <a:prstDash val="solid"/>
+                      <a:round/>
+                      <a:headEnd type="none" w="med" len="med"/>
+                      <a:tailEnd type="none" w="med" len="med"/>
+                    </a:lnT>
+                    <a:lnB w="12700" cap="flat" cmpd="sng" algn="ctr">
+                      <a:solidFill>
+                        <a:schemeClr val="tx1"/>
+                      </a:solidFill>
+                      <a:prstDash val="solid"/>
+                      <a:round/>
+                      <a:headEnd type="none" w="med" len="med"/>
+                      <a:tailEnd type="none" w="med" len="med"/>
+                    </a:lnB>
+                    <a:solidFill>
+                      <a:schemeClr val="accent1">
+                        <a:lumMod val="60000"/>
+                        <a:lumOff val="40000"/>
+                      </a:schemeClr>
+                    </a:solidFill>
+                  </a:tcPr>
+                </a:tc>
+                <a:tc>
+                  <a:txBody>
+                    <a:bodyPr/>
+                    <a:lstStyle/>
+                    <a:p>
+                      <a:r>
+                        <a:rPr lang="it-IT" dirty="0"/>
+                        <a:t>P2</a:t>
+                      </a:r>
+                    </a:p>
+                  </a:txBody>
+                  <a:tcPr>
+                    <a:lnL w="12700" cap="flat" cmpd="sng" algn="ctr">
+                      <a:solidFill>
+                        <a:schemeClr val="tx1"/>
+                      </a:solidFill>
+                      <a:prstDash val="solid"/>
+                      <a:round/>
+                      <a:headEnd type="none" w="med" len="med"/>
+                      <a:tailEnd type="none" w="med" len="med"/>
+                    </a:lnL>
+                    <a:lnR w="12700" cap="flat" cmpd="sng" algn="ctr">
+                      <a:solidFill>
+                        <a:schemeClr val="tx1"/>
+                      </a:solidFill>
+                      <a:prstDash val="solid"/>
+                      <a:round/>
+                      <a:headEnd type="none" w="med" len="med"/>
+                      <a:tailEnd type="none" w="med" len="med"/>
+                    </a:lnR>
+                    <a:lnT w="12700" cap="flat" cmpd="sng" algn="ctr">
+                      <a:solidFill>
+                        <a:schemeClr val="tx1"/>
+                      </a:solidFill>
+                      <a:prstDash val="solid"/>
+                      <a:round/>
+                      <a:headEnd type="none" w="med" len="med"/>
+                      <a:tailEnd type="none" w="med" len="med"/>
+                    </a:lnT>
+                    <a:lnB w="12700" cap="flat" cmpd="sng" algn="ctr">
+                      <a:solidFill>
+                        <a:schemeClr val="tx1"/>
+                      </a:solidFill>
+                      <a:prstDash val="solid"/>
+                      <a:round/>
+                      <a:headEnd type="none" w="med" len="med"/>
+                      <a:tailEnd type="none" w="med" len="med"/>
+                    </a:lnB>
+                    <a:solidFill>
+                      <a:schemeClr val="tx2">
+                        <a:lumMod val="40000"/>
+                        <a:lumOff val="60000"/>
+                      </a:schemeClr>
+                    </a:solidFill>
+                  </a:tcPr>
+                </a:tc>
+                <a:tc>
+                  <a:txBody>
+                    <a:bodyPr/>
+                    <a:lstStyle/>
+                    <a:p>
+                      <a:r>
+                        <a:rPr lang="it-IT" dirty="0"/>
+                        <a:t>P2</a:t>
+                      </a:r>
+                    </a:p>
+                  </a:txBody>
+                  <a:tcPr>
+                    <a:lnL w="12700" cap="flat" cmpd="sng" algn="ctr">
+                      <a:solidFill>
+                        <a:schemeClr val="tx1"/>
+                      </a:solidFill>
+                      <a:prstDash val="solid"/>
+                      <a:round/>
+                      <a:headEnd type="none" w="med" len="med"/>
+                      <a:tailEnd type="none" w="med" len="med"/>
+                    </a:lnL>
+                    <a:lnR w="12700" cap="flat" cmpd="sng" algn="ctr">
+                      <a:solidFill>
+                        <a:schemeClr val="tx1"/>
+                      </a:solidFill>
+                      <a:prstDash val="solid"/>
+                      <a:round/>
+                      <a:headEnd type="none" w="med" len="med"/>
+                      <a:tailEnd type="none" w="med" len="med"/>
+                    </a:lnR>
+                    <a:lnT w="12700" cap="flat" cmpd="sng" algn="ctr">
+                      <a:solidFill>
+                        <a:schemeClr val="tx1"/>
+                      </a:solidFill>
+                      <a:prstDash val="solid"/>
+                      <a:round/>
+                      <a:headEnd type="none" w="med" len="med"/>
+                      <a:tailEnd type="none" w="med" len="med"/>
+                    </a:lnT>
+                    <a:lnB w="12700" cap="flat" cmpd="sng" algn="ctr">
+                      <a:solidFill>
+                        <a:schemeClr val="tx1"/>
+                      </a:solidFill>
+                      <a:prstDash val="solid"/>
+                      <a:round/>
+                      <a:headEnd type="none" w="med" len="med"/>
+                      <a:tailEnd type="none" w="med" len="med"/>
+                    </a:lnB>
+                    <a:solidFill>
+                      <a:schemeClr val="tx2">
+                        <a:lumMod val="40000"/>
+                        <a:lumOff val="60000"/>
+                      </a:schemeClr>
+                    </a:solidFill>
+                  </a:tcPr>
+                </a:tc>
+                <a:tc>
+                  <a:txBody>
+                    <a:bodyPr/>
+                    <a:lstStyle/>
+                    <a:p>
+                      <a:endParaRPr lang="it-IT" dirty="0"/>
+                    </a:p>
+                  </a:txBody>
+                  <a:tcPr>
+                    <a:lnL w="12700" cap="flat" cmpd="sng" algn="ctr">
+                      <a:solidFill>
+                        <a:schemeClr val="tx1"/>
+                      </a:solidFill>
+                      <a:prstDash val="solid"/>
+                      <a:round/>
+                      <a:headEnd type="none" w="med" len="med"/>
+                      <a:tailEnd type="none" w="med" len="med"/>
+                    </a:lnL>
+                    <a:lnR w="12700" cap="flat" cmpd="sng" algn="ctr">
+                      <a:solidFill>
+                        <a:schemeClr val="tx1"/>
+                      </a:solidFill>
+                      <a:prstDash val="solid"/>
+                      <a:round/>
+                      <a:headEnd type="none" w="med" len="med"/>
+                      <a:tailEnd type="none" w="med" len="med"/>
+                    </a:lnR>
+                    <a:lnT w="12700" cap="flat" cmpd="sng" algn="ctr">
+                      <a:solidFill>
+                        <a:schemeClr val="tx1"/>
+                      </a:solidFill>
+                      <a:prstDash val="solid"/>
+                      <a:round/>
+                      <a:headEnd type="none" w="med" len="med"/>
+                      <a:tailEnd type="none" w="med" len="med"/>
+                    </a:lnT>
+                    <a:lnB w="12700" cap="flat" cmpd="sng" algn="ctr">
+                      <a:solidFill>
+                        <a:schemeClr val="tx1"/>
+                      </a:solidFill>
+                      <a:prstDash val="solid"/>
+                      <a:round/>
+                      <a:headEnd type="none" w="med" len="med"/>
+                      <a:tailEnd type="none" w="med" len="med"/>
+                    </a:lnB>
+                    <a:solidFill>
+                      <a:schemeClr val="bg1">
+                        <a:lumMod val="95000"/>
+                      </a:schemeClr>
+                    </a:solidFill>
+                  </a:tcPr>
+                </a:tc>
+                <a:tc>
+                  <a:txBody>
+                    <a:bodyPr/>
+                    <a:lstStyle/>
+                    <a:p>
+                      <a:endParaRPr lang="it-IT" dirty="0">
+                        <a:solidFill>
+                          <a:schemeClr val="bg2"/>
+                        </a:solidFill>
+                      </a:endParaRPr>
+                    </a:p>
+                  </a:txBody>
+                  <a:tcPr>
+                    <a:lnL w="12700" cap="flat" cmpd="sng" algn="ctr">
+                      <a:solidFill>
+                        <a:schemeClr val="tx1"/>
+                      </a:solidFill>
+                      <a:prstDash val="solid"/>
+                      <a:round/>
+                      <a:headEnd type="none" w="med" len="med"/>
+                      <a:tailEnd type="none" w="med" len="med"/>
+                    </a:lnL>
+                    <a:lnR w="12700" cap="flat" cmpd="sng" algn="ctr">
+                      <a:solidFill>
+                        <a:schemeClr val="tx1"/>
+                      </a:solidFill>
+                      <a:prstDash val="solid"/>
+                      <a:round/>
+                      <a:headEnd type="none" w="med" len="med"/>
+                      <a:tailEnd type="none" w="med" len="med"/>
+                    </a:lnR>
+                    <a:lnT w="12700" cap="flat" cmpd="sng" algn="ctr">
+                      <a:solidFill>
+                        <a:schemeClr val="tx1"/>
+                      </a:solidFill>
+                      <a:prstDash val="solid"/>
+                      <a:round/>
+                      <a:headEnd type="none" w="med" len="med"/>
+                      <a:tailEnd type="none" w="med" len="med"/>
+                    </a:lnT>
+                    <a:lnB w="12700" cap="flat" cmpd="sng" algn="ctr">
+                      <a:solidFill>
+                        <a:schemeClr val="tx1"/>
+                      </a:solidFill>
+                      <a:prstDash val="solid"/>
+                      <a:round/>
+                      <a:headEnd type="none" w="med" len="med"/>
+                      <a:tailEnd type="none" w="med" len="med"/>
+                    </a:lnB>
+                    <a:solidFill>
+                      <a:schemeClr val="bg1">
+                        <a:lumMod val="95000"/>
+                      </a:schemeClr>
+                    </a:solidFill>
+                  </a:tcPr>
+                </a:tc>
+                <a:tc>
+                  <a:txBody>
+                    <a:bodyPr/>
+                    <a:lstStyle/>
+                    <a:p>
+                      <a:endParaRPr lang="it-IT" dirty="0"/>
+                    </a:p>
+                  </a:txBody>
+                  <a:tcPr>
+                    <a:lnL w="12700" cap="flat" cmpd="sng" algn="ctr">
+                      <a:solidFill>
+                        <a:schemeClr val="tx1"/>
+                      </a:solidFill>
+                      <a:prstDash val="solid"/>
+                      <a:round/>
+                      <a:headEnd type="none" w="med" len="med"/>
+                      <a:tailEnd type="none" w="med" len="med"/>
+                    </a:lnL>
+                    <a:lnR w="12700" cap="flat" cmpd="sng" algn="ctr">
+                      <a:solidFill>
+                        <a:schemeClr val="tx1"/>
+                      </a:solidFill>
+                      <a:prstDash val="solid"/>
+                      <a:round/>
+                      <a:headEnd type="none" w="med" len="med"/>
+                      <a:tailEnd type="none" w="med" len="med"/>
+                    </a:lnR>
+                    <a:lnT w="12700" cap="flat" cmpd="sng" algn="ctr">
+                      <a:solidFill>
+                        <a:schemeClr val="tx1"/>
+                      </a:solidFill>
+                      <a:prstDash val="solid"/>
+                      <a:round/>
+                      <a:headEnd type="none" w="med" len="med"/>
+                      <a:tailEnd type="none" w="med" len="med"/>
+                    </a:lnT>
+                    <a:lnB w="12700" cap="flat" cmpd="sng" algn="ctr">
+                      <a:solidFill>
+                        <a:schemeClr val="tx1"/>
+                      </a:solidFill>
+                      <a:prstDash val="solid"/>
+                      <a:round/>
+                      <a:headEnd type="none" w="med" len="med"/>
+                      <a:tailEnd type="none" w="med" len="med"/>
+                    </a:lnB>
+                    <a:solidFill>
+                      <a:schemeClr val="bg1">
+                        <a:lumMod val="95000"/>
+                      </a:schemeClr>
+                    </a:solidFill>
+                  </a:tcPr>
+                </a:tc>
+                <a:tc>
+                  <a:txBody>
+                    <a:bodyPr/>
+                    <a:lstStyle/>
+                    <a:p>
+                      <a:endParaRPr lang="it-IT" dirty="0"/>
+                    </a:p>
+                  </a:txBody>
+                  <a:tcPr>
+                    <a:lnL w="12700" cap="flat" cmpd="sng" algn="ctr">
+                      <a:solidFill>
+                        <a:schemeClr val="tx1"/>
+                      </a:solidFill>
+                      <a:prstDash val="solid"/>
+                      <a:round/>
+                      <a:headEnd type="none" w="med" len="med"/>
+                      <a:tailEnd type="none" w="med" len="med"/>
+                    </a:lnL>
+                    <a:lnR w="12700" cap="flat" cmpd="sng" algn="ctr">
+                      <a:solidFill>
+                        <a:schemeClr val="tx1"/>
+                      </a:solidFill>
+                      <a:prstDash val="solid"/>
+                      <a:round/>
+                      <a:headEnd type="none" w="med" len="med"/>
+                      <a:tailEnd type="none" w="med" len="med"/>
+                    </a:lnR>
+                    <a:lnT w="12700" cap="flat" cmpd="sng" algn="ctr">
+                      <a:solidFill>
+                        <a:schemeClr val="tx1"/>
+                      </a:solidFill>
+                      <a:prstDash val="solid"/>
+                      <a:round/>
+                      <a:headEnd type="none" w="med" len="med"/>
+                      <a:tailEnd type="none" w="med" len="med"/>
+                    </a:lnT>
+                    <a:lnB w="12700" cap="flat" cmpd="sng" algn="ctr">
+                      <a:solidFill>
+                        <a:schemeClr val="tx1"/>
+                      </a:solidFill>
+                      <a:prstDash val="solid"/>
+                      <a:round/>
+                      <a:headEnd type="none" w="med" len="med"/>
+                      <a:tailEnd type="none" w="med" len="med"/>
+                    </a:lnB>
+                    <a:solidFill>
+                      <a:schemeClr val="bg1">
+                        <a:lumMod val="95000"/>
+                      </a:schemeClr>
+                    </a:solidFill>
+                  </a:tcPr>
+                </a:tc>
+                <a:tc>
+                  <a:txBody>
+                    <a:bodyPr/>
+                    <a:lstStyle/>
+                    <a:p>
+                      <a:endParaRPr lang="it-IT" dirty="0"/>
+                    </a:p>
+                  </a:txBody>
+                  <a:tcPr>
+                    <a:lnL w="12700" cap="flat" cmpd="sng" algn="ctr">
+                      <a:solidFill>
+                        <a:schemeClr val="tx1"/>
+                      </a:solidFill>
+                      <a:prstDash val="solid"/>
+                      <a:round/>
+                      <a:headEnd type="none" w="med" len="med"/>
+                      <a:tailEnd type="none" w="med" len="med"/>
+                    </a:lnL>
+                    <a:lnR w="12700" cap="flat" cmpd="sng" algn="ctr">
+                      <a:solidFill>
+                        <a:schemeClr val="tx1"/>
+                      </a:solidFill>
+                      <a:prstDash val="solid"/>
+                      <a:round/>
+                      <a:headEnd type="none" w="med" len="med"/>
+                      <a:tailEnd type="none" w="med" len="med"/>
+                    </a:lnR>
+                    <a:lnT w="12700" cap="flat" cmpd="sng" algn="ctr">
+                      <a:solidFill>
+                        <a:schemeClr val="tx1"/>
+                      </a:solidFill>
+                      <a:prstDash val="solid"/>
+                      <a:round/>
+                      <a:headEnd type="none" w="med" len="med"/>
+                      <a:tailEnd type="none" w="med" len="med"/>
+                    </a:lnT>
+                    <a:lnB w="12700" cap="flat" cmpd="sng" algn="ctr">
+                      <a:solidFill>
+                        <a:schemeClr val="tx1"/>
+                      </a:solidFill>
+                      <a:prstDash val="solid"/>
+                      <a:round/>
+                      <a:headEnd type="none" w="med" len="med"/>
+                      <a:tailEnd type="none" w="med" len="med"/>
+                    </a:lnB>
+                    <a:solidFill>
+                      <a:schemeClr val="bg1">
+                        <a:lumMod val="95000"/>
+                      </a:schemeClr>
+                    </a:solidFill>
+                  </a:tcPr>
+                </a:tc>
+                <a:extLst>
+                  <a:ext uri="{0D108BD9-81ED-4DB2-BD59-A6C34878D82A}">
+                    <a16:rowId xmlns:a16="http://schemas.microsoft.com/office/drawing/2014/main" val="775609398"/>
+                  </a:ext>
+                </a:extLst>
+              </a:tr>
+            </a:tbl>
+          </a:graphicData>
+        </a:graphic>
+      </p:graphicFrame>
+      <p:sp>
+        <p:nvSpPr>
+          <p:cNvPr id="8" name="CasellaDiTesto 7">
+            <a:extLst>
+              <a:ext uri="{FF2B5EF4-FFF2-40B4-BE49-F238E27FC236}">
+                <a16:creationId xmlns:a16="http://schemas.microsoft.com/office/drawing/2014/main" id="{C04D29A0-0CE7-D29A-F58F-5679D5C26BBB}"/>
+              </a:ext>
+            </a:extLst>
+          </p:cNvPr>
+          <p:cNvSpPr txBox="1"/>
+          <p:nvPr/>
+        </p:nvSpPr>
+        <p:spPr>
+          <a:xfrm>
+            <a:off x="548640" y="3177697"/>
+            <a:ext cx="794294" cy="369332"/>
+          </a:xfrm>
+          <a:prstGeom prst="rect">
+            <a:avLst/>
+          </a:prstGeom>
+          <a:noFill/>
+        </p:spPr>
+        <p:txBody>
+          <a:bodyPr wrap="square" rtlCol="0">
+            <a:spAutoFit/>
+          </a:bodyPr>
+          <a:lstStyle/>
+          <a:p>
+            <a:r>
+              <a:rPr lang="it-IT" b="1" dirty="0"/>
+              <a:t>RAM</a:t>
+            </a:r>
+          </a:p>
+        </p:txBody>
+      </p:sp>
+      <p:graphicFrame>
+        <p:nvGraphicFramePr>
+          <p:cNvPr id="9" name="Tabella 8">
+            <a:extLst>
+              <a:ext uri="{FF2B5EF4-FFF2-40B4-BE49-F238E27FC236}">
+                <a16:creationId xmlns:a16="http://schemas.microsoft.com/office/drawing/2014/main" id="{94192945-4448-BF1F-082E-59F4D3E36058}"/>
+              </a:ext>
+            </a:extLst>
+          </p:cNvPr>
+          <p:cNvGraphicFramePr>
+            <a:graphicFrameLocks noGrp="1"/>
+          </p:cNvGraphicFramePr>
+          <p:nvPr>
+            <p:extLst>
+              <p:ext uri="{D42A27DB-BD31-4B8C-83A1-F6EECF244321}">
+                <p14:modId xmlns:p14="http://schemas.microsoft.com/office/powerpoint/2010/main" val="4220352746"/>
+              </p:ext>
+            </p:extLst>
+          </p:nvPr>
+        </p:nvGraphicFramePr>
+        <p:xfrm>
+          <a:off x="1342934" y="4621308"/>
+          <a:ext cx="2438400" cy="695831"/>
+        </p:xfrm>
+        <a:graphic>
+          <a:graphicData uri="http://schemas.openxmlformats.org/drawingml/2006/table">
+            <a:tbl>
+              <a:tblPr firstRow="1" bandRow="1">
+                <a:tableStyleId>{5C22544A-7EE6-4342-B048-85BDC9FD1C3A}</a:tableStyleId>
+              </a:tblPr>
+              <a:tblGrid>
+                <a:gridCol w="812800">
+                  <a:extLst>
+                    <a:ext uri="{9D8B030D-6E8A-4147-A177-3AD203B41FA5}">
+                      <a16:colId xmlns:a16="http://schemas.microsoft.com/office/drawing/2014/main" val="645810556"/>
+                    </a:ext>
+                  </a:extLst>
+                </a:gridCol>
+                <a:gridCol w="812800">
+                  <a:extLst>
+                    <a:ext uri="{9D8B030D-6E8A-4147-A177-3AD203B41FA5}">
+                      <a16:colId xmlns:a16="http://schemas.microsoft.com/office/drawing/2014/main" val="3402794757"/>
+                    </a:ext>
+                  </a:extLst>
+                </a:gridCol>
+                <a:gridCol w="812800">
+                  <a:extLst>
+                    <a:ext uri="{9D8B030D-6E8A-4147-A177-3AD203B41FA5}">
+                      <a16:colId xmlns:a16="http://schemas.microsoft.com/office/drawing/2014/main" val="3001697394"/>
+                    </a:ext>
+                  </a:extLst>
+                </a:gridCol>
+              </a:tblGrid>
+              <a:tr h="695831">
+                <a:tc>
+                  <a:txBody>
+                    <a:bodyPr/>
+                    <a:lstStyle/>
+                    <a:p>
+                      <a:endParaRPr lang="it-IT" dirty="0"/>
+                    </a:p>
+                  </a:txBody>
+                  <a:tcPr>
+                    <a:lnL w="12700" cap="flat" cmpd="sng" algn="ctr">
+                      <a:solidFill>
+                        <a:schemeClr val="tx1"/>
+                      </a:solidFill>
+                      <a:prstDash val="solid"/>
+                      <a:round/>
+                      <a:headEnd type="none" w="med" len="med"/>
+                      <a:tailEnd type="none" w="med" len="med"/>
+                    </a:lnL>
+                    <a:lnR w="12700" cap="flat" cmpd="sng" algn="ctr">
+                      <a:solidFill>
+                        <a:schemeClr val="tx1"/>
+                      </a:solidFill>
+                      <a:prstDash val="solid"/>
+                      <a:round/>
+                      <a:headEnd type="none" w="med" len="med"/>
+                      <a:tailEnd type="none" w="med" len="med"/>
+                    </a:lnR>
+                    <a:lnT w="12700" cap="flat" cmpd="sng" algn="ctr">
+                      <a:solidFill>
+                        <a:schemeClr val="tx1"/>
+                      </a:solidFill>
+                      <a:prstDash val="solid"/>
+                      <a:round/>
+                      <a:headEnd type="none" w="med" len="med"/>
+                      <a:tailEnd type="none" w="med" len="med"/>
+                    </a:lnT>
+                    <a:lnB w="12700" cap="flat" cmpd="sng" algn="ctr">
+                      <a:solidFill>
+                        <a:schemeClr val="tx1"/>
+                      </a:solidFill>
+                      <a:prstDash val="solid"/>
+                      <a:round/>
+                      <a:headEnd type="none" w="med" len="med"/>
+                      <a:tailEnd type="none" w="med" len="med"/>
+                    </a:lnB>
+                    <a:solidFill>
+                      <a:schemeClr val="accent1">
+                        <a:lumMod val="60000"/>
+                        <a:lumOff val="40000"/>
+                      </a:schemeClr>
+                    </a:solidFill>
+                  </a:tcPr>
+                </a:tc>
+                <a:tc>
+                  <a:txBody>
+                    <a:bodyPr/>
+                    <a:lstStyle/>
+                    <a:p>
+                      <a:endParaRPr lang="it-IT" dirty="0"/>
+                    </a:p>
+                  </a:txBody>
+                  <a:tcPr>
+                    <a:lnL w="12700" cap="flat" cmpd="sng" algn="ctr">
+                      <a:solidFill>
+                        <a:schemeClr val="tx1"/>
+                      </a:solidFill>
+                      <a:prstDash val="solid"/>
+                      <a:round/>
+                      <a:headEnd type="none" w="med" len="med"/>
+                      <a:tailEnd type="none" w="med" len="med"/>
+                    </a:lnL>
+                    <a:lnR w="12700" cap="flat" cmpd="sng" algn="ctr">
+                      <a:solidFill>
+                        <a:schemeClr val="tx1"/>
+                      </a:solidFill>
+                      <a:prstDash val="solid"/>
+                      <a:round/>
+                      <a:headEnd type="none" w="med" len="med"/>
+                      <a:tailEnd type="none" w="med" len="med"/>
+                    </a:lnR>
+                    <a:lnT w="12700" cap="flat" cmpd="sng" algn="ctr">
+                      <a:solidFill>
+                        <a:schemeClr val="tx1"/>
+                      </a:solidFill>
+                      <a:prstDash val="solid"/>
+                      <a:round/>
+                      <a:headEnd type="none" w="med" len="med"/>
+                      <a:tailEnd type="none" w="med" len="med"/>
+                    </a:lnT>
+                    <a:lnB w="12700" cap="flat" cmpd="sng" algn="ctr">
+                      <a:solidFill>
+                        <a:schemeClr val="tx1"/>
+                      </a:solidFill>
+                      <a:prstDash val="solid"/>
+                      <a:round/>
+                      <a:headEnd type="none" w="med" len="med"/>
+                      <a:tailEnd type="none" w="med" len="med"/>
+                    </a:lnB>
+                    <a:solidFill>
+                      <a:schemeClr val="accent1">
+                        <a:lumMod val="60000"/>
+                        <a:lumOff val="40000"/>
+                      </a:schemeClr>
+                    </a:solidFill>
+                  </a:tcPr>
+                </a:tc>
+                <a:tc>
+                  <a:txBody>
+                    <a:bodyPr/>
+                    <a:lstStyle/>
+                    <a:p>
+                      <a:endParaRPr lang="it-IT" dirty="0"/>
+                    </a:p>
+                  </a:txBody>
+                  <a:tcPr>
+                    <a:lnL w="12700" cap="flat" cmpd="sng" algn="ctr">
+                      <a:solidFill>
+                        <a:schemeClr val="tx1"/>
+                      </a:solidFill>
+                      <a:prstDash val="solid"/>
+                      <a:round/>
+                      <a:headEnd type="none" w="med" len="med"/>
+                      <a:tailEnd type="none" w="med" len="med"/>
+                    </a:lnL>
+                    <a:lnR w="12700" cap="flat" cmpd="sng" algn="ctr">
+                      <a:solidFill>
+                        <a:schemeClr val="tx1"/>
+                      </a:solidFill>
+                      <a:prstDash val="solid"/>
+                      <a:round/>
+                      <a:headEnd type="none" w="med" len="med"/>
+                      <a:tailEnd type="none" w="med" len="med"/>
+                    </a:lnR>
+                    <a:lnT w="12700" cap="flat" cmpd="sng" algn="ctr">
+                      <a:solidFill>
+                        <a:schemeClr val="tx1"/>
+                      </a:solidFill>
+                      <a:prstDash val="solid"/>
+                      <a:round/>
+                      <a:headEnd type="none" w="med" len="med"/>
+                      <a:tailEnd type="none" w="med" len="med"/>
+                    </a:lnT>
+                    <a:lnB w="12700" cap="flat" cmpd="sng" algn="ctr">
+                      <a:solidFill>
+                        <a:schemeClr val="tx1"/>
+                      </a:solidFill>
+                      <a:prstDash val="solid"/>
+                      <a:round/>
+                      <a:headEnd type="none" w="med" len="med"/>
+                      <a:tailEnd type="none" w="med" len="med"/>
+                    </a:lnB>
+                    <a:solidFill>
+                      <a:schemeClr val="accent1">
+                        <a:lumMod val="60000"/>
+                        <a:lumOff val="40000"/>
+                      </a:schemeClr>
+                    </a:solidFill>
+                  </a:tcPr>
+                </a:tc>
+                <a:extLst>
+                  <a:ext uri="{0D108BD9-81ED-4DB2-BD59-A6C34878D82A}">
+                    <a16:rowId xmlns:a16="http://schemas.microsoft.com/office/drawing/2014/main" val="744891775"/>
+                  </a:ext>
+                </a:extLst>
+              </a:tr>
+            </a:tbl>
+          </a:graphicData>
+        </a:graphic>
+      </p:graphicFrame>
+      <p:graphicFrame>
+        <p:nvGraphicFramePr>
+          <p:cNvPr id="10" name="Tabella 9">
+            <a:extLst>
+              <a:ext uri="{FF2B5EF4-FFF2-40B4-BE49-F238E27FC236}">
+                <a16:creationId xmlns:a16="http://schemas.microsoft.com/office/drawing/2014/main" id="{7177BC68-62AA-E842-65A9-46268413FD75}"/>
+              </a:ext>
+            </a:extLst>
+          </p:cNvPr>
+          <p:cNvGraphicFramePr>
+            <a:graphicFrameLocks noGrp="1"/>
+          </p:cNvGraphicFramePr>
+          <p:nvPr>
+            <p:extLst>
+              <p:ext uri="{D42A27DB-BD31-4B8C-83A1-F6EECF244321}">
+                <p14:modId xmlns:p14="http://schemas.microsoft.com/office/powerpoint/2010/main" val="3202449280"/>
+              </p:ext>
+            </p:extLst>
+          </p:nvPr>
+        </p:nvGraphicFramePr>
+        <p:xfrm>
+          <a:off x="4631875" y="4621308"/>
+          <a:ext cx="1625600" cy="695831"/>
+        </p:xfrm>
+        <a:graphic>
+          <a:graphicData uri="http://schemas.openxmlformats.org/drawingml/2006/table">
+            <a:tbl>
+              <a:tblPr firstRow="1" bandRow="1">
+                <a:tableStyleId>{5C22544A-7EE6-4342-B048-85BDC9FD1C3A}</a:tableStyleId>
+              </a:tblPr>
+              <a:tblGrid>
+                <a:gridCol w="812800">
+                  <a:extLst>
+                    <a:ext uri="{9D8B030D-6E8A-4147-A177-3AD203B41FA5}">
+                      <a16:colId xmlns:a16="http://schemas.microsoft.com/office/drawing/2014/main" val="1898642669"/>
+                    </a:ext>
+                  </a:extLst>
+                </a:gridCol>
+                <a:gridCol w="812800">
+                  <a:extLst>
+                    <a:ext uri="{9D8B030D-6E8A-4147-A177-3AD203B41FA5}">
+                      <a16:colId xmlns:a16="http://schemas.microsoft.com/office/drawing/2014/main" val="2862646468"/>
+                    </a:ext>
+                  </a:extLst>
+                </a:gridCol>
+              </a:tblGrid>
+              <a:tr h="695831">
+                <a:tc>
+                  <a:txBody>
+                    <a:bodyPr/>
+                    <a:lstStyle/>
+                    <a:p>
+                      <a:endParaRPr lang="it-IT" dirty="0"/>
+                    </a:p>
+                  </a:txBody>
+                  <a:tcPr>
+                    <a:lnL w="12700" cap="flat" cmpd="sng" algn="ctr">
+                      <a:solidFill>
+                        <a:schemeClr val="tx1"/>
+                      </a:solidFill>
+                      <a:prstDash val="solid"/>
+                      <a:round/>
+                      <a:headEnd type="none" w="med" len="med"/>
+                      <a:tailEnd type="none" w="med" len="med"/>
+                    </a:lnL>
+                    <a:lnR w="12700" cap="flat" cmpd="sng" algn="ctr">
+                      <a:solidFill>
+                        <a:schemeClr val="tx1"/>
+                      </a:solidFill>
+                      <a:prstDash val="solid"/>
+                      <a:round/>
+                      <a:headEnd type="none" w="med" len="med"/>
+                      <a:tailEnd type="none" w="med" len="med"/>
+                    </a:lnR>
+                    <a:lnT w="12700" cap="flat" cmpd="sng" algn="ctr">
+                      <a:solidFill>
+                        <a:schemeClr val="tx1"/>
+                      </a:solidFill>
+                      <a:prstDash val="solid"/>
+                      <a:round/>
+                      <a:headEnd type="none" w="med" len="med"/>
+                      <a:tailEnd type="none" w="med" len="med"/>
+                    </a:lnT>
+                    <a:lnB w="12700" cap="flat" cmpd="sng" algn="ctr">
+                      <a:solidFill>
+                        <a:schemeClr val="tx1"/>
+                      </a:solidFill>
+                      <a:prstDash val="solid"/>
+                      <a:round/>
+                      <a:headEnd type="none" w="med" len="med"/>
+                      <a:tailEnd type="none" w="med" len="med"/>
+                    </a:lnB>
+                    <a:solidFill>
+                      <a:schemeClr val="tx2">
+                        <a:lumMod val="40000"/>
+                        <a:lumOff val="60000"/>
+                      </a:schemeClr>
+                    </a:solidFill>
+                  </a:tcPr>
+                </a:tc>
+                <a:tc>
+                  <a:txBody>
+                    <a:bodyPr/>
+                    <a:lstStyle/>
+                    <a:p>
+                      <a:endParaRPr lang="it-IT" dirty="0"/>
+                    </a:p>
+                  </a:txBody>
+                  <a:tcPr>
+                    <a:lnL w="12700" cap="flat" cmpd="sng" algn="ctr">
+                      <a:solidFill>
+                        <a:schemeClr val="tx1"/>
+                      </a:solidFill>
+                      <a:prstDash val="solid"/>
+                      <a:round/>
+                      <a:headEnd type="none" w="med" len="med"/>
+                      <a:tailEnd type="none" w="med" len="med"/>
+                    </a:lnL>
+                    <a:lnR w="12700" cap="flat" cmpd="sng" algn="ctr">
+                      <a:solidFill>
+                        <a:schemeClr val="tx1"/>
+                      </a:solidFill>
+                      <a:prstDash val="solid"/>
+                      <a:round/>
+                      <a:headEnd type="none" w="med" len="med"/>
+                      <a:tailEnd type="none" w="med" len="med"/>
+                    </a:lnR>
+                    <a:lnT w="12700" cap="flat" cmpd="sng" algn="ctr">
+                      <a:solidFill>
+                        <a:schemeClr val="tx1"/>
+                      </a:solidFill>
+                      <a:prstDash val="solid"/>
+                      <a:round/>
+                      <a:headEnd type="none" w="med" len="med"/>
+                      <a:tailEnd type="none" w="med" len="med"/>
+                    </a:lnT>
+                    <a:lnB w="12700" cap="flat" cmpd="sng" algn="ctr">
+                      <a:solidFill>
+                        <a:schemeClr val="tx1"/>
+                      </a:solidFill>
+                      <a:prstDash val="solid"/>
+                      <a:round/>
+                      <a:headEnd type="none" w="med" len="med"/>
+                      <a:tailEnd type="none" w="med" len="med"/>
+                    </a:lnB>
+                    <a:solidFill>
+                      <a:schemeClr val="tx2">
+                        <a:lumMod val="40000"/>
+                        <a:lumOff val="60000"/>
+                      </a:schemeClr>
+                    </a:solidFill>
+                  </a:tcPr>
+                </a:tc>
+                <a:extLst>
+                  <a:ext uri="{0D108BD9-81ED-4DB2-BD59-A6C34878D82A}">
+                    <a16:rowId xmlns:a16="http://schemas.microsoft.com/office/drawing/2014/main" val="3091627667"/>
+                  </a:ext>
+                </a:extLst>
+              </a:tr>
+            </a:tbl>
+          </a:graphicData>
+        </a:graphic>
+      </p:graphicFrame>
+      <p:sp>
+        <p:nvSpPr>
+          <p:cNvPr id="11" name="CasellaDiTesto 10">
+            <a:extLst>
+              <a:ext uri="{FF2B5EF4-FFF2-40B4-BE49-F238E27FC236}">
+                <a16:creationId xmlns:a16="http://schemas.microsoft.com/office/drawing/2014/main" id="{8F758EE3-10E0-D48F-A1D2-F916F0693968}"/>
+              </a:ext>
+            </a:extLst>
+          </p:cNvPr>
+          <p:cNvSpPr txBox="1"/>
+          <p:nvPr/>
+        </p:nvSpPr>
+        <p:spPr>
+          <a:xfrm>
+            <a:off x="1698171" y="5424461"/>
+            <a:ext cx="1727926" cy="369332"/>
+          </a:xfrm>
+          <a:prstGeom prst="rect">
+            <a:avLst/>
+          </a:prstGeom>
+          <a:noFill/>
+        </p:spPr>
+        <p:txBody>
+          <a:bodyPr wrap="square" rtlCol="0">
+            <a:spAutoFit/>
+          </a:bodyPr>
+          <a:lstStyle/>
+          <a:p>
+            <a:r>
+              <a:rPr lang="it-IT" b="1" dirty="0"/>
+              <a:t>PROGRAMMA 1</a:t>
+            </a:r>
+          </a:p>
+        </p:txBody>
+      </p:sp>
+      <p:sp>
+        <p:nvSpPr>
+          <p:cNvPr id="12" name="CasellaDiTesto 11">
+            <a:extLst>
+              <a:ext uri="{FF2B5EF4-FFF2-40B4-BE49-F238E27FC236}">
+                <a16:creationId xmlns:a16="http://schemas.microsoft.com/office/drawing/2014/main" id="{7127126D-D684-73DE-5FCA-0DCD5D5A4A7B}"/>
+              </a:ext>
+            </a:extLst>
+          </p:cNvPr>
+          <p:cNvSpPr txBox="1"/>
+          <p:nvPr/>
+        </p:nvSpPr>
+        <p:spPr>
+          <a:xfrm>
+            <a:off x="4551774" y="5433218"/>
+            <a:ext cx="1785801" cy="369332"/>
+          </a:xfrm>
+          <a:prstGeom prst="rect">
+            <a:avLst/>
+          </a:prstGeom>
+          <a:noFill/>
+        </p:spPr>
+        <p:txBody>
+          <a:bodyPr wrap="square" rtlCol="0">
+            <a:spAutoFit/>
+          </a:bodyPr>
+          <a:lstStyle/>
+          <a:p>
+            <a:r>
+              <a:rPr lang="it-IT" b="1" dirty="0"/>
+              <a:t>PROGRAMMA 2</a:t>
+            </a:r>
+          </a:p>
+        </p:txBody>
+      </p:sp>
+      <p:pic>
+        <p:nvPicPr>
+          <p:cNvPr id="13" name="Picture 2" descr="Immagine che contiene schizzo, disegno, nero, bianco e nero&#10;&#10;Il contenuto generato dall&amp;#39;IA potrebbe non essere corretto.">
+            <a:extLst>
+              <a:ext uri="{FF2B5EF4-FFF2-40B4-BE49-F238E27FC236}">
+                <a16:creationId xmlns:a16="http://schemas.microsoft.com/office/drawing/2014/main" id="{011E3851-97AD-0F90-B13F-484D7D1CA901}"/>
+              </a:ext>
+            </a:extLst>
+          </p:cNvPr>
+          <p:cNvPicPr>
+            <a:picLocks noChangeAspect="1" noChangeArrowheads="1"/>
+          </p:cNvPicPr>
+          <p:nvPr/>
+        </p:nvPicPr>
+        <p:blipFill>
+          <a:blip r:embed="rId2" cstate="print">
+            <a:extLst>
+              <a:ext uri="{28A0092B-C50C-407E-A947-70E740481C1C}">
+                <a14:useLocalDpi xmlns:a14="http://schemas.microsoft.com/office/drawing/2010/main" val="0"/>
+              </a:ext>
+            </a:extLst>
+          </a:blip>
+          <a:srcRect/>
+          <a:stretch>
+            <a:fillRect/>
+          </a:stretch>
+        </p:blipFill>
+        <p:spPr bwMode="auto">
+          <a:xfrm rot="15379497">
+            <a:off x="1669143" y="4320262"/>
+            <a:ext cx="282651" cy="282651"/>
+          </a:xfrm>
+          <a:prstGeom prst="rect">
+            <a:avLst/>
+          </a:prstGeom>
+          <a:noFill/>
+          <a:extLst>
+            <a:ext uri="{909E8E84-426E-40DD-AFC4-6F175D3DCCD1}">
+              <a14:hiddenFill xmlns:a14="http://schemas.microsoft.com/office/drawing/2010/main">
+                <a:solidFill>
+                  <a:srgbClr val="FFFFFF"/>
+                </a:solidFill>
+              </a14:hiddenFill>
+            </a:ext>
+          </a:extLst>
+        </p:spPr>
+      </p:pic>
+      <p:pic>
+        <p:nvPicPr>
+          <p:cNvPr id="14" name="Picture 2" descr="Immagine che contiene schizzo, disegno, nero, bianco e nero&#10;&#10;Il contenuto generato dall&amp;#39;IA potrebbe non essere corretto.">
+            <a:extLst>
+              <a:ext uri="{FF2B5EF4-FFF2-40B4-BE49-F238E27FC236}">
+                <a16:creationId xmlns:a16="http://schemas.microsoft.com/office/drawing/2014/main" id="{AAF40F63-9D29-F24A-727F-50A5BC711C47}"/>
+              </a:ext>
+            </a:extLst>
+          </p:cNvPr>
+          <p:cNvPicPr>
+            <a:picLocks noChangeAspect="1" noChangeArrowheads="1"/>
+          </p:cNvPicPr>
+          <p:nvPr/>
+        </p:nvPicPr>
+        <p:blipFill>
+          <a:blip r:embed="rId2" cstate="print">
+            <a:extLst>
+              <a:ext uri="{28A0092B-C50C-407E-A947-70E740481C1C}">
+                <a14:useLocalDpi xmlns:a14="http://schemas.microsoft.com/office/drawing/2010/main" val="0"/>
+              </a:ext>
+            </a:extLst>
+          </a:blip>
+          <a:srcRect/>
+          <a:stretch>
+            <a:fillRect/>
+          </a:stretch>
+        </p:blipFill>
+        <p:spPr bwMode="auto">
+          <a:xfrm rot="15379497">
+            <a:off x="2398480" y="4314117"/>
+            <a:ext cx="282651" cy="282651"/>
+          </a:xfrm>
+          <a:prstGeom prst="rect">
+            <a:avLst/>
+          </a:prstGeom>
+          <a:noFill/>
+          <a:extLst>
+            <a:ext uri="{909E8E84-426E-40DD-AFC4-6F175D3DCCD1}">
+              <a14:hiddenFill xmlns:a14="http://schemas.microsoft.com/office/drawing/2010/main">
+                <a:solidFill>
+                  <a:srgbClr val="FFFFFF"/>
+                </a:solidFill>
+              </a14:hiddenFill>
+            </a:ext>
+          </a:extLst>
+        </p:spPr>
+      </p:pic>
+      <p:pic>
+        <p:nvPicPr>
+          <p:cNvPr id="15" name="Picture 2" descr="Immagine che contiene schizzo, disegno, nero, bianco e nero&#10;&#10;Il contenuto generato dall&amp;#39;IA potrebbe non essere corretto.">
+            <a:extLst>
+              <a:ext uri="{FF2B5EF4-FFF2-40B4-BE49-F238E27FC236}">
+                <a16:creationId xmlns:a16="http://schemas.microsoft.com/office/drawing/2014/main" id="{C4034877-387B-02ED-DC4A-22057993DA85}"/>
+              </a:ext>
+            </a:extLst>
+          </p:cNvPr>
+          <p:cNvPicPr>
+            <a:picLocks noChangeAspect="1" noChangeArrowheads="1"/>
+          </p:cNvPicPr>
+          <p:nvPr/>
+        </p:nvPicPr>
+        <p:blipFill>
+          <a:blip r:embed="rId2" cstate="print">
+            <a:extLst>
+              <a:ext uri="{28A0092B-C50C-407E-A947-70E740481C1C}">
+                <a14:useLocalDpi xmlns:a14="http://schemas.microsoft.com/office/drawing/2010/main" val="0"/>
+              </a:ext>
+            </a:extLst>
+          </a:blip>
+          <a:srcRect/>
+          <a:stretch>
+            <a:fillRect/>
+          </a:stretch>
+        </p:blipFill>
+        <p:spPr bwMode="auto">
+          <a:xfrm rot="15379497">
+            <a:off x="3165212" y="4320262"/>
+            <a:ext cx="282651" cy="282651"/>
+          </a:xfrm>
+          <a:prstGeom prst="rect">
+            <a:avLst/>
+          </a:prstGeom>
+          <a:noFill/>
+          <a:extLst>
+            <a:ext uri="{909E8E84-426E-40DD-AFC4-6F175D3DCCD1}">
+              <a14:hiddenFill xmlns:a14="http://schemas.microsoft.com/office/drawing/2010/main">
+                <a:solidFill>
+                  <a:srgbClr val="FFFFFF"/>
+                </a:solidFill>
+              </a14:hiddenFill>
+            </a:ext>
+          </a:extLst>
+        </p:spPr>
+      </p:pic>
+      <p:pic>
+        <p:nvPicPr>
+          <p:cNvPr id="16" name="Picture 2" descr="Immagine che contiene schizzo, disegno, nero, bianco e nero&#10;&#10;Il contenuto generato dall&amp;#39;IA potrebbe non essere corretto.">
+            <a:extLst>
+              <a:ext uri="{FF2B5EF4-FFF2-40B4-BE49-F238E27FC236}">
+                <a16:creationId xmlns:a16="http://schemas.microsoft.com/office/drawing/2014/main" id="{3628BDAF-A6FC-A9F9-A587-E1D1896A04FF}"/>
+              </a:ext>
+            </a:extLst>
+          </p:cNvPr>
+          <p:cNvPicPr>
+            <a:picLocks noChangeAspect="1" noChangeArrowheads="1"/>
+          </p:cNvPicPr>
+          <p:nvPr/>
+        </p:nvPicPr>
+        <p:blipFill>
+          <a:blip r:embed="rId3" cstate="print">
+            <a:extLst>
+              <a:ext uri="{28A0092B-C50C-407E-A947-70E740481C1C}">
+                <a14:useLocalDpi xmlns:a14="http://schemas.microsoft.com/office/drawing/2010/main" val="0"/>
+              </a:ext>
+            </a:extLst>
+          </a:blip>
+          <a:srcRect/>
+          <a:stretch>
+            <a:fillRect/>
+          </a:stretch>
+        </p:blipFill>
+        <p:spPr bwMode="auto">
+          <a:xfrm rot="13472107">
+            <a:off x="4368411" y="4278226"/>
+            <a:ext cx="366725" cy="366725"/>
+          </a:xfrm>
+          <a:prstGeom prst="rect">
+            <a:avLst/>
+          </a:prstGeom>
+          <a:noFill/>
+          <a:extLst>
+            <a:ext uri="{909E8E84-426E-40DD-AFC4-6F175D3DCCD1}">
+              <a14:hiddenFill xmlns:a14="http://schemas.microsoft.com/office/drawing/2010/main">
+                <a:solidFill>
+                  <a:srgbClr val="FFFFFF"/>
+                </a:solidFill>
+              </a14:hiddenFill>
+            </a:ext>
+          </a:extLst>
+        </p:spPr>
+      </p:pic>
+      <p:pic>
+        <p:nvPicPr>
+          <p:cNvPr id="17" name="Picture 2" descr="Immagine che contiene schizzo, disegno, nero, bianco e nero&#10;&#10;Il contenuto generato dall&amp;#39;IA potrebbe non essere corretto.">
+            <a:extLst>
+              <a:ext uri="{FF2B5EF4-FFF2-40B4-BE49-F238E27FC236}">
+                <a16:creationId xmlns:a16="http://schemas.microsoft.com/office/drawing/2014/main" id="{5B5451EA-3ABC-D5D2-B07F-23D24D78B3E2}"/>
+              </a:ext>
+            </a:extLst>
+          </p:cNvPr>
+          <p:cNvPicPr>
+            <a:picLocks noChangeAspect="1" noChangeArrowheads="1"/>
+          </p:cNvPicPr>
+          <p:nvPr/>
+        </p:nvPicPr>
+        <p:blipFill>
+          <a:blip r:embed="rId2" cstate="print">
+            <a:extLst>
+              <a:ext uri="{28A0092B-C50C-407E-A947-70E740481C1C}">
+                <a14:useLocalDpi xmlns:a14="http://schemas.microsoft.com/office/drawing/2010/main" val="0"/>
+              </a:ext>
+            </a:extLst>
+          </a:blip>
+          <a:srcRect/>
+          <a:stretch>
+            <a:fillRect/>
+          </a:stretch>
+        </p:blipFill>
+        <p:spPr bwMode="auto">
+          <a:xfrm rot="13281379">
+            <a:off x="5303348" y="4333039"/>
+            <a:ext cx="282651" cy="282651"/>
+          </a:xfrm>
+          <a:prstGeom prst="rect">
+            <a:avLst/>
+          </a:prstGeom>
+          <a:noFill/>
+          <a:extLst>
+            <a:ext uri="{909E8E84-426E-40DD-AFC4-6F175D3DCCD1}">
+              <a14:hiddenFill xmlns:a14="http://schemas.microsoft.com/office/drawing/2010/main">
+                <a:solidFill>
+                  <a:srgbClr val="FFFFFF"/>
+                </a:solidFill>
+              </a14:hiddenFill>
+            </a:ext>
+          </a:extLst>
+        </p:spPr>
+      </p:pic>
+    </p:spTree>
+    <p:extLst>
+      <p:ext uri="{BB962C8B-B14F-4D97-AF65-F5344CB8AC3E}">
+        <p14:creationId xmlns:p14="http://schemas.microsoft.com/office/powerpoint/2010/main" val="559837968"/>
+      </p:ext>
+    </p:extLst>
+  </p:cSld>
+  <p:clrMapOvr>
+    <a:masterClrMapping/>
+  </p:clrMapOvr>
+  <mc:AlternateContent xmlns:mc="http://schemas.openxmlformats.org/markup-compatibility/2006">
+    <mc:Choice xmlns:p159="http://schemas.microsoft.com/office/powerpoint/2015/09/main" Requires="p159">
+      <p:transition xmlns:p14="http://schemas.microsoft.com/office/powerpoint/2010/main" spd="slow" p14:dur="2000">
+        <p159:morph option="byObject"/>
+      </p:transition>
+    </mc:Choice>
+    <mc:Fallback>
+      <p:transition spd="slow">
+        <p:fade/>
+      </p:transition>
+    </mc:Fallback>
+  </mc:AlternateContent>
+</p:sld>
+</file>
+
+<file path=ppt/slides/slide14.xml><?xml version="1.0" encoding="utf-8"?>
+<p:sld xmlns:a="http://schemas.openxmlformats.org/drawingml/2006/main" xmlns:r="http://schemas.openxmlformats.org/officeDocument/2006/relationships" xmlns:p="http://schemas.openxmlformats.org/presentationml/2006/main">
+  <p:cSld>
+    <p:spTree>
+      <p:nvGrpSpPr>
+        <p:cNvPr id="1" name="">
+          <a:extLst>
+            <a:ext uri="{FF2B5EF4-FFF2-40B4-BE49-F238E27FC236}">
+              <a16:creationId xmlns:a16="http://schemas.microsoft.com/office/drawing/2014/main" id="{6FD4F4BE-77E4-4EB9-D249-2BDF03CB68D7}"/>
+            </a:ext>
+          </a:extLst>
+        </p:cNvPr>
+        <p:cNvGrpSpPr/>
+        <p:nvPr/>
+      </p:nvGrpSpPr>
+      <p:grpSpPr>
+        <a:xfrm>
+          <a:off x="0" y="0"/>
+          <a:ext cx="0" cy="0"/>
+          <a:chOff x="0" y="0"/>
+          <a:chExt cx="0" cy="0"/>
+        </a:xfrm>
+      </p:grpSpPr>
+      <p:sp>
+        <p:nvSpPr>
+          <p:cNvPr id="2" name="Titolo 1">
+            <a:extLst>
+              <a:ext uri="{FF2B5EF4-FFF2-40B4-BE49-F238E27FC236}">
+                <a16:creationId xmlns:a16="http://schemas.microsoft.com/office/drawing/2014/main" id="{C2CCB8C7-E4BF-426C-AEA8-0ABB83627A06}"/>
+              </a:ext>
+            </a:extLst>
+          </p:cNvPr>
+          <p:cNvSpPr>
+            <a:spLocks noGrp="1"/>
+          </p:cNvSpPr>
+          <p:nvPr>
+            <p:ph type="title"/>
+          </p:nvPr>
+        </p:nvSpPr>
+        <p:spPr>
+          <a:xfrm>
+            <a:off x="906780" y="812923"/>
+            <a:ext cx="10972800" cy="1325563"/>
+          </a:xfrm>
+        </p:spPr>
+        <p:txBody>
+          <a:bodyPr>
+            <a:normAutofit/>
+          </a:bodyPr>
+          <a:lstStyle/>
+          <a:p>
+            <a:r>
+              <a:rPr lang="it-IT" sz="6600" b="1" dirty="0"/>
+              <a:t>PAGINAZIONE</a:t>
+            </a:r>
+            <a:endParaRPr lang="it-IT" sz="6600" b="1" dirty="0">
+              <a:cs typeface="Posterama"/>
+            </a:endParaRPr>
+          </a:p>
+        </p:txBody>
+      </p:sp>
+      <p:sp>
+        <p:nvSpPr>
+          <p:cNvPr id="4" name="CasellaDiTesto 3">
+            <a:extLst>
+              <a:ext uri="{FF2B5EF4-FFF2-40B4-BE49-F238E27FC236}">
+                <a16:creationId xmlns:a16="http://schemas.microsoft.com/office/drawing/2014/main" id="{C2BFCE07-C01F-9DCF-F750-F2F3325489C1}"/>
+              </a:ext>
+            </a:extLst>
+          </p:cNvPr>
+          <p:cNvSpPr txBox="1"/>
+          <p:nvPr/>
+        </p:nvSpPr>
+        <p:spPr>
+          <a:xfrm>
+            <a:off x="1030514" y="2461252"/>
+            <a:ext cx="10130971" cy="461665"/>
+          </a:xfrm>
+          <a:prstGeom prst="rect">
+            <a:avLst/>
+          </a:prstGeom>
+          <a:noFill/>
+        </p:spPr>
+        <p:txBody>
+          <a:bodyPr wrap="square" rtlCol="0">
+            <a:spAutoFit/>
+          </a:bodyPr>
+          <a:lstStyle/>
+          <a:p>
+            <a:pPr marL="285750" indent="-285750">
+              <a:buFont typeface="Arial" panose="020B0604020202020204" pitchFamily="34" charset="0"/>
+              <a:buChar char="•"/>
+            </a:pPr>
+            <a:r>
+              <a:rPr lang="it-IT" sz="2400" b="1" dirty="0"/>
+              <a:t>Se voglio usare solo un contenuto del programma 1 le pagine si scambiano</a:t>
+            </a:r>
+          </a:p>
+        </p:txBody>
+      </p:sp>
+      <p:sp>
+        <p:nvSpPr>
+          <p:cNvPr id="3" name="Segnaposto data 2">
+            <a:extLst>
+              <a:ext uri="{FF2B5EF4-FFF2-40B4-BE49-F238E27FC236}">
+                <a16:creationId xmlns:a16="http://schemas.microsoft.com/office/drawing/2014/main" id="{55F556B6-A3CF-52AD-451E-0356F372CB43}"/>
+              </a:ext>
+            </a:extLst>
+          </p:cNvPr>
+          <p:cNvSpPr>
+            <a:spLocks noGrp="1"/>
+          </p:cNvSpPr>
+          <p:nvPr>
+            <p:ph type="dt" sz="half" idx="10"/>
+          </p:nvPr>
+        </p:nvSpPr>
+        <p:spPr/>
+        <p:txBody>
+          <a:bodyPr/>
+          <a:lstStyle/>
+          <a:p>
+            <a:fld id="{62CB12B2-0025-4A86-BE42-B942EACE0A5F}" type="datetime1">
+              <a:rPr lang="it-IT" smtClean="0"/>
+              <a:t>12/04/2026</a:t>
+            </a:fld>
+            <a:endParaRPr lang="en-US"/>
+          </a:p>
+        </p:txBody>
+      </p:sp>
+      <p:graphicFrame>
+        <p:nvGraphicFramePr>
+          <p:cNvPr id="6" name="Tabella 5">
+            <a:extLst>
+              <a:ext uri="{FF2B5EF4-FFF2-40B4-BE49-F238E27FC236}">
+                <a16:creationId xmlns:a16="http://schemas.microsoft.com/office/drawing/2014/main" id="{A1CF885D-4EB7-300F-A17A-0D1AE12BFC38}"/>
+              </a:ext>
+            </a:extLst>
+          </p:cNvPr>
+          <p:cNvGraphicFramePr>
+            <a:graphicFrameLocks noGrp="1"/>
+          </p:cNvGraphicFramePr>
+          <p:nvPr>
+            <p:extLst>
+              <p:ext uri="{D42A27DB-BD31-4B8C-83A1-F6EECF244321}">
+                <p14:modId xmlns:p14="http://schemas.microsoft.com/office/powerpoint/2010/main" val="3487903403"/>
+              </p:ext>
+            </p:extLst>
+          </p:nvPr>
+        </p:nvGraphicFramePr>
+        <p:xfrm>
+          <a:off x="1342934" y="3177697"/>
+          <a:ext cx="8128000" cy="695831"/>
+        </p:xfrm>
+        <a:graphic>
+          <a:graphicData uri="http://schemas.openxmlformats.org/drawingml/2006/table">
+            <a:tbl>
+              <a:tblPr firstRow="1" bandRow="1">
+                <a:tableStyleId>{5C22544A-7EE6-4342-B048-85BDC9FD1C3A}</a:tableStyleId>
+              </a:tblPr>
+              <a:tblGrid>
+                <a:gridCol w="812800">
+                  <a:extLst>
+                    <a:ext uri="{9D8B030D-6E8A-4147-A177-3AD203B41FA5}">
+                      <a16:colId xmlns:a16="http://schemas.microsoft.com/office/drawing/2014/main" val="1694205"/>
+                    </a:ext>
+                  </a:extLst>
+                </a:gridCol>
+                <a:gridCol w="812800">
+                  <a:extLst>
+                    <a:ext uri="{9D8B030D-6E8A-4147-A177-3AD203B41FA5}">
+                      <a16:colId xmlns:a16="http://schemas.microsoft.com/office/drawing/2014/main" val="2408768007"/>
+                    </a:ext>
+                  </a:extLst>
+                </a:gridCol>
+                <a:gridCol w="812800">
+                  <a:extLst>
+                    <a:ext uri="{9D8B030D-6E8A-4147-A177-3AD203B41FA5}">
+                      <a16:colId xmlns:a16="http://schemas.microsoft.com/office/drawing/2014/main" val="3916070965"/>
+                    </a:ext>
+                  </a:extLst>
+                </a:gridCol>
+                <a:gridCol w="812800">
+                  <a:extLst>
+                    <a:ext uri="{9D8B030D-6E8A-4147-A177-3AD203B41FA5}">
+                      <a16:colId xmlns:a16="http://schemas.microsoft.com/office/drawing/2014/main" val="2884860139"/>
+                    </a:ext>
+                  </a:extLst>
+                </a:gridCol>
+                <a:gridCol w="812800">
+                  <a:extLst>
+                    <a:ext uri="{9D8B030D-6E8A-4147-A177-3AD203B41FA5}">
+                      <a16:colId xmlns:a16="http://schemas.microsoft.com/office/drawing/2014/main" val="2083948861"/>
+                    </a:ext>
+                  </a:extLst>
+                </a:gridCol>
+                <a:gridCol w="812800">
+                  <a:extLst>
+                    <a:ext uri="{9D8B030D-6E8A-4147-A177-3AD203B41FA5}">
+                      <a16:colId xmlns:a16="http://schemas.microsoft.com/office/drawing/2014/main" val="2358120665"/>
+                    </a:ext>
+                  </a:extLst>
+                </a:gridCol>
+                <a:gridCol w="812800">
+                  <a:extLst>
+                    <a:ext uri="{9D8B030D-6E8A-4147-A177-3AD203B41FA5}">
+                      <a16:colId xmlns:a16="http://schemas.microsoft.com/office/drawing/2014/main" val="4245474789"/>
+                    </a:ext>
+                  </a:extLst>
+                </a:gridCol>
+                <a:gridCol w="812800">
+                  <a:extLst>
+                    <a:ext uri="{9D8B030D-6E8A-4147-A177-3AD203B41FA5}">
+                      <a16:colId xmlns:a16="http://schemas.microsoft.com/office/drawing/2014/main" val="1139398879"/>
+                    </a:ext>
+                  </a:extLst>
+                </a:gridCol>
+                <a:gridCol w="812800">
+                  <a:extLst>
+                    <a:ext uri="{9D8B030D-6E8A-4147-A177-3AD203B41FA5}">
+                      <a16:colId xmlns:a16="http://schemas.microsoft.com/office/drawing/2014/main" val="298107426"/>
+                    </a:ext>
+                  </a:extLst>
+                </a:gridCol>
+                <a:gridCol w="812800">
+                  <a:extLst>
+                    <a:ext uri="{9D8B030D-6E8A-4147-A177-3AD203B41FA5}">
+                      <a16:colId xmlns:a16="http://schemas.microsoft.com/office/drawing/2014/main" val="1975393176"/>
+                    </a:ext>
+                  </a:extLst>
+                </a:gridCol>
+              </a:tblGrid>
+              <a:tr h="695831">
+                <a:tc>
+                  <a:txBody>
+                    <a:bodyPr/>
+                    <a:lstStyle/>
+                    <a:p>
+                      <a:endParaRPr lang="it-IT" dirty="0"/>
+                    </a:p>
+                  </a:txBody>
+                  <a:tcPr>
+                    <a:lnL w="12700" cap="flat" cmpd="sng" algn="ctr">
+                      <a:solidFill>
+                        <a:schemeClr val="tx1"/>
+                      </a:solidFill>
+                      <a:prstDash val="solid"/>
+                      <a:round/>
+                      <a:headEnd type="none" w="med" len="med"/>
+                      <a:tailEnd type="none" w="med" len="med"/>
+                    </a:lnL>
+                    <a:lnR w="12700" cap="flat" cmpd="sng" algn="ctr">
+                      <a:solidFill>
+                        <a:schemeClr val="tx1"/>
+                      </a:solidFill>
+                      <a:prstDash val="solid"/>
+                      <a:round/>
+                      <a:headEnd type="none" w="med" len="med"/>
+                      <a:tailEnd type="none" w="med" len="med"/>
+                    </a:lnR>
+                    <a:lnT w="12700" cap="flat" cmpd="sng" algn="ctr">
+                      <a:solidFill>
+                        <a:schemeClr val="tx1"/>
+                      </a:solidFill>
+                      <a:prstDash val="solid"/>
+                      <a:round/>
+                      <a:headEnd type="none" w="med" len="med"/>
+                      <a:tailEnd type="none" w="med" len="med"/>
+                    </a:lnT>
+                    <a:lnB w="12700" cap="flat" cmpd="sng" algn="ctr">
+                      <a:solidFill>
+                        <a:schemeClr val="tx1"/>
+                      </a:solidFill>
+                      <a:prstDash val="solid"/>
+                      <a:round/>
+                      <a:headEnd type="none" w="med" len="med"/>
+                      <a:tailEnd type="none" w="med" len="med"/>
+                    </a:lnB>
+                    <a:solidFill>
+                      <a:schemeClr val="accent1">
+                        <a:lumMod val="60000"/>
+                        <a:lumOff val="40000"/>
+                      </a:schemeClr>
+                    </a:solidFill>
+                  </a:tcPr>
+                </a:tc>
+                <a:tc>
+                  <a:txBody>
+                    <a:bodyPr/>
+                    <a:lstStyle/>
+                    <a:p>
+                      <a:endParaRPr lang="it-IT" dirty="0"/>
+                    </a:p>
+                  </a:txBody>
+                  <a:tcPr>
+                    <a:lnL w="12700" cap="flat" cmpd="sng" algn="ctr">
+                      <a:solidFill>
+                        <a:schemeClr val="tx1"/>
+                      </a:solidFill>
+                      <a:prstDash val="solid"/>
+                      <a:round/>
+                      <a:headEnd type="none" w="med" len="med"/>
+                      <a:tailEnd type="none" w="med" len="med"/>
+                    </a:lnL>
+                    <a:lnR w="12700" cap="flat" cmpd="sng" algn="ctr">
+                      <a:solidFill>
+                        <a:schemeClr val="tx1"/>
+                      </a:solidFill>
+                      <a:prstDash val="solid"/>
+                      <a:round/>
+                      <a:headEnd type="none" w="med" len="med"/>
+                      <a:tailEnd type="none" w="med" len="med"/>
+                    </a:lnR>
+                    <a:lnT w="12700" cap="flat" cmpd="sng" algn="ctr">
+                      <a:solidFill>
+                        <a:schemeClr val="tx1"/>
+                      </a:solidFill>
+                      <a:prstDash val="solid"/>
+                      <a:round/>
+                      <a:headEnd type="none" w="med" len="med"/>
+                      <a:tailEnd type="none" w="med" len="med"/>
+                    </a:lnT>
+                    <a:lnB w="12700" cap="flat" cmpd="sng" algn="ctr">
+                      <a:solidFill>
+                        <a:schemeClr val="tx1"/>
+                      </a:solidFill>
+                      <a:prstDash val="solid"/>
+                      <a:round/>
+                      <a:headEnd type="none" w="med" len="med"/>
+                      <a:tailEnd type="none" w="med" len="med"/>
+                    </a:lnB>
+                    <a:solidFill>
+                      <a:schemeClr val="bg1">
+                        <a:lumMod val="95000"/>
+                      </a:schemeClr>
+                    </a:solidFill>
+                  </a:tcPr>
+                </a:tc>
+                <a:tc>
+                  <a:txBody>
+                    <a:bodyPr/>
+                    <a:lstStyle/>
+                    <a:p>
+                      <a:endParaRPr lang="it-IT" dirty="0"/>
+                    </a:p>
+                  </a:txBody>
+                  <a:tcPr>
+                    <a:lnL w="12700" cap="flat" cmpd="sng" algn="ctr">
+                      <a:solidFill>
+                        <a:schemeClr val="tx1"/>
+                      </a:solidFill>
+                      <a:prstDash val="solid"/>
+                      <a:round/>
+                      <a:headEnd type="none" w="med" len="med"/>
+                      <a:tailEnd type="none" w="med" len="med"/>
+                    </a:lnL>
+                    <a:lnR w="12700" cap="flat" cmpd="sng" algn="ctr">
+                      <a:solidFill>
+                        <a:schemeClr val="tx1"/>
+                      </a:solidFill>
+                      <a:prstDash val="solid"/>
+                      <a:round/>
+                      <a:headEnd type="none" w="med" len="med"/>
+                      <a:tailEnd type="none" w="med" len="med"/>
+                    </a:lnR>
+                    <a:lnT w="12700" cap="flat" cmpd="sng" algn="ctr">
+                      <a:solidFill>
+                        <a:schemeClr val="tx1"/>
+                      </a:solidFill>
+                      <a:prstDash val="solid"/>
+                      <a:round/>
+                      <a:headEnd type="none" w="med" len="med"/>
+                      <a:tailEnd type="none" w="med" len="med"/>
+                    </a:lnT>
+                    <a:lnB w="12700" cap="flat" cmpd="sng" algn="ctr">
+                      <a:solidFill>
+                        <a:schemeClr val="tx1"/>
+                      </a:solidFill>
+                      <a:prstDash val="solid"/>
+                      <a:round/>
+                      <a:headEnd type="none" w="med" len="med"/>
+                      <a:tailEnd type="none" w="med" len="med"/>
+                    </a:lnB>
+                    <a:solidFill>
+                      <a:schemeClr val="bg1">
+                        <a:lumMod val="95000"/>
+                      </a:schemeClr>
+                    </a:solidFill>
+                  </a:tcPr>
+                </a:tc>
+                <a:tc>
+                  <a:txBody>
+                    <a:bodyPr/>
+                    <a:lstStyle/>
+                    <a:p>
+                      <a:endParaRPr lang="it-IT" dirty="0"/>
+                    </a:p>
+                  </a:txBody>
+                  <a:tcPr>
+                    <a:lnL w="12700" cap="flat" cmpd="sng" algn="ctr">
+                      <a:solidFill>
+                        <a:schemeClr val="tx1"/>
+                      </a:solidFill>
+                      <a:prstDash val="solid"/>
+                      <a:round/>
+                      <a:headEnd type="none" w="med" len="med"/>
+                      <a:tailEnd type="none" w="med" len="med"/>
+                    </a:lnL>
+                    <a:lnR w="12700" cap="flat" cmpd="sng" algn="ctr">
+                      <a:solidFill>
+                        <a:schemeClr val="tx1"/>
+                      </a:solidFill>
+                      <a:prstDash val="solid"/>
+                      <a:round/>
+                      <a:headEnd type="none" w="med" len="med"/>
+                      <a:tailEnd type="none" w="med" len="med"/>
+                    </a:lnR>
+                    <a:lnT w="12700" cap="flat" cmpd="sng" algn="ctr">
+                      <a:solidFill>
+                        <a:schemeClr val="tx1"/>
+                      </a:solidFill>
+                      <a:prstDash val="solid"/>
+                      <a:round/>
+                      <a:headEnd type="none" w="med" len="med"/>
+                      <a:tailEnd type="none" w="med" len="med"/>
+                    </a:lnT>
+                    <a:lnB w="12700" cap="flat" cmpd="sng" algn="ctr">
+                      <a:solidFill>
+                        <a:schemeClr val="tx1"/>
+                      </a:solidFill>
+                      <a:prstDash val="solid"/>
+                      <a:round/>
+                      <a:headEnd type="none" w="med" len="med"/>
+                      <a:tailEnd type="none" w="med" len="med"/>
+                    </a:lnB>
+                    <a:solidFill>
+                      <a:schemeClr val="bg1">
+                        <a:lumMod val="95000"/>
+                      </a:schemeClr>
+                    </a:solidFill>
+                  </a:tcPr>
+                </a:tc>
+                <a:tc>
+                  <a:txBody>
+                    <a:bodyPr/>
+                    <a:lstStyle/>
+                    <a:p>
+                      <a:endParaRPr lang="it-IT" dirty="0"/>
+                    </a:p>
+                  </a:txBody>
+                  <a:tcPr>
+                    <a:lnL w="12700" cap="flat" cmpd="sng" algn="ctr">
+                      <a:solidFill>
+                        <a:schemeClr val="tx1"/>
+                      </a:solidFill>
+                      <a:prstDash val="solid"/>
+                      <a:round/>
+                      <a:headEnd type="none" w="med" len="med"/>
+                      <a:tailEnd type="none" w="med" len="med"/>
+                    </a:lnL>
+                    <a:lnR w="12700" cap="flat" cmpd="sng" algn="ctr">
+                      <a:solidFill>
+                        <a:schemeClr val="tx1"/>
+                      </a:solidFill>
+                      <a:prstDash val="solid"/>
+                      <a:round/>
+                      <a:headEnd type="none" w="med" len="med"/>
+                      <a:tailEnd type="none" w="med" len="med"/>
+                    </a:lnR>
+                    <a:lnT w="12700" cap="flat" cmpd="sng" algn="ctr">
+                      <a:solidFill>
+                        <a:schemeClr val="tx1"/>
+                      </a:solidFill>
+                      <a:prstDash val="solid"/>
+                      <a:round/>
+                      <a:headEnd type="none" w="med" len="med"/>
+                      <a:tailEnd type="none" w="med" len="med"/>
+                    </a:lnT>
+                    <a:lnB w="12700" cap="flat" cmpd="sng" algn="ctr">
+                      <a:solidFill>
+                        <a:schemeClr val="tx1"/>
+                      </a:solidFill>
+                      <a:prstDash val="solid"/>
+                      <a:round/>
+                      <a:headEnd type="none" w="med" len="med"/>
+                      <a:tailEnd type="none" w="med" len="med"/>
+                    </a:lnB>
+                    <a:solidFill>
+                      <a:schemeClr val="bg1">
+                        <a:lumMod val="95000"/>
+                      </a:schemeClr>
+                    </a:solidFill>
+                  </a:tcPr>
+                </a:tc>
+                <a:tc>
+                  <a:txBody>
+                    <a:bodyPr/>
+                    <a:lstStyle/>
+                    <a:p>
+                      <a:endParaRPr lang="it-IT" dirty="0"/>
+                    </a:p>
+                  </a:txBody>
+                  <a:tcPr>
+                    <a:lnL w="12700" cap="flat" cmpd="sng" algn="ctr">
+                      <a:solidFill>
+                        <a:schemeClr val="tx1"/>
+                      </a:solidFill>
+                      <a:prstDash val="solid"/>
+                      <a:round/>
+                      <a:headEnd type="none" w="med" len="med"/>
+                      <a:tailEnd type="none" w="med" len="med"/>
+                    </a:lnL>
+                    <a:lnR w="12700" cap="flat" cmpd="sng" algn="ctr">
+                      <a:solidFill>
+                        <a:schemeClr val="tx1"/>
+                      </a:solidFill>
+                      <a:prstDash val="solid"/>
+                      <a:round/>
+                      <a:headEnd type="none" w="med" len="med"/>
+                      <a:tailEnd type="none" w="med" len="med"/>
+                    </a:lnR>
+                    <a:lnT w="12700" cap="flat" cmpd="sng" algn="ctr">
+                      <a:solidFill>
+                        <a:schemeClr val="tx1"/>
+                      </a:solidFill>
+                      <a:prstDash val="solid"/>
+                      <a:round/>
+                      <a:headEnd type="none" w="med" len="med"/>
+                      <a:tailEnd type="none" w="med" len="med"/>
+                    </a:lnT>
+                    <a:lnB w="12700" cap="flat" cmpd="sng" algn="ctr">
+                      <a:solidFill>
+                        <a:schemeClr val="tx1"/>
+                      </a:solidFill>
+                      <a:prstDash val="solid"/>
+                      <a:round/>
+                      <a:headEnd type="none" w="med" len="med"/>
+                      <a:tailEnd type="none" w="med" len="med"/>
+                    </a:lnB>
+                    <a:solidFill>
+                      <a:schemeClr val="bg1">
+                        <a:lumMod val="95000"/>
+                      </a:schemeClr>
+                    </a:solidFill>
+                  </a:tcPr>
+                </a:tc>
+                <a:tc>
+                  <a:txBody>
+                    <a:bodyPr/>
+                    <a:lstStyle/>
+                    <a:p>
+                      <a:endParaRPr lang="it-IT" dirty="0">
+                        <a:solidFill>
+                          <a:schemeClr val="bg2"/>
+                        </a:solidFill>
+                      </a:endParaRPr>
+                    </a:p>
+                  </a:txBody>
+                  <a:tcPr>
+                    <a:lnL w="12700" cap="flat" cmpd="sng" algn="ctr">
+                      <a:solidFill>
+                        <a:schemeClr val="tx1"/>
+                      </a:solidFill>
+                      <a:prstDash val="solid"/>
+                      <a:round/>
+                      <a:headEnd type="none" w="med" len="med"/>
+                      <a:tailEnd type="none" w="med" len="med"/>
+                    </a:lnL>
+                    <a:lnR w="12700" cap="flat" cmpd="sng" algn="ctr">
+                      <a:solidFill>
+                        <a:schemeClr val="tx1"/>
+                      </a:solidFill>
+                      <a:prstDash val="solid"/>
+                      <a:round/>
+                      <a:headEnd type="none" w="med" len="med"/>
+                      <a:tailEnd type="none" w="med" len="med"/>
+                    </a:lnR>
+                    <a:lnT w="12700" cap="flat" cmpd="sng" algn="ctr">
+                      <a:solidFill>
+                        <a:schemeClr val="tx1"/>
+                      </a:solidFill>
+                      <a:prstDash val="solid"/>
+                      <a:round/>
+                      <a:headEnd type="none" w="med" len="med"/>
+                      <a:tailEnd type="none" w="med" len="med"/>
+                    </a:lnT>
+                    <a:lnB w="12700" cap="flat" cmpd="sng" algn="ctr">
+                      <a:solidFill>
+                        <a:schemeClr val="tx1"/>
+                      </a:solidFill>
+                      <a:prstDash val="solid"/>
+                      <a:round/>
+                      <a:headEnd type="none" w="med" len="med"/>
+                      <a:tailEnd type="none" w="med" len="med"/>
+                    </a:lnB>
+                    <a:solidFill>
+                      <a:schemeClr val="bg1">
+                        <a:lumMod val="95000"/>
+                      </a:schemeClr>
+                    </a:solidFill>
+                  </a:tcPr>
+                </a:tc>
+                <a:tc>
+                  <a:txBody>
+                    <a:bodyPr/>
+                    <a:lstStyle/>
+                    <a:p>
+                      <a:endParaRPr lang="it-IT" dirty="0"/>
+                    </a:p>
+                  </a:txBody>
+                  <a:tcPr>
+                    <a:lnL w="12700" cap="flat" cmpd="sng" algn="ctr">
+                      <a:solidFill>
+                        <a:schemeClr val="tx1"/>
+                      </a:solidFill>
+                      <a:prstDash val="solid"/>
+                      <a:round/>
+                      <a:headEnd type="none" w="med" len="med"/>
+                      <a:tailEnd type="none" w="med" len="med"/>
+                    </a:lnL>
+                    <a:lnR w="12700" cap="flat" cmpd="sng" algn="ctr">
+                      <a:solidFill>
+                        <a:schemeClr val="tx1"/>
+                      </a:solidFill>
+                      <a:prstDash val="solid"/>
+                      <a:round/>
+                      <a:headEnd type="none" w="med" len="med"/>
+                      <a:tailEnd type="none" w="med" len="med"/>
+                    </a:lnR>
+                    <a:lnT w="12700" cap="flat" cmpd="sng" algn="ctr">
+                      <a:solidFill>
+                        <a:schemeClr val="tx1"/>
+                      </a:solidFill>
+                      <a:prstDash val="solid"/>
+                      <a:round/>
+                      <a:headEnd type="none" w="med" len="med"/>
+                      <a:tailEnd type="none" w="med" len="med"/>
+                    </a:lnT>
+                    <a:lnB w="12700" cap="flat" cmpd="sng" algn="ctr">
+                      <a:solidFill>
+                        <a:schemeClr val="tx1"/>
+                      </a:solidFill>
+                      <a:prstDash val="solid"/>
+                      <a:round/>
+                      <a:headEnd type="none" w="med" len="med"/>
+                      <a:tailEnd type="none" w="med" len="med"/>
+                    </a:lnB>
+                    <a:solidFill>
+                      <a:schemeClr val="bg1">
+                        <a:lumMod val="95000"/>
+                      </a:schemeClr>
+                    </a:solidFill>
+                  </a:tcPr>
+                </a:tc>
+                <a:tc>
+                  <a:txBody>
+                    <a:bodyPr/>
+                    <a:lstStyle/>
+                    <a:p>
+                      <a:endParaRPr lang="it-IT" dirty="0"/>
+                    </a:p>
+                  </a:txBody>
+                  <a:tcPr>
+                    <a:lnL w="12700" cap="flat" cmpd="sng" algn="ctr">
+                      <a:solidFill>
+                        <a:schemeClr val="tx1"/>
+                      </a:solidFill>
+                      <a:prstDash val="solid"/>
+                      <a:round/>
+                      <a:headEnd type="none" w="med" len="med"/>
+                      <a:tailEnd type="none" w="med" len="med"/>
+                    </a:lnL>
+                    <a:lnR w="12700" cap="flat" cmpd="sng" algn="ctr">
+                      <a:solidFill>
+                        <a:schemeClr val="tx1"/>
+                      </a:solidFill>
+                      <a:prstDash val="solid"/>
+                      <a:round/>
+                      <a:headEnd type="none" w="med" len="med"/>
+                      <a:tailEnd type="none" w="med" len="med"/>
+                    </a:lnR>
+                    <a:lnT w="12700" cap="flat" cmpd="sng" algn="ctr">
+                      <a:solidFill>
+                        <a:schemeClr val="tx1"/>
+                      </a:solidFill>
+                      <a:prstDash val="solid"/>
+                      <a:round/>
+                      <a:headEnd type="none" w="med" len="med"/>
+                      <a:tailEnd type="none" w="med" len="med"/>
+                    </a:lnT>
+                    <a:lnB w="12700" cap="flat" cmpd="sng" algn="ctr">
+                      <a:solidFill>
+                        <a:schemeClr val="tx1"/>
+                      </a:solidFill>
+                      <a:prstDash val="solid"/>
+                      <a:round/>
+                      <a:headEnd type="none" w="med" len="med"/>
+                      <a:tailEnd type="none" w="med" len="med"/>
+                    </a:lnB>
+                    <a:solidFill>
+                      <a:schemeClr val="bg1">
+                        <a:lumMod val="95000"/>
+                      </a:schemeClr>
+                    </a:solidFill>
+                  </a:tcPr>
+                </a:tc>
+                <a:tc>
+                  <a:txBody>
+                    <a:bodyPr/>
+                    <a:lstStyle/>
+                    <a:p>
+                      <a:endParaRPr lang="it-IT" dirty="0"/>
+                    </a:p>
+                  </a:txBody>
+                  <a:tcPr>
+                    <a:lnL w="12700" cap="flat" cmpd="sng" algn="ctr">
+                      <a:solidFill>
+                        <a:schemeClr val="tx1"/>
+                      </a:solidFill>
+                      <a:prstDash val="solid"/>
+                      <a:round/>
+                      <a:headEnd type="none" w="med" len="med"/>
+                      <a:tailEnd type="none" w="med" len="med"/>
+                    </a:lnL>
+                    <a:lnR w="12700" cap="flat" cmpd="sng" algn="ctr">
+                      <a:solidFill>
+                        <a:schemeClr val="tx1"/>
+                      </a:solidFill>
+                      <a:prstDash val="solid"/>
+                      <a:round/>
+                      <a:headEnd type="none" w="med" len="med"/>
+                      <a:tailEnd type="none" w="med" len="med"/>
+                    </a:lnR>
+                    <a:lnT w="12700" cap="flat" cmpd="sng" algn="ctr">
+                      <a:solidFill>
+                        <a:schemeClr val="tx1"/>
+                      </a:solidFill>
+                      <a:prstDash val="solid"/>
+                      <a:round/>
+                      <a:headEnd type="none" w="med" len="med"/>
+                      <a:tailEnd type="none" w="med" len="med"/>
+                    </a:lnT>
+                    <a:lnB w="12700" cap="flat" cmpd="sng" algn="ctr">
+                      <a:solidFill>
+                        <a:schemeClr val="tx1"/>
+                      </a:solidFill>
+                      <a:prstDash val="solid"/>
+                      <a:round/>
+                      <a:headEnd type="none" w="med" len="med"/>
+                      <a:tailEnd type="none" w="med" len="med"/>
+                    </a:lnB>
+                    <a:solidFill>
+                      <a:schemeClr val="bg1">
+                        <a:lumMod val="95000"/>
+                      </a:schemeClr>
+                    </a:solidFill>
+                  </a:tcPr>
+                </a:tc>
+                <a:extLst>
+                  <a:ext uri="{0D108BD9-81ED-4DB2-BD59-A6C34878D82A}">
+                    <a16:rowId xmlns:a16="http://schemas.microsoft.com/office/drawing/2014/main" val="775609398"/>
+                  </a:ext>
+                </a:extLst>
+              </a:tr>
+            </a:tbl>
+          </a:graphicData>
+        </a:graphic>
+      </p:graphicFrame>
+      <p:graphicFrame>
+        <p:nvGraphicFramePr>
+          <p:cNvPr id="7" name="Tabella 6">
+            <a:extLst>
+              <a:ext uri="{FF2B5EF4-FFF2-40B4-BE49-F238E27FC236}">
+                <a16:creationId xmlns:a16="http://schemas.microsoft.com/office/drawing/2014/main" id="{8D2FD036-1865-4255-8A8F-FE87D115EE8D}"/>
+              </a:ext>
+            </a:extLst>
+          </p:cNvPr>
+          <p:cNvGraphicFramePr>
+            <a:graphicFrameLocks noGrp="1"/>
+          </p:cNvGraphicFramePr>
+          <p:nvPr>
+            <p:extLst>
+              <p:ext uri="{D42A27DB-BD31-4B8C-83A1-F6EECF244321}">
+                <p14:modId xmlns:p14="http://schemas.microsoft.com/office/powerpoint/2010/main" val="4146709170"/>
+              </p:ext>
+            </p:extLst>
+          </p:nvPr>
+        </p:nvGraphicFramePr>
+        <p:xfrm>
+          <a:off x="1342934" y="3891336"/>
+          <a:ext cx="8128000" cy="365760"/>
+        </p:xfrm>
+        <a:graphic>
+          <a:graphicData uri="http://schemas.openxmlformats.org/drawingml/2006/table">
+            <a:tbl>
+              <a:tblPr firstRow="1" bandRow="1">
+                <a:tableStyleId>{5C22544A-7EE6-4342-B048-85BDC9FD1C3A}</a:tableStyleId>
+              </a:tblPr>
+              <a:tblGrid>
+                <a:gridCol w="812800">
+                  <a:extLst>
+                    <a:ext uri="{9D8B030D-6E8A-4147-A177-3AD203B41FA5}">
+                      <a16:colId xmlns:a16="http://schemas.microsoft.com/office/drawing/2014/main" val="1694205"/>
+                    </a:ext>
+                  </a:extLst>
+                </a:gridCol>
+                <a:gridCol w="812800">
+                  <a:extLst>
+                    <a:ext uri="{9D8B030D-6E8A-4147-A177-3AD203B41FA5}">
+                      <a16:colId xmlns:a16="http://schemas.microsoft.com/office/drawing/2014/main" val="2408768007"/>
+                    </a:ext>
+                  </a:extLst>
+                </a:gridCol>
+                <a:gridCol w="812800">
+                  <a:extLst>
+                    <a:ext uri="{9D8B030D-6E8A-4147-A177-3AD203B41FA5}">
+                      <a16:colId xmlns:a16="http://schemas.microsoft.com/office/drawing/2014/main" val="3916070965"/>
+                    </a:ext>
+                  </a:extLst>
+                </a:gridCol>
+                <a:gridCol w="812800">
+                  <a:extLst>
+                    <a:ext uri="{9D8B030D-6E8A-4147-A177-3AD203B41FA5}">
+                      <a16:colId xmlns:a16="http://schemas.microsoft.com/office/drawing/2014/main" val="2884860139"/>
+                    </a:ext>
+                  </a:extLst>
+                </a:gridCol>
+                <a:gridCol w="812800">
+                  <a:extLst>
+                    <a:ext uri="{9D8B030D-6E8A-4147-A177-3AD203B41FA5}">
+                      <a16:colId xmlns:a16="http://schemas.microsoft.com/office/drawing/2014/main" val="2083948861"/>
+                    </a:ext>
+                  </a:extLst>
+                </a:gridCol>
+                <a:gridCol w="812800">
+                  <a:extLst>
+                    <a:ext uri="{9D8B030D-6E8A-4147-A177-3AD203B41FA5}">
+                      <a16:colId xmlns:a16="http://schemas.microsoft.com/office/drawing/2014/main" val="2358120665"/>
+                    </a:ext>
+                  </a:extLst>
+                </a:gridCol>
+                <a:gridCol w="812800">
+                  <a:extLst>
+                    <a:ext uri="{9D8B030D-6E8A-4147-A177-3AD203B41FA5}">
+                      <a16:colId xmlns:a16="http://schemas.microsoft.com/office/drawing/2014/main" val="4245474789"/>
+                    </a:ext>
+                  </a:extLst>
+                </a:gridCol>
+                <a:gridCol w="812800">
+                  <a:extLst>
+                    <a:ext uri="{9D8B030D-6E8A-4147-A177-3AD203B41FA5}">
+                      <a16:colId xmlns:a16="http://schemas.microsoft.com/office/drawing/2014/main" val="1139398879"/>
+                    </a:ext>
+                  </a:extLst>
+                </a:gridCol>
+                <a:gridCol w="812800">
+                  <a:extLst>
+                    <a:ext uri="{9D8B030D-6E8A-4147-A177-3AD203B41FA5}">
+                      <a16:colId xmlns:a16="http://schemas.microsoft.com/office/drawing/2014/main" val="298107426"/>
+                    </a:ext>
+                  </a:extLst>
+                </a:gridCol>
+                <a:gridCol w="812800">
+                  <a:extLst>
+                    <a:ext uri="{9D8B030D-6E8A-4147-A177-3AD203B41FA5}">
+                      <a16:colId xmlns:a16="http://schemas.microsoft.com/office/drawing/2014/main" val="1975393176"/>
+                    </a:ext>
+                  </a:extLst>
+                </a:gridCol>
+              </a:tblGrid>
+              <a:tr h="284508">
+                <a:tc>
+                  <a:txBody>
+                    <a:bodyPr/>
+                    <a:lstStyle/>
+                    <a:p>
+                      <a:r>
+                        <a:rPr lang="it-IT" dirty="0"/>
+                        <a:t>P1</a:t>
+                      </a:r>
+                    </a:p>
+                  </a:txBody>
+                  <a:tcPr>
+                    <a:lnL w="12700" cap="flat" cmpd="sng" algn="ctr">
+                      <a:solidFill>
+                        <a:schemeClr val="tx1"/>
+                      </a:solidFill>
+                      <a:prstDash val="solid"/>
+                      <a:round/>
+                      <a:headEnd type="none" w="med" len="med"/>
+                      <a:tailEnd type="none" w="med" len="med"/>
+                    </a:lnL>
+                    <a:lnR w="12700" cap="flat" cmpd="sng" algn="ctr">
+                      <a:solidFill>
+                        <a:schemeClr val="tx1"/>
+                      </a:solidFill>
+                      <a:prstDash val="solid"/>
+                      <a:round/>
+                      <a:headEnd type="none" w="med" len="med"/>
+                      <a:tailEnd type="none" w="med" len="med"/>
+                    </a:lnR>
+                    <a:lnT w="12700" cap="flat" cmpd="sng" algn="ctr">
+                      <a:solidFill>
+                        <a:schemeClr val="tx1"/>
+                      </a:solidFill>
+                      <a:prstDash val="solid"/>
+                      <a:round/>
+                      <a:headEnd type="none" w="med" len="med"/>
+                      <a:tailEnd type="none" w="med" len="med"/>
+                    </a:lnT>
+                    <a:lnB w="12700" cap="flat" cmpd="sng" algn="ctr">
+                      <a:solidFill>
+                        <a:schemeClr val="tx1"/>
+                      </a:solidFill>
+                      <a:prstDash val="solid"/>
+                      <a:round/>
+                      <a:headEnd type="none" w="med" len="med"/>
+                      <a:tailEnd type="none" w="med" len="med"/>
+                    </a:lnB>
+                    <a:solidFill>
+                      <a:schemeClr val="accent1">
+                        <a:lumMod val="60000"/>
+                        <a:lumOff val="40000"/>
+                      </a:schemeClr>
+                    </a:solidFill>
+                  </a:tcPr>
+                </a:tc>
+                <a:tc>
+                  <a:txBody>
+                    <a:bodyPr/>
+                    <a:lstStyle/>
+                    <a:p>
+                      <a:endParaRPr lang="it-IT" dirty="0"/>
+                    </a:p>
+                  </a:txBody>
+                  <a:tcPr>
+                    <a:lnL w="12700" cap="flat" cmpd="sng" algn="ctr">
+                      <a:solidFill>
+                        <a:schemeClr val="tx1"/>
+                      </a:solidFill>
+                      <a:prstDash val="solid"/>
+                      <a:round/>
+                      <a:headEnd type="none" w="med" len="med"/>
+                      <a:tailEnd type="none" w="med" len="med"/>
+                    </a:lnL>
+                    <a:lnR w="12700" cap="flat" cmpd="sng" algn="ctr">
+                      <a:solidFill>
+                        <a:schemeClr val="tx1"/>
+                      </a:solidFill>
+                      <a:prstDash val="solid"/>
+                      <a:round/>
+                      <a:headEnd type="none" w="med" len="med"/>
+                      <a:tailEnd type="none" w="med" len="med"/>
+                    </a:lnR>
+                    <a:lnT w="12700" cap="flat" cmpd="sng" algn="ctr">
+                      <a:solidFill>
+                        <a:schemeClr val="tx1"/>
+                      </a:solidFill>
+                      <a:prstDash val="solid"/>
+                      <a:round/>
+                      <a:headEnd type="none" w="med" len="med"/>
+                      <a:tailEnd type="none" w="med" len="med"/>
+                    </a:lnT>
+                    <a:lnB w="12700" cap="flat" cmpd="sng" algn="ctr">
+                      <a:solidFill>
+                        <a:schemeClr val="tx1"/>
+                      </a:solidFill>
+                      <a:prstDash val="solid"/>
+                      <a:round/>
+                      <a:headEnd type="none" w="med" len="med"/>
+                      <a:tailEnd type="none" w="med" len="med"/>
+                    </a:lnB>
+                    <a:solidFill>
+                      <a:schemeClr val="bg1">
+                        <a:lumMod val="95000"/>
+                      </a:schemeClr>
+                    </a:solidFill>
+                  </a:tcPr>
+                </a:tc>
+                <a:tc>
+                  <a:txBody>
+                    <a:bodyPr/>
+                    <a:lstStyle/>
+                    <a:p>
+                      <a:endParaRPr lang="it-IT" dirty="0"/>
+                    </a:p>
+                  </a:txBody>
+                  <a:tcPr>
+                    <a:lnL w="12700" cap="flat" cmpd="sng" algn="ctr">
+                      <a:solidFill>
+                        <a:schemeClr val="tx1"/>
+                      </a:solidFill>
+                      <a:prstDash val="solid"/>
+                      <a:round/>
+                      <a:headEnd type="none" w="med" len="med"/>
+                      <a:tailEnd type="none" w="med" len="med"/>
+                    </a:lnL>
+                    <a:lnR w="12700" cap="flat" cmpd="sng" algn="ctr">
+                      <a:solidFill>
+                        <a:schemeClr val="tx1"/>
+                      </a:solidFill>
+                      <a:prstDash val="solid"/>
+                      <a:round/>
+                      <a:headEnd type="none" w="med" len="med"/>
+                      <a:tailEnd type="none" w="med" len="med"/>
+                    </a:lnR>
+                    <a:lnT w="12700" cap="flat" cmpd="sng" algn="ctr">
+                      <a:solidFill>
+                        <a:schemeClr val="tx1"/>
+                      </a:solidFill>
+                      <a:prstDash val="solid"/>
+                      <a:round/>
+                      <a:headEnd type="none" w="med" len="med"/>
+                      <a:tailEnd type="none" w="med" len="med"/>
+                    </a:lnT>
+                    <a:lnB w="12700" cap="flat" cmpd="sng" algn="ctr">
+                      <a:solidFill>
+                        <a:schemeClr val="tx1"/>
+                      </a:solidFill>
+                      <a:prstDash val="solid"/>
+                      <a:round/>
+                      <a:headEnd type="none" w="med" len="med"/>
+                      <a:tailEnd type="none" w="med" len="med"/>
+                    </a:lnB>
+                    <a:solidFill>
+                      <a:schemeClr val="bg1">
+                        <a:lumMod val="95000"/>
+                      </a:schemeClr>
+                    </a:solidFill>
+                  </a:tcPr>
+                </a:tc>
+                <a:tc>
+                  <a:txBody>
+                    <a:bodyPr/>
+                    <a:lstStyle/>
+                    <a:p>
+                      <a:endParaRPr lang="it-IT" dirty="0"/>
+                    </a:p>
+                  </a:txBody>
+                  <a:tcPr>
+                    <a:lnL w="12700" cap="flat" cmpd="sng" algn="ctr">
+                      <a:solidFill>
+                        <a:schemeClr val="tx1"/>
+                      </a:solidFill>
+                      <a:prstDash val="solid"/>
+                      <a:round/>
+                      <a:headEnd type="none" w="med" len="med"/>
+                      <a:tailEnd type="none" w="med" len="med"/>
+                    </a:lnL>
+                    <a:lnR w="12700" cap="flat" cmpd="sng" algn="ctr">
+                      <a:solidFill>
+                        <a:schemeClr val="tx1"/>
+                      </a:solidFill>
+                      <a:prstDash val="solid"/>
+                      <a:round/>
+                      <a:headEnd type="none" w="med" len="med"/>
+                      <a:tailEnd type="none" w="med" len="med"/>
+                    </a:lnR>
+                    <a:lnT w="12700" cap="flat" cmpd="sng" algn="ctr">
+                      <a:solidFill>
+                        <a:schemeClr val="tx1"/>
+                      </a:solidFill>
+                      <a:prstDash val="solid"/>
+                      <a:round/>
+                      <a:headEnd type="none" w="med" len="med"/>
+                      <a:tailEnd type="none" w="med" len="med"/>
+                    </a:lnT>
+                    <a:lnB w="12700" cap="flat" cmpd="sng" algn="ctr">
+                      <a:solidFill>
+                        <a:schemeClr val="tx1"/>
+                      </a:solidFill>
+                      <a:prstDash val="solid"/>
+                      <a:round/>
+                      <a:headEnd type="none" w="med" len="med"/>
+                      <a:tailEnd type="none" w="med" len="med"/>
+                    </a:lnB>
+                    <a:solidFill>
+                      <a:schemeClr val="bg1">
+                        <a:lumMod val="95000"/>
+                      </a:schemeClr>
+                    </a:solidFill>
+                  </a:tcPr>
+                </a:tc>
+                <a:tc>
+                  <a:txBody>
+                    <a:bodyPr/>
+                    <a:lstStyle/>
+                    <a:p>
+                      <a:endParaRPr lang="it-IT" dirty="0"/>
+                    </a:p>
+                  </a:txBody>
+                  <a:tcPr>
+                    <a:lnL w="12700" cap="flat" cmpd="sng" algn="ctr">
+                      <a:solidFill>
+                        <a:schemeClr val="tx1"/>
+                      </a:solidFill>
+                      <a:prstDash val="solid"/>
+                      <a:round/>
+                      <a:headEnd type="none" w="med" len="med"/>
+                      <a:tailEnd type="none" w="med" len="med"/>
+                    </a:lnL>
+                    <a:lnR w="12700" cap="flat" cmpd="sng" algn="ctr">
+                      <a:solidFill>
+                        <a:schemeClr val="tx1"/>
+                      </a:solidFill>
+                      <a:prstDash val="solid"/>
+                      <a:round/>
+                      <a:headEnd type="none" w="med" len="med"/>
+                      <a:tailEnd type="none" w="med" len="med"/>
+                    </a:lnR>
+                    <a:lnT w="12700" cap="flat" cmpd="sng" algn="ctr">
+                      <a:solidFill>
+                        <a:schemeClr val="tx1"/>
+                      </a:solidFill>
+                      <a:prstDash val="solid"/>
+                      <a:round/>
+                      <a:headEnd type="none" w="med" len="med"/>
+                      <a:tailEnd type="none" w="med" len="med"/>
+                    </a:lnT>
+                    <a:lnB w="12700" cap="flat" cmpd="sng" algn="ctr">
+                      <a:solidFill>
+                        <a:schemeClr val="tx1"/>
+                      </a:solidFill>
+                      <a:prstDash val="solid"/>
+                      <a:round/>
+                      <a:headEnd type="none" w="med" len="med"/>
+                      <a:tailEnd type="none" w="med" len="med"/>
+                    </a:lnB>
+                    <a:solidFill>
+                      <a:schemeClr val="bg1">
+                        <a:lumMod val="95000"/>
+                      </a:schemeClr>
+                    </a:solidFill>
+                  </a:tcPr>
+                </a:tc>
+                <a:tc>
+                  <a:txBody>
+                    <a:bodyPr/>
+                    <a:lstStyle/>
+                    <a:p>
+                      <a:endParaRPr lang="it-IT" dirty="0"/>
+                    </a:p>
+                  </a:txBody>
+                  <a:tcPr>
+                    <a:lnL w="12700" cap="flat" cmpd="sng" algn="ctr">
+                      <a:solidFill>
+                        <a:schemeClr val="tx1"/>
+                      </a:solidFill>
+                      <a:prstDash val="solid"/>
+                      <a:round/>
+                      <a:headEnd type="none" w="med" len="med"/>
+                      <a:tailEnd type="none" w="med" len="med"/>
+                    </a:lnL>
+                    <a:lnR w="12700" cap="flat" cmpd="sng" algn="ctr">
+                      <a:solidFill>
+                        <a:schemeClr val="tx1"/>
+                      </a:solidFill>
+                      <a:prstDash val="solid"/>
+                      <a:round/>
+                      <a:headEnd type="none" w="med" len="med"/>
+                      <a:tailEnd type="none" w="med" len="med"/>
+                    </a:lnR>
+                    <a:lnT w="12700" cap="flat" cmpd="sng" algn="ctr">
+                      <a:solidFill>
+                        <a:schemeClr val="tx1"/>
+                      </a:solidFill>
+                      <a:prstDash val="solid"/>
+                      <a:round/>
+                      <a:headEnd type="none" w="med" len="med"/>
+                      <a:tailEnd type="none" w="med" len="med"/>
+                    </a:lnT>
+                    <a:lnB w="12700" cap="flat" cmpd="sng" algn="ctr">
+                      <a:solidFill>
+                        <a:schemeClr val="tx1"/>
+                      </a:solidFill>
+                      <a:prstDash val="solid"/>
+                      <a:round/>
+                      <a:headEnd type="none" w="med" len="med"/>
+                      <a:tailEnd type="none" w="med" len="med"/>
+                    </a:lnB>
+                    <a:solidFill>
+                      <a:schemeClr val="bg1">
+                        <a:lumMod val="95000"/>
+                      </a:schemeClr>
+                    </a:solidFill>
+                  </a:tcPr>
+                </a:tc>
+                <a:tc>
+                  <a:txBody>
+                    <a:bodyPr/>
+                    <a:lstStyle/>
+                    <a:p>
+                      <a:endParaRPr lang="it-IT" dirty="0">
+                        <a:solidFill>
+                          <a:schemeClr val="bg2"/>
+                        </a:solidFill>
+                      </a:endParaRPr>
+                    </a:p>
+                  </a:txBody>
+                  <a:tcPr>
+                    <a:lnL w="12700" cap="flat" cmpd="sng" algn="ctr">
+                      <a:solidFill>
+                        <a:schemeClr val="tx1"/>
+                      </a:solidFill>
+                      <a:prstDash val="solid"/>
+                      <a:round/>
+                      <a:headEnd type="none" w="med" len="med"/>
+                      <a:tailEnd type="none" w="med" len="med"/>
+                    </a:lnL>
+                    <a:lnR w="12700" cap="flat" cmpd="sng" algn="ctr">
+                      <a:solidFill>
+                        <a:schemeClr val="tx1"/>
+                      </a:solidFill>
+                      <a:prstDash val="solid"/>
+                      <a:round/>
+                      <a:headEnd type="none" w="med" len="med"/>
+                      <a:tailEnd type="none" w="med" len="med"/>
+                    </a:lnR>
+                    <a:lnT w="12700" cap="flat" cmpd="sng" algn="ctr">
+                      <a:solidFill>
+                        <a:schemeClr val="tx1"/>
+                      </a:solidFill>
+                      <a:prstDash val="solid"/>
+                      <a:round/>
+                      <a:headEnd type="none" w="med" len="med"/>
+                      <a:tailEnd type="none" w="med" len="med"/>
+                    </a:lnT>
+                    <a:lnB w="12700" cap="flat" cmpd="sng" algn="ctr">
+                      <a:solidFill>
+                        <a:schemeClr val="tx1"/>
+                      </a:solidFill>
+                      <a:prstDash val="solid"/>
+                      <a:round/>
+                      <a:headEnd type="none" w="med" len="med"/>
+                      <a:tailEnd type="none" w="med" len="med"/>
+                    </a:lnB>
+                    <a:solidFill>
+                      <a:schemeClr val="bg1">
+                        <a:lumMod val="95000"/>
+                      </a:schemeClr>
+                    </a:solidFill>
+                  </a:tcPr>
+                </a:tc>
+                <a:tc>
+                  <a:txBody>
+                    <a:bodyPr/>
+                    <a:lstStyle/>
+                    <a:p>
+                      <a:endParaRPr lang="it-IT" dirty="0"/>
+                    </a:p>
+                  </a:txBody>
+                  <a:tcPr>
+                    <a:lnL w="12700" cap="flat" cmpd="sng" algn="ctr">
+                      <a:solidFill>
+                        <a:schemeClr val="tx1"/>
+                      </a:solidFill>
+                      <a:prstDash val="solid"/>
+                      <a:round/>
+                      <a:headEnd type="none" w="med" len="med"/>
+                      <a:tailEnd type="none" w="med" len="med"/>
+                    </a:lnL>
+                    <a:lnR w="12700" cap="flat" cmpd="sng" algn="ctr">
+                      <a:solidFill>
+                        <a:schemeClr val="tx1"/>
+                      </a:solidFill>
+                      <a:prstDash val="solid"/>
+                      <a:round/>
+                      <a:headEnd type="none" w="med" len="med"/>
+                      <a:tailEnd type="none" w="med" len="med"/>
+                    </a:lnR>
+                    <a:lnT w="12700" cap="flat" cmpd="sng" algn="ctr">
+                      <a:solidFill>
+                        <a:schemeClr val="tx1"/>
+                      </a:solidFill>
+                      <a:prstDash val="solid"/>
+                      <a:round/>
+                      <a:headEnd type="none" w="med" len="med"/>
+                      <a:tailEnd type="none" w="med" len="med"/>
+                    </a:lnT>
+                    <a:lnB w="12700" cap="flat" cmpd="sng" algn="ctr">
+                      <a:solidFill>
+                        <a:schemeClr val="tx1"/>
+                      </a:solidFill>
+                      <a:prstDash val="solid"/>
+                      <a:round/>
+                      <a:headEnd type="none" w="med" len="med"/>
+                      <a:tailEnd type="none" w="med" len="med"/>
+                    </a:lnB>
+                    <a:solidFill>
+                      <a:schemeClr val="bg1">
+                        <a:lumMod val="95000"/>
+                      </a:schemeClr>
+                    </a:solidFill>
+                  </a:tcPr>
+                </a:tc>
+                <a:tc>
+                  <a:txBody>
+                    <a:bodyPr/>
+                    <a:lstStyle/>
+                    <a:p>
+                      <a:endParaRPr lang="it-IT" dirty="0"/>
+                    </a:p>
+                  </a:txBody>
+                  <a:tcPr>
+                    <a:lnL w="12700" cap="flat" cmpd="sng" algn="ctr">
+                      <a:solidFill>
+                        <a:schemeClr val="tx1"/>
+                      </a:solidFill>
+                      <a:prstDash val="solid"/>
+                      <a:round/>
+                      <a:headEnd type="none" w="med" len="med"/>
+                      <a:tailEnd type="none" w="med" len="med"/>
+                    </a:lnL>
+                    <a:lnR w="12700" cap="flat" cmpd="sng" algn="ctr">
+                      <a:solidFill>
+                        <a:schemeClr val="tx1"/>
+                      </a:solidFill>
+                      <a:prstDash val="solid"/>
+                      <a:round/>
+                      <a:headEnd type="none" w="med" len="med"/>
+                      <a:tailEnd type="none" w="med" len="med"/>
+                    </a:lnR>
+                    <a:lnT w="12700" cap="flat" cmpd="sng" algn="ctr">
+                      <a:solidFill>
+                        <a:schemeClr val="tx1"/>
+                      </a:solidFill>
+                      <a:prstDash val="solid"/>
+                      <a:round/>
+                      <a:headEnd type="none" w="med" len="med"/>
+                      <a:tailEnd type="none" w="med" len="med"/>
+                    </a:lnT>
+                    <a:lnB w="12700" cap="flat" cmpd="sng" algn="ctr">
+                      <a:solidFill>
+                        <a:schemeClr val="tx1"/>
+                      </a:solidFill>
+                      <a:prstDash val="solid"/>
+                      <a:round/>
+                      <a:headEnd type="none" w="med" len="med"/>
+                      <a:tailEnd type="none" w="med" len="med"/>
+                    </a:lnB>
+                    <a:solidFill>
+                      <a:schemeClr val="bg1">
+                        <a:lumMod val="95000"/>
+                      </a:schemeClr>
+                    </a:solidFill>
+                  </a:tcPr>
+                </a:tc>
+                <a:tc>
+                  <a:txBody>
+                    <a:bodyPr/>
+                    <a:lstStyle/>
+                    <a:p>
+                      <a:endParaRPr lang="it-IT" dirty="0"/>
+                    </a:p>
+                  </a:txBody>
+                  <a:tcPr>
+                    <a:lnL w="12700" cap="flat" cmpd="sng" algn="ctr">
+                      <a:solidFill>
+                        <a:schemeClr val="tx1"/>
+                      </a:solidFill>
+                      <a:prstDash val="solid"/>
+                      <a:round/>
+                      <a:headEnd type="none" w="med" len="med"/>
+                      <a:tailEnd type="none" w="med" len="med"/>
+                    </a:lnL>
+                    <a:lnR w="12700" cap="flat" cmpd="sng" algn="ctr">
+                      <a:solidFill>
+                        <a:schemeClr val="tx1"/>
+                      </a:solidFill>
+                      <a:prstDash val="solid"/>
+                      <a:round/>
+                      <a:headEnd type="none" w="med" len="med"/>
+                      <a:tailEnd type="none" w="med" len="med"/>
+                    </a:lnR>
+                    <a:lnT w="12700" cap="flat" cmpd="sng" algn="ctr">
+                      <a:solidFill>
+                        <a:schemeClr val="tx1"/>
+                      </a:solidFill>
+                      <a:prstDash val="solid"/>
+                      <a:round/>
+                      <a:headEnd type="none" w="med" len="med"/>
+                      <a:tailEnd type="none" w="med" len="med"/>
+                    </a:lnT>
+                    <a:lnB w="12700" cap="flat" cmpd="sng" algn="ctr">
+                      <a:solidFill>
+                        <a:schemeClr val="tx1"/>
+                      </a:solidFill>
+                      <a:prstDash val="solid"/>
+                      <a:round/>
+                      <a:headEnd type="none" w="med" len="med"/>
+                      <a:tailEnd type="none" w="med" len="med"/>
+                    </a:lnB>
+                    <a:solidFill>
+                      <a:schemeClr val="bg1">
+                        <a:lumMod val="95000"/>
+                      </a:schemeClr>
+                    </a:solidFill>
+                  </a:tcPr>
+                </a:tc>
+                <a:extLst>
+                  <a:ext uri="{0D108BD9-81ED-4DB2-BD59-A6C34878D82A}">
+                    <a16:rowId xmlns:a16="http://schemas.microsoft.com/office/drawing/2014/main" val="775609398"/>
+                  </a:ext>
+                </a:extLst>
+              </a:tr>
+            </a:tbl>
+          </a:graphicData>
+        </a:graphic>
+      </p:graphicFrame>
+      <p:sp>
+        <p:nvSpPr>
+          <p:cNvPr id="8" name="CasellaDiTesto 7">
+            <a:extLst>
+              <a:ext uri="{FF2B5EF4-FFF2-40B4-BE49-F238E27FC236}">
+                <a16:creationId xmlns:a16="http://schemas.microsoft.com/office/drawing/2014/main" id="{FC37BF15-615A-E29D-0E9A-D48A01A59CA6}"/>
+              </a:ext>
+            </a:extLst>
+          </p:cNvPr>
+          <p:cNvSpPr txBox="1"/>
+          <p:nvPr/>
+        </p:nvSpPr>
+        <p:spPr>
+          <a:xfrm>
+            <a:off x="548640" y="3177697"/>
+            <a:ext cx="794294" cy="369332"/>
+          </a:xfrm>
+          <a:prstGeom prst="rect">
+            <a:avLst/>
+          </a:prstGeom>
+          <a:noFill/>
+        </p:spPr>
+        <p:txBody>
+          <a:bodyPr wrap="square" rtlCol="0">
+            <a:spAutoFit/>
+          </a:bodyPr>
+          <a:lstStyle/>
+          <a:p>
+            <a:r>
+              <a:rPr lang="it-IT" b="1" dirty="0"/>
+              <a:t>RAM</a:t>
+            </a:r>
+          </a:p>
+        </p:txBody>
+      </p:sp>
+      <p:graphicFrame>
+        <p:nvGraphicFramePr>
+          <p:cNvPr id="9" name="Tabella 8">
+            <a:extLst>
+              <a:ext uri="{FF2B5EF4-FFF2-40B4-BE49-F238E27FC236}">
+                <a16:creationId xmlns:a16="http://schemas.microsoft.com/office/drawing/2014/main" id="{A900302A-FFA5-32C6-A437-0238222C8EFB}"/>
+              </a:ext>
+            </a:extLst>
+          </p:cNvPr>
+          <p:cNvGraphicFramePr>
+            <a:graphicFrameLocks noGrp="1"/>
+          </p:cNvGraphicFramePr>
+          <p:nvPr>
+            <p:extLst>
+              <p:ext uri="{D42A27DB-BD31-4B8C-83A1-F6EECF244321}">
+                <p14:modId xmlns:p14="http://schemas.microsoft.com/office/powerpoint/2010/main" val="3228504274"/>
+              </p:ext>
+            </p:extLst>
+          </p:nvPr>
+        </p:nvGraphicFramePr>
+        <p:xfrm>
+          <a:off x="1342934" y="4621308"/>
+          <a:ext cx="2438400" cy="695831"/>
+        </p:xfrm>
+        <a:graphic>
+          <a:graphicData uri="http://schemas.openxmlformats.org/drawingml/2006/table">
+            <a:tbl>
+              <a:tblPr firstRow="1" bandRow="1">
+                <a:tableStyleId>{5C22544A-7EE6-4342-B048-85BDC9FD1C3A}</a:tableStyleId>
+              </a:tblPr>
+              <a:tblGrid>
+                <a:gridCol w="812800">
+                  <a:extLst>
+                    <a:ext uri="{9D8B030D-6E8A-4147-A177-3AD203B41FA5}">
+                      <a16:colId xmlns:a16="http://schemas.microsoft.com/office/drawing/2014/main" val="645810556"/>
+                    </a:ext>
+                  </a:extLst>
+                </a:gridCol>
+                <a:gridCol w="812800">
+                  <a:extLst>
+                    <a:ext uri="{9D8B030D-6E8A-4147-A177-3AD203B41FA5}">
+                      <a16:colId xmlns:a16="http://schemas.microsoft.com/office/drawing/2014/main" val="3402794757"/>
+                    </a:ext>
+                  </a:extLst>
+                </a:gridCol>
+                <a:gridCol w="812800">
+                  <a:extLst>
+                    <a:ext uri="{9D8B030D-6E8A-4147-A177-3AD203B41FA5}">
+                      <a16:colId xmlns:a16="http://schemas.microsoft.com/office/drawing/2014/main" val="3001697394"/>
+                    </a:ext>
+                  </a:extLst>
+                </a:gridCol>
+              </a:tblGrid>
+              <a:tr h="695831">
+                <a:tc>
+                  <a:txBody>
+                    <a:bodyPr/>
+                    <a:lstStyle/>
+                    <a:p>
+                      <a:endParaRPr lang="it-IT" dirty="0"/>
+                    </a:p>
+                  </a:txBody>
+                  <a:tcPr>
+                    <a:lnL w="12700" cap="flat" cmpd="sng" algn="ctr">
+                      <a:solidFill>
+                        <a:schemeClr val="tx1"/>
+                      </a:solidFill>
+                      <a:prstDash val="solid"/>
+                      <a:round/>
+                      <a:headEnd type="none" w="med" len="med"/>
+                      <a:tailEnd type="none" w="med" len="med"/>
+                    </a:lnL>
+                    <a:lnR w="12700" cap="flat" cmpd="sng" algn="ctr">
+                      <a:solidFill>
+                        <a:schemeClr val="tx1"/>
+                      </a:solidFill>
+                      <a:prstDash val="solid"/>
+                      <a:round/>
+                      <a:headEnd type="none" w="med" len="med"/>
+                      <a:tailEnd type="none" w="med" len="med"/>
+                    </a:lnR>
+                    <a:lnT w="12700" cap="flat" cmpd="sng" algn="ctr">
+                      <a:solidFill>
+                        <a:schemeClr val="tx1"/>
+                      </a:solidFill>
+                      <a:prstDash val="solid"/>
+                      <a:round/>
+                      <a:headEnd type="none" w="med" len="med"/>
+                      <a:tailEnd type="none" w="med" len="med"/>
+                    </a:lnT>
+                    <a:lnB w="12700" cap="flat" cmpd="sng" algn="ctr">
+                      <a:solidFill>
+                        <a:schemeClr val="tx1"/>
+                      </a:solidFill>
+                      <a:prstDash val="solid"/>
+                      <a:round/>
+                      <a:headEnd type="none" w="med" len="med"/>
+                      <a:tailEnd type="none" w="med" len="med"/>
+                    </a:lnB>
+                    <a:solidFill>
+                      <a:schemeClr val="accent1">
+                        <a:lumMod val="60000"/>
+                        <a:lumOff val="40000"/>
+                      </a:schemeClr>
+                    </a:solidFill>
+                  </a:tcPr>
+                </a:tc>
+                <a:tc>
+                  <a:txBody>
+                    <a:bodyPr/>
+                    <a:lstStyle/>
+                    <a:p>
+                      <a:endParaRPr lang="it-IT" dirty="0">
+                        <a:solidFill>
+                          <a:schemeClr val="bg2"/>
+                        </a:solidFill>
+                      </a:endParaRPr>
+                    </a:p>
+                  </a:txBody>
+                  <a:tcPr>
+                    <a:lnL w="12700" cap="flat" cmpd="sng" algn="ctr">
+                      <a:solidFill>
+                        <a:schemeClr val="tx1"/>
+                      </a:solidFill>
+                      <a:prstDash val="solid"/>
+                      <a:round/>
+                      <a:headEnd type="none" w="med" len="med"/>
+                      <a:tailEnd type="none" w="med" len="med"/>
+                    </a:lnL>
+                    <a:lnR w="12700" cap="flat" cmpd="sng" algn="ctr">
+                      <a:solidFill>
+                        <a:schemeClr val="tx1"/>
+                      </a:solidFill>
+                      <a:prstDash val="solid"/>
+                      <a:round/>
+                      <a:headEnd type="none" w="med" len="med"/>
+                      <a:tailEnd type="none" w="med" len="med"/>
+                    </a:lnR>
+                    <a:lnT w="12700" cap="flat" cmpd="sng" algn="ctr">
+                      <a:solidFill>
+                        <a:schemeClr val="tx1"/>
+                      </a:solidFill>
+                      <a:prstDash val="solid"/>
+                      <a:round/>
+                      <a:headEnd type="none" w="med" len="med"/>
+                      <a:tailEnd type="none" w="med" len="med"/>
+                    </a:lnT>
+                    <a:lnB w="12700" cap="flat" cmpd="sng" algn="ctr">
+                      <a:solidFill>
+                        <a:schemeClr val="tx1"/>
+                      </a:solidFill>
+                      <a:prstDash val="solid"/>
+                      <a:round/>
+                      <a:headEnd type="none" w="med" len="med"/>
+                      <a:tailEnd type="none" w="med" len="med"/>
+                    </a:lnB>
+                    <a:solidFill>
+                      <a:schemeClr val="bg1">
+                        <a:lumMod val="95000"/>
+                      </a:schemeClr>
+                    </a:solidFill>
+                  </a:tcPr>
+                </a:tc>
+                <a:tc>
+                  <a:txBody>
+                    <a:bodyPr/>
+                    <a:lstStyle/>
+                    <a:p>
+                      <a:endParaRPr lang="it-IT" dirty="0">
+                        <a:solidFill>
+                          <a:schemeClr val="bg2"/>
+                        </a:solidFill>
+                      </a:endParaRPr>
+                    </a:p>
+                  </a:txBody>
+                  <a:tcPr>
+                    <a:lnL w="12700" cap="flat" cmpd="sng" algn="ctr">
+                      <a:solidFill>
+                        <a:schemeClr val="tx1"/>
+                      </a:solidFill>
+                      <a:prstDash val="solid"/>
+                      <a:round/>
+                      <a:headEnd type="none" w="med" len="med"/>
+                      <a:tailEnd type="none" w="med" len="med"/>
+                    </a:lnL>
+                    <a:lnR w="12700" cap="flat" cmpd="sng" algn="ctr">
+                      <a:solidFill>
+                        <a:schemeClr val="tx1"/>
+                      </a:solidFill>
+                      <a:prstDash val="solid"/>
+                      <a:round/>
+                      <a:headEnd type="none" w="med" len="med"/>
+                      <a:tailEnd type="none" w="med" len="med"/>
+                    </a:lnR>
+                    <a:lnT w="12700" cap="flat" cmpd="sng" algn="ctr">
+                      <a:solidFill>
+                        <a:schemeClr val="tx1"/>
+                      </a:solidFill>
+                      <a:prstDash val="solid"/>
+                      <a:round/>
+                      <a:headEnd type="none" w="med" len="med"/>
+                      <a:tailEnd type="none" w="med" len="med"/>
+                    </a:lnT>
+                    <a:lnB w="12700" cap="flat" cmpd="sng" algn="ctr">
+                      <a:solidFill>
+                        <a:schemeClr val="tx1"/>
+                      </a:solidFill>
+                      <a:prstDash val="solid"/>
+                      <a:round/>
+                      <a:headEnd type="none" w="med" len="med"/>
+                      <a:tailEnd type="none" w="med" len="med"/>
+                    </a:lnB>
+                    <a:solidFill>
+                      <a:schemeClr val="bg1">
+                        <a:lumMod val="95000"/>
+                      </a:schemeClr>
+                    </a:solidFill>
+                  </a:tcPr>
+                </a:tc>
+                <a:extLst>
+                  <a:ext uri="{0D108BD9-81ED-4DB2-BD59-A6C34878D82A}">
+                    <a16:rowId xmlns:a16="http://schemas.microsoft.com/office/drawing/2014/main" val="744891775"/>
+                  </a:ext>
+                </a:extLst>
+              </a:tr>
+            </a:tbl>
+          </a:graphicData>
+        </a:graphic>
+      </p:graphicFrame>
+      <p:sp>
+        <p:nvSpPr>
+          <p:cNvPr id="11" name="CasellaDiTesto 10">
+            <a:extLst>
+              <a:ext uri="{FF2B5EF4-FFF2-40B4-BE49-F238E27FC236}">
+                <a16:creationId xmlns:a16="http://schemas.microsoft.com/office/drawing/2014/main" id="{7FCA45C8-7350-60AB-FB2F-DC89E97CC203}"/>
+              </a:ext>
+            </a:extLst>
+          </p:cNvPr>
+          <p:cNvSpPr txBox="1"/>
+          <p:nvPr/>
+        </p:nvSpPr>
+        <p:spPr>
+          <a:xfrm>
+            <a:off x="1698171" y="5424461"/>
+            <a:ext cx="1727926" cy="369332"/>
+          </a:xfrm>
+          <a:prstGeom prst="rect">
+            <a:avLst/>
+          </a:prstGeom>
+          <a:noFill/>
+        </p:spPr>
+        <p:txBody>
+          <a:bodyPr wrap="square" rtlCol="0">
+            <a:spAutoFit/>
+          </a:bodyPr>
+          <a:lstStyle/>
+          <a:p>
+            <a:r>
+              <a:rPr lang="it-IT" b="1" dirty="0"/>
+              <a:t>PROGRAMMA 1</a:t>
+            </a:r>
+          </a:p>
+        </p:txBody>
+      </p:sp>
+      <p:pic>
+        <p:nvPicPr>
+          <p:cNvPr id="13" name="Picture 2" descr="Immagine che contiene schizzo, disegno, nero, bianco e nero&#10;&#10;Il contenuto generato dall&amp;#39;IA potrebbe non essere corretto.">
+            <a:extLst>
+              <a:ext uri="{FF2B5EF4-FFF2-40B4-BE49-F238E27FC236}">
+                <a16:creationId xmlns:a16="http://schemas.microsoft.com/office/drawing/2014/main" id="{43D0F0E9-5F81-95BD-98DC-5EA2CE59420A}"/>
+              </a:ext>
+            </a:extLst>
+          </p:cNvPr>
+          <p:cNvPicPr>
+            <a:picLocks noChangeAspect="1" noChangeArrowheads="1"/>
+          </p:cNvPicPr>
+          <p:nvPr/>
+        </p:nvPicPr>
+        <p:blipFill>
+          <a:blip r:embed="rId2" cstate="print">
+            <a:extLst>
+              <a:ext uri="{28A0092B-C50C-407E-A947-70E740481C1C}">
+                <a14:useLocalDpi xmlns:a14="http://schemas.microsoft.com/office/drawing/2010/main" val="0"/>
+              </a:ext>
+            </a:extLst>
+          </a:blip>
+          <a:srcRect/>
+          <a:stretch>
+            <a:fillRect/>
+          </a:stretch>
+        </p:blipFill>
+        <p:spPr bwMode="auto">
+          <a:xfrm rot="15379497">
+            <a:off x="1669143" y="4320262"/>
+            <a:ext cx="282651" cy="282651"/>
+          </a:xfrm>
+          <a:prstGeom prst="rect">
+            <a:avLst/>
+          </a:prstGeom>
+          <a:noFill/>
+          <a:extLst>
+            <a:ext uri="{909E8E84-426E-40DD-AFC4-6F175D3DCCD1}">
+              <a14:hiddenFill xmlns:a14="http://schemas.microsoft.com/office/drawing/2010/main">
+                <a:solidFill>
+                  <a:srgbClr val="FFFFFF"/>
+                </a:solidFill>
+              </a14:hiddenFill>
+            </a:ext>
+          </a:extLst>
+        </p:spPr>
+      </p:pic>
+      <p:graphicFrame>
+        <p:nvGraphicFramePr>
+          <p:cNvPr id="5" name="Tabella 4">
+            <a:extLst>
+              <a:ext uri="{FF2B5EF4-FFF2-40B4-BE49-F238E27FC236}">
+                <a16:creationId xmlns:a16="http://schemas.microsoft.com/office/drawing/2014/main" id="{9A8BA453-3E0F-4848-11D2-BD7117BF2B27}"/>
+              </a:ext>
+            </a:extLst>
+          </p:cNvPr>
+          <p:cNvGraphicFramePr>
+            <a:graphicFrameLocks noGrp="1"/>
+          </p:cNvGraphicFramePr>
+          <p:nvPr>
+            <p:extLst>
+              <p:ext uri="{D42A27DB-BD31-4B8C-83A1-F6EECF244321}">
+                <p14:modId xmlns:p14="http://schemas.microsoft.com/office/powerpoint/2010/main" val="2822404506"/>
+              </p:ext>
+            </p:extLst>
+          </p:nvPr>
+        </p:nvGraphicFramePr>
+        <p:xfrm>
+          <a:off x="1342934" y="4621308"/>
+          <a:ext cx="2438400" cy="696809"/>
+        </p:xfrm>
+        <a:graphic>
+          <a:graphicData uri="http://schemas.openxmlformats.org/drawingml/2006/table">
+            <a:tbl>
+              <a:tblPr firstRow="1" bandRow="1">
+                <a:tableStyleId>{5C22544A-7EE6-4342-B048-85BDC9FD1C3A}</a:tableStyleId>
+              </a:tblPr>
+              <a:tblGrid>
+                <a:gridCol w="812800">
+                  <a:extLst>
+                    <a:ext uri="{9D8B030D-6E8A-4147-A177-3AD203B41FA5}">
+                      <a16:colId xmlns:a16="http://schemas.microsoft.com/office/drawing/2014/main" val="645810556"/>
+                    </a:ext>
+                  </a:extLst>
+                </a:gridCol>
+                <a:gridCol w="812800">
+                  <a:extLst>
+                    <a:ext uri="{9D8B030D-6E8A-4147-A177-3AD203B41FA5}">
+                      <a16:colId xmlns:a16="http://schemas.microsoft.com/office/drawing/2014/main" val="3402794757"/>
+                    </a:ext>
+                  </a:extLst>
+                </a:gridCol>
+                <a:gridCol w="812800">
+                  <a:extLst>
+                    <a:ext uri="{9D8B030D-6E8A-4147-A177-3AD203B41FA5}">
+                      <a16:colId xmlns:a16="http://schemas.microsoft.com/office/drawing/2014/main" val="3001697394"/>
+                    </a:ext>
+                  </a:extLst>
+                </a:gridCol>
+              </a:tblGrid>
+              <a:tr h="696809">
+                <a:tc>
+                  <a:txBody>
+                    <a:bodyPr/>
+                    <a:lstStyle/>
+                    <a:p>
+                      <a:endParaRPr lang="it-IT" dirty="0"/>
+                    </a:p>
+                  </a:txBody>
+                  <a:tcPr>
+                    <a:lnL w="12700" cap="flat" cmpd="sng" algn="ctr">
+                      <a:solidFill>
+                        <a:schemeClr val="tx1"/>
+                      </a:solidFill>
+                      <a:prstDash val="solid"/>
+                      <a:round/>
+                      <a:headEnd type="none" w="med" len="med"/>
+                      <a:tailEnd type="none" w="med" len="med"/>
+                    </a:lnL>
+                    <a:lnR w="12700" cap="flat" cmpd="sng" algn="ctr">
+                      <a:solidFill>
+                        <a:schemeClr val="tx1"/>
+                      </a:solidFill>
+                      <a:prstDash val="solid"/>
+                      <a:round/>
+                      <a:headEnd type="none" w="med" len="med"/>
+                      <a:tailEnd type="none" w="med" len="med"/>
+                    </a:lnR>
+                    <a:lnT w="12700" cap="flat" cmpd="sng" algn="ctr">
+                      <a:solidFill>
+                        <a:schemeClr val="tx1"/>
+                      </a:solidFill>
+                      <a:prstDash val="solid"/>
+                      <a:round/>
+                      <a:headEnd type="none" w="med" len="med"/>
+                      <a:tailEnd type="none" w="med" len="med"/>
+                    </a:lnT>
+                    <a:lnB w="12700" cap="flat" cmpd="sng" algn="ctr">
+                      <a:solidFill>
+                        <a:schemeClr val="tx1"/>
+                      </a:solidFill>
+                      <a:prstDash val="solid"/>
+                      <a:round/>
+                      <a:headEnd type="none" w="med" len="med"/>
+                      <a:tailEnd type="none" w="med" len="med"/>
+                    </a:lnB>
+                    <a:solidFill>
+                      <a:schemeClr val="bg1">
+                        <a:lumMod val="95000"/>
+                      </a:schemeClr>
+                    </a:solidFill>
+                  </a:tcPr>
+                </a:tc>
+                <a:tc>
+                  <a:txBody>
+                    <a:bodyPr/>
+                    <a:lstStyle/>
+                    <a:p>
+                      <a:endParaRPr lang="it-IT" dirty="0">
+                        <a:solidFill>
+                          <a:schemeClr val="bg2"/>
+                        </a:solidFill>
+                      </a:endParaRPr>
+                    </a:p>
+                  </a:txBody>
+                  <a:tcPr>
+                    <a:lnL w="12700" cap="flat" cmpd="sng" algn="ctr">
+                      <a:solidFill>
+                        <a:schemeClr val="tx1"/>
+                      </a:solidFill>
+                      <a:prstDash val="solid"/>
+                      <a:round/>
+                      <a:headEnd type="none" w="med" len="med"/>
+                      <a:tailEnd type="none" w="med" len="med"/>
+                    </a:lnL>
+                    <a:lnR w="12700" cap="flat" cmpd="sng" algn="ctr">
+                      <a:solidFill>
+                        <a:schemeClr val="tx1"/>
+                      </a:solidFill>
+                      <a:prstDash val="solid"/>
+                      <a:round/>
+                      <a:headEnd type="none" w="med" len="med"/>
+                      <a:tailEnd type="none" w="med" len="med"/>
+                    </a:lnR>
+                    <a:lnT w="12700" cap="flat" cmpd="sng" algn="ctr">
+                      <a:solidFill>
+                        <a:schemeClr val="tx1"/>
+                      </a:solidFill>
+                      <a:prstDash val="solid"/>
+                      <a:round/>
+                      <a:headEnd type="none" w="med" len="med"/>
+                      <a:tailEnd type="none" w="med" len="med"/>
+                    </a:lnT>
+                    <a:lnB w="12700" cap="flat" cmpd="sng" algn="ctr">
+                      <a:solidFill>
+                        <a:schemeClr val="tx1"/>
+                      </a:solidFill>
+                      <a:prstDash val="solid"/>
+                      <a:round/>
+                      <a:headEnd type="none" w="med" len="med"/>
+                      <a:tailEnd type="none" w="med" len="med"/>
+                    </a:lnB>
+                    <a:solidFill>
+                      <a:schemeClr val="accent1">
+                        <a:lumMod val="60000"/>
+                        <a:lumOff val="40000"/>
+                      </a:schemeClr>
+                    </a:solidFill>
+                  </a:tcPr>
+                </a:tc>
+                <a:tc>
+                  <a:txBody>
+                    <a:bodyPr/>
+                    <a:lstStyle/>
+                    <a:p>
+                      <a:endParaRPr lang="it-IT" dirty="0">
+                        <a:solidFill>
+                          <a:schemeClr val="bg2"/>
+                        </a:solidFill>
+                      </a:endParaRPr>
+                    </a:p>
+                  </a:txBody>
+                  <a:tcPr>
+                    <a:lnL w="12700" cap="flat" cmpd="sng" algn="ctr">
+                      <a:solidFill>
+                        <a:schemeClr val="tx1"/>
+                      </a:solidFill>
+                      <a:prstDash val="solid"/>
+                      <a:round/>
+                      <a:headEnd type="none" w="med" len="med"/>
+                      <a:tailEnd type="none" w="med" len="med"/>
+                    </a:lnL>
+                    <a:lnR w="12700" cap="flat" cmpd="sng" algn="ctr">
+                      <a:solidFill>
+                        <a:schemeClr val="tx1"/>
+                      </a:solidFill>
+                      <a:prstDash val="solid"/>
+                      <a:round/>
+                      <a:headEnd type="none" w="med" len="med"/>
+                      <a:tailEnd type="none" w="med" len="med"/>
+                    </a:lnR>
+                    <a:lnT w="12700" cap="flat" cmpd="sng" algn="ctr">
+                      <a:solidFill>
+                        <a:schemeClr val="tx1"/>
+                      </a:solidFill>
+                      <a:prstDash val="solid"/>
+                      <a:round/>
+                      <a:headEnd type="none" w="med" len="med"/>
+                      <a:tailEnd type="none" w="med" len="med"/>
+                    </a:lnT>
+                    <a:lnB w="12700" cap="flat" cmpd="sng" algn="ctr">
+                      <a:solidFill>
+                        <a:schemeClr val="tx1"/>
+                      </a:solidFill>
+                      <a:prstDash val="solid"/>
+                      <a:round/>
+                      <a:headEnd type="none" w="med" len="med"/>
+                      <a:tailEnd type="none" w="med" len="med"/>
+                    </a:lnB>
+                    <a:solidFill>
+                      <a:schemeClr val="bg1">
+                        <a:lumMod val="95000"/>
+                      </a:schemeClr>
+                    </a:solidFill>
+                  </a:tcPr>
+                </a:tc>
+                <a:extLst>
+                  <a:ext uri="{0D108BD9-81ED-4DB2-BD59-A6C34878D82A}">
+                    <a16:rowId xmlns:a16="http://schemas.microsoft.com/office/drawing/2014/main" val="744891775"/>
+                  </a:ext>
+                </a:extLst>
+              </a:tr>
+            </a:tbl>
+          </a:graphicData>
+        </a:graphic>
+      </p:graphicFrame>
+      <p:graphicFrame>
+        <p:nvGraphicFramePr>
+          <p:cNvPr id="18" name="Tabella 17">
+            <a:extLst>
+              <a:ext uri="{FF2B5EF4-FFF2-40B4-BE49-F238E27FC236}">
+                <a16:creationId xmlns:a16="http://schemas.microsoft.com/office/drawing/2014/main" id="{05BD9557-8F76-6630-3827-5037405A4BDB}"/>
+              </a:ext>
+            </a:extLst>
+          </p:cNvPr>
+          <p:cNvGraphicFramePr>
+            <a:graphicFrameLocks noGrp="1"/>
+          </p:cNvGraphicFramePr>
+          <p:nvPr>
+            <p:extLst>
+              <p:ext uri="{D42A27DB-BD31-4B8C-83A1-F6EECF244321}">
+                <p14:modId xmlns:p14="http://schemas.microsoft.com/office/powerpoint/2010/main" val="2138425368"/>
+              </p:ext>
+            </p:extLst>
+          </p:nvPr>
+        </p:nvGraphicFramePr>
+        <p:xfrm>
+          <a:off x="1342934" y="3176719"/>
+          <a:ext cx="8128000" cy="695831"/>
+        </p:xfrm>
+        <a:graphic>
+          <a:graphicData uri="http://schemas.openxmlformats.org/drawingml/2006/table">
+            <a:tbl>
+              <a:tblPr firstRow="1" bandRow="1">
+                <a:tableStyleId>{5C22544A-7EE6-4342-B048-85BDC9FD1C3A}</a:tableStyleId>
+              </a:tblPr>
+              <a:tblGrid>
+                <a:gridCol w="812800">
+                  <a:extLst>
+                    <a:ext uri="{9D8B030D-6E8A-4147-A177-3AD203B41FA5}">
+                      <a16:colId xmlns:a16="http://schemas.microsoft.com/office/drawing/2014/main" val="1694205"/>
+                    </a:ext>
+                  </a:extLst>
+                </a:gridCol>
+                <a:gridCol w="812800">
+                  <a:extLst>
+                    <a:ext uri="{9D8B030D-6E8A-4147-A177-3AD203B41FA5}">
+                      <a16:colId xmlns:a16="http://schemas.microsoft.com/office/drawing/2014/main" val="2408768007"/>
+                    </a:ext>
+                  </a:extLst>
+                </a:gridCol>
+                <a:gridCol w="812800">
+                  <a:extLst>
+                    <a:ext uri="{9D8B030D-6E8A-4147-A177-3AD203B41FA5}">
+                      <a16:colId xmlns:a16="http://schemas.microsoft.com/office/drawing/2014/main" val="3916070965"/>
+                    </a:ext>
+                  </a:extLst>
+                </a:gridCol>
+                <a:gridCol w="812800">
+                  <a:extLst>
+                    <a:ext uri="{9D8B030D-6E8A-4147-A177-3AD203B41FA5}">
+                      <a16:colId xmlns:a16="http://schemas.microsoft.com/office/drawing/2014/main" val="2884860139"/>
+                    </a:ext>
+                  </a:extLst>
+                </a:gridCol>
+                <a:gridCol w="812800">
+                  <a:extLst>
+                    <a:ext uri="{9D8B030D-6E8A-4147-A177-3AD203B41FA5}">
+                      <a16:colId xmlns:a16="http://schemas.microsoft.com/office/drawing/2014/main" val="2083948861"/>
+                    </a:ext>
+                  </a:extLst>
+                </a:gridCol>
+                <a:gridCol w="812800">
+                  <a:extLst>
+                    <a:ext uri="{9D8B030D-6E8A-4147-A177-3AD203B41FA5}">
+                      <a16:colId xmlns:a16="http://schemas.microsoft.com/office/drawing/2014/main" val="2358120665"/>
+                    </a:ext>
+                  </a:extLst>
+                </a:gridCol>
+                <a:gridCol w="812800">
+                  <a:extLst>
+                    <a:ext uri="{9D8B030D-6E8A-4147-A177-3AD203B41FA5}">
+                      <a16:colId xmlns:a16="http://schemas.microsoft.com/office/drawing/2014/main" val="4245474789"/>
+                    </a:ext>
+                  </a:extLst>
+                </a:gridCol>
+                <a:gridCol w="812800">
+                  <a:extLst>
+                    <a:ext uri="{9D8B030D-6E8A-4147-A177-3AD203B41FA5}">
+                      <a16:colId xmlns:a16="http://schemas.microsoft.com/office/drawing/2014/main" val="1139398879"/>
+                    </a:ext>
+                  </a:extLst>
+                </a:gridCol>
+                <a:gridCol w="812800">
+                  <a:extLst>
+                    <a:ext uri="{9D8B030D-6E8A-4147-A177-3AD203B41FA5}">
+                      <a16:colId xmlns:a16="http://schemas.microsoft.com/office/drawing/2014/main" val="298107426"/>
+                    </a:ext>
+                  </a:extLst>
+                </a:gridCol>
+                <a:gridCol w="812800">
+                  <a:extLst>
+                    <a:ext uri="{9D8B030D-6E8A-4147-A177-3AD203B41FA5}">
+                      <a16:colId xmlns:a16="http://schemas.microsoft.com/office/drawing/2014/main" val="1975393176"/>
+                    </a:ext>
+                  </a:extLst>
+                </a:gridCol>
+              </a:tblGrid>
+              <a:tr h="695831">
+                <a:tc>
+                  <a:txBody>
+                    <a:bodyPr/>
+                    <a:lstStyle/>
+                    <a:p>
+                      <a:endParaRPr lang="it-IT" dirty="0"/>
+                    </a:p>
+                  </a:txBody>
+                  <a:tcPr>
+                    <a:lnL w="12700" cap="flat" cmpd="sng" algn="ctr">
+                      <a:solidFill>
+                        <a:schemeClr val="tx1"/>
+                      </a:solidFill>
+                      <a:prstDash val="solid"/>
+                      <a:round/>
+                      <a:headEnd type="none" w="med" len="med"/>
+                      <a:tailEnd type="none" w="med" len="med"/>
+                    </a:lnL>
+                    <a:lnR w="12700" cap="flat" cmpd="sng" algn="ctr">
+                      <a:solidFill>
+                        <a:schemeClr val="tx1"/>
+                      </a:solidFill>
+                      <a:prstDash val="solid"/>
+                      <a:round/>
+                      <a:headEnd type="none" w="med" len="med"/>
+                      <a:tailEnd type="none" w="med" len="med"/>
+                    </a:lnR>
+                    <a:lnT w="12700" cap="flat" cmpd="sng" algn="ctr">
+                      <a:solidFill>
+                        <a:schemeClr val="tx1"/>
+                      </a:solidFill>
+                      <a:prstDash val="solid"/>
+                      <a:round/>
+                      <a:headEnd type="none" w="med" len="med"/>
+                      <a:tailEnd type="none" w="med" len="med"/>
+                    </a:lnT>
+                    <a:lnB w="12700" cap="flat" cmpd="sng" algn="ctr">
+                      <a:solidFill>
+                        <a:schemeClr val="tx1"/>
+                      </a:solidFill>
+                      <a:prstDash val="solid"/>
+                      <a:round/>
+                      <a:headEnd type="none" w="med" len="med"/>
+                      <a:tailEnd type="none" w="med" len="med"/>
+                    </a:lnB>
+                    <a:solidFill>
+                      <a:schemeClr val="bg1">
+                        <a:lumMod val="95000"/>
+                      </a:schemeClr>
+                    </a:solidFill>
+                  </a:tcPr>
+                </a:tc>
+                <a:tc>
+                  <a:txBody>
+                    <a:bodyPr/>
+                    <a:lstStyle/>
+                    <a:p>
+                      <a:endParaRPr lang="it-IT" dirty="0"/>
+                    </a:p>
+                  </a:txBody>
+                  <a:tcPr>
+                    <a:lnL w="12700" cap="flat" cmpd="sng" algn="ctr">
+                      <a:solidFill>
+                        <a:schemeClr val="tx1"/>
+                      </a:solidFill>
+                      <a:prstDash val="solid"/>
+                      <a:round/>
+                      <a:headEnd type="none" w="med" len="med"/>
+                      <a:tailEnd type="none" w="med" len="med"/>
+                    </a:lnL>
+                    <a:lnR w="12700" cap="flat" cmpd="sng" algn="ctr">
+                      <a:solidFill>
+                        <a:schemeClr val="tx1"/>
+                      </a:solidFill>
+                      <a:prstDash val="solid"/>
+                      <a:round/>
+                      <a:headEnd type="none" w="med" len="med"/>
+                      <a:tailEnd type="none" w="med" len="med"/>
+                    </a:lnR>
+                    <a:lnT w="12700" cap="flat" cmpd="sng" algn="ctr">
+                      <a:solidFill>
+                        <a:schemeClr val="tx1"/>
+                      </a:solidFill>
+                      <a:prstDash val="solid"/>
+                      <a:round/>
+                      <a:headEnd type="none" w="med" len="med"/>
+                      <a:tailEnd type="none" w="med" len="med"/>
+                    </a:lnT>
+                    <a:lnB w="12700" cap="flat" cmpd="sng" algn="ctr">
+                      <a:solidFill>
+                        <a:schemeClr val="tx1"/>
+                      </a:solidFill>
+                      <a:prstDash val="solid"/>
+                      <a:round/>
+                      <a:headEnd type="none" w="med" len="med"/>
+                      <a:tailEnd type="none" w="med" len="med"/>
+                    </a:lnB>
+                    <a:solidFill>
+                      <a:schemeClr val="accent1">
+                        <a:lumMod val="60000"/>
+                        <a:lumOff val="40000"/>
+                      </a:schemeClr>
+                    </a:solidFill>
+                  </a:tcPr>
+                </a:tc>
+                <a:tc>
+                  <a:txBody>
+                    <a:bodyPr/>
+                    <a:lstStyle/>
+                    <a:p>
+                      <a:endParaRPr lang="it-IT" dirty="0"/>
+                    </a:p>
+                  </a:txBody>
+                  <a:tcPr>
+                    <a:lnL w="12700" cap="flat" cmpd="sng" algn="ctr">
+                      <a:solidFill>
+                        <a:schemeClr val="tx1"/>
+                      </a:solidFill>
+                      <a:prstDash val="solid"/>
+                      <a:round/>
+                      <a:headEnd type="none" w="med" len="med"/>
+                      <a:tailEnd type="none" w="med" len="med"/>
+                    </a:lnL>
+                    <a:lnR w="12700" cap="flat" cmpd="sng" algn="ctr">
+                      <a:solidFill>
+                        <a:schemeClr val="tx1"/>
+                      </a:solidFill>
+                      <a:prstDash val="solid"/>
+                      <a:round/>
+                      <a:headEnd type="none" w="med" len="med"/>
+                      <a:tailEnd type="none" w="med" len="med"/>
+                    </a:lnR>
+                    <a:lnT w="12700" cap="flat" cmpd="sng" algn="ctr">
+                      <a:solidFill>
+                        <a:schemeClr val="tx1"/>
+                      </a:solidFill>
+                      <a:prstDash val="solid"/>
+                      <a:round/>
+                      <a:headEnd type="none" w="med" len="med"/>
+                      <a:tailEnd type="none" w="med" len="med"/>
+                    </a:lnT>
+                    <a:lnB w="12700" cap="flat" cmpd="sng" algn="ctr">
+                      <a:solidFill>
+                        <a:schemeClr val="tx1"/>
+                      </a:solidFill>
+                      <a:prstDash val="solid"/>
+                      <a:round/>
+                      <a:headEnd type="none" w="med" len="med"/>
+                      <a:tailEnd type="none" w="med" len="med"/>
+                    </a:lnB>
+                    <a:solidFill>
+                      <a:schemeClr val="bg1">
+                        <a:lumMod val="95000"/>
+                      </a:schemeClr>
+                    </a:solidFill>
+                  </a:tcPr>
+                </a:tc>
+                <a:tc>
+                  <a:txBody>
+                    <a:bodyPr/>
+                    <a:lstStyle/>
+                    <a:p>
+                      <a:endParaRPr lang="it-IT" dirty="0"/>
+                    </a:p>
+                  </a:txBody>
+                  <a:tcPr>
+                    <a:lnL w="12700" cap="flat" cmpd="sng" algn="ctr">
+                      <a:solidFill>
+                        <a:schemeClr val="tx1"/>
+                      </a:solidFill>
+                      <a:prstDash val="solid"/>
+                      <a:round/>
+                      <a:headEnd type="none" w="med" len="med"/>
+                      <a:tailEnd type="none" w="med" len="med"/>
+                    </a:lnL>
+                    <a:lnR w="12700" cap="flat" cmpd="sng" algn="ctr">
+                      <a:solidFill>
+                        <a:schemeClr val="tx1"/>
+                      </a:solidFill>
+                      <a:prstDash val="solid"/>
+                      <a:round/>
+                      <a:headEnd type="none" w="med" len="med"/>
+                      <a:tailEnd type="none" w="med" len="med"/>
+                    </a:lnR>
+                    <a:lnT w="12700" cap="flat" cmpd="sng" algn="ctr">
+                      <a:solidFill>
+                        <a:schemeClr val="tx1"/>
+                      </a:solidFill>
+                      <a:prstDash val="solid"/>
+                      <a:round/>
+                      <a:headEnd type="none" w="med" len="med"/>
+                      <a:tailEnd type="none" w="med" len="med"/>
+                    </a:lnT>
+                    <a:lnB w="12700" cap="flat" cmpd="sng" algn="ctr">
+                      <a:solidFill>
+                        <a:schemeClr val="tx1"/>
+                      </a:solidFill>
+                      <a:prstDash val="solid"/>
+                      <a:round/>
+                      <a:headEnd type="none" w="med" len="med"/>
+                      <a:tailEnd type="none" w="med" len="med"/>
+                    </a:lnB>
+                    <a:solidFill>
+                      <a:schemeClr val="bg1">
+                        <a:lumMod val="95000"/>
+                      </a:schemeClr>
+                    </a:solidFill>
+                  </a:tcPr>
+                </a:tc>
+                <a:tc>
+                  <a:txBody>
+                    <a:bodyPr/>
+                    <a:lstStyle/>
+                    <a:p>
+                      <a:endParaRPr lang="it-IT" dirty="0"/>
+                    </a:p>
+                  </a:txBody>
+                  <a:tcPr>
+                    <a:lnL w="12700" cap="flat" cmpd="sng" algn="ctr">
+                      <a:solidFill>
+                        <a:schemeClr val="tx1"/>
+                      </a:solidFill>
+                      <a:prstDash val="solid"/>
+                      <a:round/>
+                      <a:headEnd type="none" w="med" len="med"/>
+                      <a:tailEnd type="none" w="med" len="med"/>
+                    </a:lnL>
+                    <a:lnR w="12700" cap="flat" cmpd="sng" algn="ctr">
+                      <a:solidFill>
+                        <a:schemeClr val="tx1"/>
+                      </a:solidFill>
+                      <a:prstDash val="solid"/>
+                      <a:round/>
+                      <a:headEnd type="none" w="med" len="med"/>
+                      <a:tailEnd type="none" w="med" len="med"/>
+                    </a:lnR>
+                    <a:lnT w="12700" cap="flat" cmpd="sng" algn="ctr">
+                      <a:solidFill>
+                        <a:schemeClr val="tx1"/>
+                      </a:solidFill>
+                      <a:prstDash val="solid"/>
+                      <a:round/>
+                      <a:headEnd type="none" w="med" len="med"/>
+                      <a:tailEnd type="none" w="med" len="med"/>
+                    </a:lnT>
+                    <a:lnB w="12700" cap="flat" cmpd="sng" algn="ctr">
+                      <a:solidFill>
+                        <a:schemeClr val="tx1"/>
+                      </a:solidFill>
+                      <a:prstDash val="solid"/>
+                      <a:round/>
+                      <a:headEnd type="none" w="med" len="med"/>
+                      <a:tailEnd type="none" w="med" len="med"/>
+                    </a:lnB>
+                    <a:solidFill>
+                      <a:schemeClr val="bg1">
+                        <a:lumMod val="95000"/>
+                      </a:schemeClr>
+                    </a:solidFill>
+                  </a:tcPr>
+                </a:tc>
+                <a:tc>
+                  <a:txBody>
+                    <a:bodyPr/>
+                    <a:lstStyle/>
+                    <a:p>
+                      <a:endParaRPr lang="it-IT" dirty="0"/>
+                    </a:p>
+                  </a:txBody>
+                  <a:tcPr>
+                    <a:lnL w="12700" cap="flat" cmpd="sng" algn="ctr">
+                      <a:solidFill>
+                        <a:schemeClr val="tx1"/>
+                      </a:solidFill>
+                      <a:prstDash val="solid"/>
+                      <a:round/>
+                      <a:headEnd type="none" w="med" len="med"/>
+                      <a:tailEnd type="none" w="med" len="med"/>
+                    </a:lnL>
+                    <a:lnR w="12700" cap="flat" cmpd="sng" algn="ctr">
+                      <a:solidFill>
+                        <a:schemeClr val="tx1"/>
+                      </a:solidFill>
+                      <a:prstDash val="solid"/>
+                      <a:round/>
+                      <a:headEnd type="none" w="med" len="med"/>
+                      <a:tailEnd type="none" w="med" len="med"/>
+                    </a:lnR>
+                    <a:lnT w="12700" cap="flat" cmpd="sng" algn="ctr">
+                      <a:solidFill>
+                        <a:schemeClr val="tx1"/>
+                      </a:solidFill>
+                      <a:prstDash val="solid"/>
+                      <a:round/>
+                      <a:headEnd type="none" w="med" len="med"/>
+                      <a:tailEnd type="none" w="med" len="med"/>
+                    </a:lnT>
+                    <a:lnB w="12700" cap="flat" cmpd="sng" algn="ctr">
+                      <a:solidFill>
+                        <a:schemeClr val="tx1"/>
+                      </a:solidFill>
+                      <a:prstDash val="solid"/>
+                      <a:round/>
+                      <a:headEnd type="none" w="med" len="med"/>
+                      <a:tailEnd type="none" w="med" len="med"/>
+                    </a:lnB>
+                    <a:solidFill>
+                      <a:schemeClr val="bg1">
+                        <a:lumMod val="95000"/>
+                      </a:schemeClr>
+                    </a:solidFill>
+                  </a:tcPr>
+                </a:tc>
+                <a:tc>
+                  <a:txBody>
+                    <a:bodyPr/>
+                    <a:lstStyle/>
+                    <a:p>
+                      <a:endParaRPr lang="it-IT" dirty="0">
+                        <a:solidFill>
+                          <a:schemeClr val="bg2"/>
+                        </a:solidFill>
+                      </a:endParaRPr>
+                    </a:p>
+                  </a:txBody>
+                  <a:tcPr>
+                    <a:lnL w="12700" cap="flat" cmpd="sng" algn="ctr">
+                      <a:solidFill>
+                        <a:schemeClr val="tx1"/>
+                      </a:solidFill>
+                      <a:prstDash val="solid"/>
+                      <a:round/>
+                      <a:headEnd type="none" w="med" len="med"/>
+                      <a:tailEnd type="none" w="med" len="med"/>
+                    </a:lnL>
+                    <a:lnR w="12700" cap="flat" cmpd="sng" algn="ctr">
+                      <a:solidFill>
+                        <a:schemeClr val="tx1"/>
+                      </a:solidFill>
+                      <a:prstDash val="solid"/>
+                      <a:round/>
+                      <a:headEnd type="none" w="med" len="med"/>
+                      <a:tailEnd type="none" w="med" len="med"/>
+                    </a:lnR>
+                    <a:lnT w="12700" cap="flat" cmpd="sng" algn="ctr">
+                      <a:solidFill>
+                        <a:schemeClr val="tx1"/>
+                      </a:solidFill>
+                      <a:prstDash val="solid"/>
+                      <a:round/>
+                      <a:headEnd type="none" w="med" len="med"/>
+                      <a:tailEnd type="none" w="med" len="med"/>
+                    </a:lnT>
+                    <a:lnB w="12700" cap="flat" cmpd="sng" algn="ctr">
+                      <a:solidFill>
+                        <a:schemeClr val="tx1"/>
+                      </a:solidFill>
+                      <a:prstDash val="solid"/>
+                      <a:round/>
+                      <a:headEnd type="none" w="med" len="med"/>
+                      <a:tailEnd type="none" w="med" len="med"/>
+                    </a:lnB>
+                    <a:solidFill>
+                      <a:schemeClr val="bg1">
+                        <a:lumMod val="95000"/>
+                      </a:schemeClr>
+                    </a:solidFill>
+                  </a:tcPr>
+                </a:tc>
+                <a:tc>
+                  <a:txBody>
+                    <a:bodyPr/>
+                    <a:lstStyle/>
+                    <a:p>
+                      <a:endParaRPr lang="it-IT" dirty="0"/>
+                    </a:p>
+                  </a:txBody>
+                  <a:tcPr>
+                    <a:lnL w="12700" cap="flat" cmpd="sng" algn="ctr">
+                      <a:solidFill>
+                        <a:schemeClr val="tx1"/>
+                      </a:solidFill>
+                      <a:prstDash val="solid"/>
+                      <a:round/>
+                      <a:headEnd type="none" w="med" len="med"/>
+                      <a:tailEnd type="none" w="med" len="med"/>
+                    </a:lnL>
+                    <a:lnR w="12700" cap="flat" cmpd="sng" algn="ctr">
+                      <a:solidFill>
+                        <a:schemeClr val="tx1"/>
+                      </a:solidFill>
+                      <a:prstDash val="solid"/>
+                      <a:round/>
+                      <a:headEnd type="none" w="med" len="med"/>
+                      <a:tailEnd type="none" w="med" len="med"/>
+                    </a:lnR>
+                    <a:lnT w="12700" cap="flat" cmpd="sng" algn="ctr">
+                      <a:solidFill>
+                        <a:schemeClr val="tx1"/>
+                      </a:solidFill>
+                      <a:prstDash val="solid"/>
+                      <a:round/>
+                      <a:headEnd type="none" w="med" len="med"/>
+                      <a:tailEnd type="none" w="med" len="med"/>
+                    </a:lnT>
+                    <a:lnB w="12700" cap="flat" cmpd="sng" algn="ctr">
+                      <a:solidFill>
+                        <a:schemeClr val="tx1"/>
+                      </a:solidFill>
+                      <a:prstDash val="solid"/>
+                      <a:round/>
+                      <a:headEnd type="none" w="med" len="med"/>
+                      <a:tailEnd type="none" w="med" len="med"/>
+                    </a:lnB>
+                    <a:solidFill>
+                      <a:schemeClr val="bg1">
+                        <a:lumMod val="95000"/>
+                      </a:schemeClr>
+                    </a:solidFill>
+                  </a:tcPr>
+                </a:tc>
+                <a:tc>
+                  <a:txBody>
+                    <a:bodyPr/>
+                    <a:lstStyle/>
+                    <a:p>
+                      <a:endParaRPr lang="it-IT" dirty="0"/>
+                    </a:p>
+                  </a:txBody>
+                  <a:tcPr>
+                    <a:lnL w="12700" cap="flat" cmpd="sng" algn="ctr">
+                      <a:solidFill>
+                        <a:schemeClr val="tx1"/>
+                      </a:solidFill>
+                      <a:prstDash val="solid"/>
+                      <a:round/>
+                      <a:headEnd type="none" w="med" len="med"/>
+                      <a:tailEnd type="none" w="med" len="med"/>
+                    </a:lnL>
+                    <a:lnR w="12700" cap="flat" cmpd="sng" algn="ctr">
+                      <a:solidFill>
+                        <a:schemeClr val="tx1"/>
+                      </a:solidFill>
+                      <a:prstDash val="solid"/>
+                      <a:round/>
+                      <a:headEnd type="none" w="med" len="med"/>
+                      <a:tailEnd type="none" w="med" len="med"/>
+                    </a:lnR>
+                    <a:lnT w="12700" cap="flat" cmpd="sng" algn="ctr">
+                      <a:solidFill>
+                        <a:schemeClr val="tx1"/>
+                      </a:solidFill>
+                      <a:prstDash val="solid"/>
+                      <a:round/>
+                      <a:headEnd type="none" w="med" len="med"/>
+                      <a:tailEnd type="none" w="med" len="med"/>
+                    </a:lnT>
+                    <a:lnB w="12700" cap="flat" cmpd="sng" algn="ctr">
+                      <a:solidFill>
+                        <a:schemeClr val="tx1"/>
+                      </a:solidFill>
+                      <a:prstDash val="solid"/>
+                      <a:round/>
+                      <a:headEnd type="none" w="med" len="med"/>
+                      <a:tailEnd type="none" w="med" len="med"/>
+                    </a:lnB>
+                    <a:solidFill>
+                      <a:schemeClr val="bg1">
+                        <a:lumMod val="95000"/>
+                      </a:schemeClr>
+                    </a:solidFill>
+                  </a:tcPr>
+                </a:tc>
+                <a:tc>
+                  <a:txBody>
+                    <a:bodyPr/>
+                    <a:lstStyle/>
+                    <a:p>
+                      <a:endParaRPr lang="it-IT" dirty="0"/>
+                    </a:p>
+                  </a:txBody>
+                  <a:tcPr>
+                    <a:lnL w="12700" cap="flat" cmpd="sng" algn="ctr">
+                      <a:solidFill>
+                        <a:schemeClr val="tx1"/>
+                      </a:solidFill>
+                      <a:prstDash val="solid"/>
+                      <a:round/>
+                      <a:headEnd type="none" w="med" len="med"/>
+                      <a:tailEnd type="none" w="med" len="med"/>
+                    </a:lnL>
+                    <a:lnR w="12700" cap="flat" cmpd="sng" algn="ctr">
+                      <a:solidFill>
+                        <a:schemeClr val="tx1"/>
+                      </a:solidFill>
+                      <a:prstDash val="solid"/>
+                      <a:round/>
+                      <a:headEnd type="none" w="med" len="med"/>
+                      <a:tailEnd type="none" w="med" len="med"/>
+                    </a:lnR>
+                    <a:lnT w="12700" cap="flat" cmpd="sng" algn="ctr">
+                      <a:solidFill>
+                        <a:schemeClr val="tx1"/>
+                      </a:solidFill>
+                      <a:prstDash val="solid"/>
+                      <a:round/>
+                      <a:headEnd type="none" w="med" len="med"/>
+                      <a:tailEnd type="none" w="med" len="med"/>
+                    </a:lnT>
+                    <a:lnB w="12700" cap="flat" cmpd="sng" algn="ctr">
+                      <a:solidFill>
+                        <a:schemeClr val="tx1"/>
+                      </a:solidFill>
+                      <a:prstDash val="solid"/>
+                      <a:round/>
+                      <a:headEnd type="none" w="med" len="med"/>
+                      <a:tailEnd type="none" w="med" len="med"/>
+                    </a:lnB>
+                    <a:solidFill>
+                      <a:schemeClr val="bg1">
+                        <a:lumMod val="95000"/>
+                      </a:schemeClr>
+                    </a:solidFill>
+                  </a:tcPr>
+                </a:tc>
+                <a:extLst>
+                  <a:ext uri="{0D108BD9-81ED-4DB2-BD59-A6C34878D82A}">
+                    <a16:rowId xmlns:a16="http://schemas.microsoft.com/office/drawing/2014/main" val="775609398"/>
+                  </a:ext>
+                </a:extLst>
+              </a:tr>
+            </a:tbl>
+          </a:graphicData>
+        </a:graphic>
+      </p:graphicFrame>
+      <p:graphicFrame>
+        <p:nvGraphicFramePr>
+          <p:cNvPr id="19" name="Tabella 18">
+            <a:extLst>
+              <a:ext uri="{FF2B5EF4-FFF2-40B4-BE49-F238E27FC236}">
+                <a16:creationId xmlns:a16="http://schemas.microsoft.com/office/drawing/2014/main" id="{4D936B82-FAD3-3049-BAD6-D98115FFAE21}"/>
+              </a:ext>
+            </a:extLst>
+          </p:cNvPr>
+          <p:cNvGraphicFramePr>
+            <a:graphicFrameLocks noGrp="1"/>
+          </p:cNvGraphicFramePr>
+          <p:nvPr>
+            <p:extLst>
+              <p:ext uri="{D42A27DB-BD31-4B8C-83A1-F6EECF244321}">
+                <p14:modId xmlns:p14="http://schemas.microsoft.com/office/powerpoint/2010/main" val="1758640260"/>
+              </p:ext>
+            </p:extLst>
+          </p:nvPr>
+        </p:nvGraphicFramePr>
+        <p:xfrm>
+          <a:off x="1342934" y="3883265"/>
+          <a:ext cx="8128000" cy="365760"/>
+        </p:xfrm>
+        <a:graphic>
+          <a:graphicData uri="http://schemas.openxmlformats.org/drawingml/2006/table">
+            <a:tbl>
+              <a:tblPr firstRow="1" bandRow="1">
+                <a:tableStyleId>{5C22544A-7EE6-4342-B048-85BDC9FD1C3A}</a:tableStyleId>
+              </a:tblPr>
+              <a:tblGrid>
+                <a:gridCol w="812800">
+                  <a:extLst>
+                    <a:ext uri="{9D8B030D-6E8A-4147-A177-3AD203B41FA5}">
+                      <a16:colId xmlns:a16="http://schemas.microsoft.com/office/drawing/2014/main" val="1694205"/>
+                    </a:ext>
+                  </a:extLst>
+                </a:gridCol>
+                <a:gridCol w="812800">
+                  <a:extLst>
+                    <a:ext uri="{9D8B030D-6E8A-4147-A177-3AD203B41FA5}">
+                      <a16:colId xmlns:a16="http://schemas.microsoft.com/office/drawing/2014/main" val="2408768007"/>
+                    </a:ext>
+                  </a:extLst>
+                </a:gridCol>
+                <a:gridCol w="812800">
+                  <a:extLst>
+                    <a:ext uri="{9D8B030D-6E8A-4147-A177-3AD203B41FA5}">
+                      <a16:colId xmlns:a16="http://schemas.microsoft.com/office/drawing/2014/main" val="3916070965"/>
+                    </a:ext>
+                  </a:extLst>
+                </a:gridCol>
+                <a:gridCol w="812800">
+                  <a:extLst>
+                    <a:ext uri="{9D8B030D-6E8A-4147-A177-3AD203B41FA5}">
+                      <a16:colId xmlns:a16="http://schemas.microsoft.com/office/drawing/2014/main" val="2884860139"/>
+                    </a:ext>
+                  </a:extLst>
+                </a:gridCol>
+                <a:gridCol w="812800">
+                  <a:extLst>
+                    <a:ext uri="{9D8B030D-6E8A-4147-A177-3AD203B41FA5}">
+                      <a16:colId xmlns:a16="http://schemas.microsoft.com/office/drawing/2014/main" val="2083948861"/>
+                    </a:ext>
+                  </a:extLst>
+                </a:gridCol>
+                <a:gridCol w="812800">
+                  <a:extLst>
+                    <a:ext uri="{9D8B030D-6E8A-4147-A177-3AD203B41FA5}">
+                      <a16:colId xmlns:a16="http://schemas.microsoft.com/office/drawing/2014/main" val="2358120665"/>
+                    </a:ext>
+                  </a:extLst>
+                </a:gridCol>
+                <a:gridCol w="812800">
+                  <a:extLst>
+                    <a:ext uri="{9D8B030D-6E8A-4147-A177-3AD203B41FA5}">
+                      <a16:colId xmlns:a16="http://schemas.microsoft.com/office/drawing/2014/main" val="4245474789"/>
+                    </a:ext>
+                  </a:extLst>
+                </a:gridCol>
+                <a:gridCol w="812800">
+                  <a:extLst>
+                    <a:ext uri="{9D8B030D-6E8A-4147-A177-3AD203B41FA5}">
+                      <a16:colId xmlns:a16="http://schemas.microsoft.com/office/drawing/2014/main" val="1139398879"/>
+                    </a:ext>
+                  </a:extLst>
+                </a:gridCol>
+                <a:gridCol w="812800">
+                  <a:extLst>
+                    <a:ext uri="{9D8B030D-6E8A-4147-A177-3AD203B41FA5}">
+                      <a16:colId xmlns:a16="http://schemas.microsoft.com/office/drawing/2014/main" val="298107426"/>
+                    </a:ext>
+                  </a:extLst>
+                </a:gridCol>
+                <a:gridCol w="812800">
+                  <a:extLst>
+                    <a:ext uri="{9D8B030D-6E8A-4147-A177-3AD203B41FA5}">
+                      <a16:colId xmlns:a16="http://schemas.microsoft.com/office/drawing/2014/main" val="1975393176"/>
+                    </a:ext>
+                  </a:extLst>
+                </a:gridCol>
+              </a:tblGrid>
+              <a:tr h="284508">
+                <a:tc>
+                  <a:txBody>
+                    <a:bodyPr/>
+                    <a:lstStyle/>
+                    <a:p>
+                      <a:endParaRPr lang="it-IT" dirty="0"/>
+                    </a:p>
+                  </a:txBody>
+                  <a:tcPr>
+                    <a:lnL w="12700" cap="flat" cmpd="sng" algn="ctr">
+                      <a:solidFill>
+                        <a:schemeClr val="tx1"/>
+                      </a:solidFill>
+                      <a:prstDash val="solid"/>
+                      <a:round/>
+                      <a:headEnd type="none" w="med" len="med"/>
+                      <a:tailEnd type="none" w="med" len="med"/>
+                    </a:lnL>
+                    <a:lnR w="12700" cap="flat" cmpd="sng" algn="ctr">
+                      <a:solidFill>
+                        <a:schemeClr val="tx1"/>
+                      </a:solidFill>
+                      <a:prstDash val="solid"/>
+                      <a:round/>
+                      <a:headEnd type="none" w="med" len="med"/>
+                      <a:tailEnd type="none" w="med" len="med"/>
+                    </a:lnR>
+                    <a:lnT w="12700" cap="flat" cmpd="sng" algn="ctr">
+                      <a:solidFill>
+                        <a:schemeClr val="tx1"/>
+                      </a:solidFill>
+                      <a:prstDash val="solid"/>
+                      <a:round/>
+                      <a:headEnd type="none" w="med" len="med"/>
+                      <a:tailEnd type="none" w="med" len="med"/>
+                    </a:lnT>
+                    <a:lnB w="12700" cap="flat" cmpd="sng" algn="ctr">
+                      <a:solidFill>
+                        <a:schemeClr val="tx1"/>
+                      </a:solidFill>
+                      <a:prstDash val="solid"/>
+                      <a:round/>
+                      <a:headEnd type="none" w="med" len="med"/>
+                      <a:tailEnd type="none" w="med" len="med"/>
+                    </a:lnB>
+                    <a:solidFill>
+                      <a:schemeClr val="bg2"/>
+                    </a:solidFill>
+                  </a:tcPr>
+                </a:tc>
+                <a:tc>
+                  <a:txBody>
+                    <a:bodyPr/>
+                    <a:lstStyle/>
+                    <a:p>
+                      <a:pPr marL="0" marR="0" lvl="0" indent="0" algn="l" defTabSz="914400" rtl="0" eaLnBrk="1" fontAlgn="auto" latinLnBrk="0" hangingPunct="1">
+                        <a:lnSpc>
+                          <a:spcPct val="100000"/>
+                        </a:lnSpc>
+                        <a:spcBef>
+                          <a:spcPts val="0"/>
+                        </a:spcBef>
+                        <a:spcAft>
+                          <a:spcPts val="0"/>
+                        </a:spcAft>
+                        <a:buClrTx/>
+                        <a:buSzTx/>
+                        <a:buFontTx/>
+                        <a:buNone/>
+                        <a:tabLst/>
+                        <a:defRPr/>
+                      </a:pPr>
+                      <a:r>
+                        <a:rPr lang="it-IT" dirty="0"/>
+                        <a:t>P1</a:t>
+                      </a:r>
+                    </a:p>
+                  </a:txBody>
+                  <a:tcPr>
+                    <a:lnL w="12700" cap="flat" cmpd="sng" algn="ctr">
+                      <a:solidFill>
+                        <a:schemeClr val="tx1"/>
+                      </a:solidFill>
+                      <a:prstDash val="solid"/>
+                      <a:round/>
+                      <a:headEnd type="none" w="med" len="med"/>
+                      <a:tailEnd type="none" w="med" len="med"/>
+                    </a:lnL>
+                    <a:lnR w="12700" cap="flat" cmpd="sng" algn="ctr">
+                      <a:solidFill>
+                        <a:schemeClr val="tx1"/>
+                      </a:solidFill>
+                      <a:prstDash val="solid"/>
+                      <a:round/>
+                      <a:headEnd type="none" w="med" len="med"/>
+                      <a:tailEnd type="none" w="med" len="med"/>
+                    </a:lnR>
+                    <a:lnT w="12700" cap="flat" cmpd="sng" algn="ctr">
+                      <a:solidFill>
+                        <a:schemeClr val="tx1"/>
+                      </a:solidFill>
+                      <a:prstDash val="solid"/>
+                      <a:round/>
+                      <a:headEnd type="none" w="med" len="med"/>
+                      <a:tailEnd type="none" w="med" len="med"/>
+                    </a:lnT>
+                    <a:lnB w="12700" cap="flat" cmpd="sng" algn="ctr">
+                      <a:solidFill>
+                        <a:schemeClr val="tx1"/>
+                      </a:solidFill>
+                      <a:prstDash val="solid"/>
+                      <a:round/>
+                      <a:headEnd type="none" w="med" len="med"/>
+                      <a:tailEnd type="none" w="med" len="med"/>
+                    </a:lnB>
+                    <a:solidFill>
+                      <a:schemeClr val="accent1">
+                        <a:lumMod val="60000"/>
+                        <a:lumOff val="40000"/>
+                      </a:schemeClr>
+                    </a:solidFill>
+                  </a:tcPr>
+                </a:tc>
+                <a:tc>
+                  <a:txBody>
+                    <a:bodyPr/>
+                    <a:lstStyle/>
+                    <a:p>
+                      <a:endParaRPr lang="it-IT" dirty="0"/>
+                    </a:p>
+                  </a:txBody>
+                  <a:tcPr>
+                    <a:lnL w="12700" cap="flat" cmpd="sng" algn="ctr">
+                      <a:solidFill>
+                        <a:schemeClr val="tx1"/>
+                      </a:solidFill>
+                      <a:prstDash val="solid"/>
+                      <a:round/>
+                      <a:headEnd type="none" w="med" len="med"/>
+                      <a:tailEnd type="none" w="med" len="med"/>
+                    </a:lnL>
+                    <a:lnR w="12700" cap="flat" cmpd="sng" algn="ctr">
+                      <a:solidFill>
+                        <a:schemeClr val="tx1"/>
+                      </a:solidFill>
+                      <a:prstDash val="solid"/>
+                      <a:round/>
+                      <a:headEnd type="none" w="med" len="med"/>
+                      <a:tailEnd type="none" w="med" len="med"/>
+                    </a:lnR>
+                    <a:lnT w="12700" cap="flat" cmpd="sng" algn="ctr">
+                      <a:solidFill>
+                        <a:schemeClr val="tx1"/>
+                      </a:solidFill>
+                      <a:prstDash val="solid"/>
+                      <a:round/>
+                      <a:headEnd type="none" w="med" len="med"/>
+                      <a:tailEnd type="none" w="med" len="med"/>
+                    </a:lnT>
+                    <a:lnB w="12700" cap="flat" cmpd="sng" algn="ctr">
+                      <a:solidFill>
+                        <a:schemeClr val="tx1"/>
+                      </a:solidFill>
+                      <a:prstDash val="solid"/>
+                      <a:round/>
+                      <a:headEnd type="none" w="med" len="med"/>
+                      <a:tailEnd type="none" w="med" len="med"/>
+                    </a:lnB>
+                    <a:solidFill>
+                      <a:schemeClr val="bg1">
+                        <a:lumMod val="95000"/>
+                      </a:schemeClr>
+                    </a:solidFill>
+                  </a:tcPr>
+                </a:tc>
+                <a:tc>
+                  <a:txBody>
+                    <a:bodyPr/>
+                    <a:lstStyle/>
+                    <a:p>
+                      <a:endParaRPr lang="it-IT" dirty="0"/>
+                    </a:p>
+                  </a:txBody>
+                  <a:tcPr>
+                    <a:lnL w="12700" cap="flat" cmpd="sng" algn="ctr">
+                      <a:solidFill>
+                        <a:schemeClr val="tx1"/>
+                      </a:solidFill>
+                      <a:prstDash val="solid"/>
+                      <a:round/>
+                      <a:headEnd type="none" w="med" len="med"/>
+                      <a:tailEnd type="none" w="med" len="med"/>
+                    </a:lnL>
+                    <a:lnR w="12700" cap="flat" cmpd="sng" algn="ctr">
+                      <a:solidFill>
+                        <a:schemeClr val="tx1"/>
+                      </a:solidFill>
+                      <a:prstDash val="solid"/>
+                      <a:round/>
+                      <a:headEnd type="none" w="med" len="med"/>
+                      <a:tailEnd type="none" w="med" len="med"/>
+                    </a:lnR>
+                    <a:lnT w="12700" cap="flat" cmpd="sng" algn="ctr">
+                      <a:solidFill>
+                        <a:schemeClr val="tx1"/>
+                      </a:solidFill>
+                      <a:prstDash val="solid"/>
+                      <a:round/>
+                      <a:headEnd type="none" w="med" len="med"/>
+                      <a:tailEnd type="none" w="med" len="med"/>
+                    </a:lnT>
+                    <a:lnB w="12700" cap="flat" cmpd="sng" algn="ctr">
+                      <a:solidFill>
+                        <a:schemeClr val="tx1"/>
+                      </a:solidFill>
+                      <a:prstDash val="solid"/>
+                      <a:round/>
+                      <a:headEnd type="none" w="med" len="med"/>
+                      <a:tailEnd type="none" w="med" len="med"/>
+                    </a:lnB>
+                    <a:solidFill>
+                      <a:schemeClr val="bg1">
+                        <a:lumMod val="95000"/>
+                      </a:schemeClr>
+                    </a:solidFill>
+                  </a:tcPr>
+                </a:tc>
+                <a:tc>
+                  <a:txBody>
+                    <a:bodyPr/>
+                    <a:lstStyle/>
+                    <a:p>
+                      <a:endParaRPr lang="it-IT" dirty="0"/>
+                    </a:p>
+                  </a:txBody>
+                  <a:tcPr>
+                    <a:lnL w="12700" cap="flat" cmpd="sng" algn="ctr">
+                      <a:solidFill>
+                        <a:schemeClr val="tx1"/>
+                      </a:solidFill>
+                      <a:prstDash val="solid"/>
+                      <a:round/>
+                      <a:headEnd type="none" w="med" len="med"/>
+                      <a:tailEnd type="none" w="med" len="med"/>
+                    </a:lnL>
+                    <a:lnR w="12700" cap="flat" cmpd="sng" algn="ctr">
+                      <a:solidFill>
+                        <a:schemeClr val="tx1"/>
+                      </a:solidFill>
+                      <a:prstDash val="solid"/>
+                      <a:round/>
+                      <a:headEnd type="none" w="med" len="med"/>
+                      <a:tailEnd type="none" w="med" len="med"/>
+                    </a:lnR>
+                    <a:lnT w="12700" cap="flat" cmpd="sng" algn="ctr">
+                      <a:solidFill>
+                        <a:schemeClr val="tx1"/>
+                      </a:solidFill>
+                      <a:prstDash val="solid"/>
+                      <a:round/>
+                      <a:headEnd type="none" w="med" len="med"/>
+                      <a:tailEnd type="none" w="med" len="med"/>
+                    </a:lnT>
+                    <a:lnB w="12700" cap="flat" cmpd="sng" algn="ctr">
+                      <a:solidFill>
+                        <a:schemeClr val="tx1"/>
+                      </a:solidFill>
+                      <a:prstDash val="solid"/>
+                      <a:round/>
+                      <a:headEnd type="none" w="med" len="med"/>
+                      <a:tailEnd type="none" w="med" len="med"/>
+                    </a:lnB>
+                    <a:solidFill>
+                      <a:schemeClr val="bg1">
+                        <a:lumMod val="95000"/>
+                      </a:schemeClr>
+                    </a:solidFill>
+                  </a:tcPr>
+                </a:tc>
+                <a:tc>
+                  <a:txBody>
+                    <a:bodyPr/>
+                    <a:lstStyle/>
+                    <a:p>
+                      <a:endParaRPr lang="it-IT" dirty="0"/>
+                    </a:p>
+                  </a:txBody>
+                  <a:tcPr>
+                    <a:lnL w="12700" cap="flat" cmpd="sng" algn="ctr">
+                      <a:solidFill>
+                        <a:schemeClr val="tx1"/>
+                      </a:solidFill>
+                      <a:prstDash val="solid"/>
+                      <a:round/>
+                      <a:headEnd type="none" w="med" len="med"/>
+                      <a:tailEnd type="none" w="med" len="med"/>
+                    </a:lnL>
+                    <a:lnR w="12700" cap="flat" cmpd="sng" algn="ctr">
+                      <a:solidFill>
+                        <a:schemeClr val="tx1"/>
+                      </a:solidFill>
+                      <a:prstDash val="solid"/>
+                      <a:round/>
+                      <a:headEnd type="none" w="med" len="med"/>
+                      <a:tailEnd type="none" w="med" len="med"/>
+                    </a:lnR>
+                    <a:lnT w="12700" cap="flat" cmpd="sng" algn="ctr">
+                      <a:solidFill>
+                        <a:schemeClr val="tx1"/>
+                      </a:solidFill>
+                      <a:prstDash val="solid"/>
+                      <a:round/>
+                      <a:headEnd type="none" w="med" len="med"/>
+                      <a:tailEnd type="none" w="med" len="med"/>
+                    </a:lnT>
+                    <a:lnB w="12700" cap="flat" cmpd="sng" algn="ctr">
+                      <a:solidFill>
+                        <a:schemeClr val="tx1"/>
+                      </a:solidFill>
+                      <a:prstDash val="solid"/>
+                      <a:round/>
+                      <a:headEnd type="none" w="med" len="med"/>
+                      <a:tailEnd type="none" w="med" len="med"/>
+                    </a:lnB>
+                    <a:solidFill>
+                      <a:schemeClr val="bg1">
+                        <a:lumMod val="95000"/>
+                      </a:schemeClr>
+                    </a:solidFill>
+                  </a:tcPr>
+                </a:tc>
+                <a:tc>
+                  <a:txBody>
+                    <a:bodyPr/>
+                    <a:lstStyle/>
+                    <a:p>
+                      <a:endParaRPr lang="it-IT" dirty="0">
+                        <a:solidFill>
+                          <a:schemeClr val="bg2"/>
+                        </a:solidFill>
+                      </a:endParaRPr>
+                    </a:p>
+                  </a:txBody>
+                  <a:tcPr>
+                    <a:lnL w="12700" cap="flat" cmpd="sng" algn="ctr">
+                      <a:solidFill>
+                        <a:schemeClr val="tx1"/>
+                      </a:solidFill>
+                      <a:prstDash val="solid"/>
+                      <a:round/>
+                      <a:headEnd type="none" w="med" len="med"/>
+                      <a:tailEnd type="none" w="med" len="med"/>
+                    </a:lnL>
+                    <a:lnR w="12700" cap="flat" cmpd="sng" algn="ctr">
+                      <a:solidFill>
+                        <a:schemeClr val="tx1"/>
+                      </a:solidFill>
+                      <a:prstDash val="solid"/>
+                      <a:round/>
+                      <a:headEnd type="none" w="med" len="med"/>
+                      <a:tailEnd type="none" w="med" len="med"/>
+                    </a:lnR>
+                    <a:lnT w="12700" cap="flat" cmpd="sng" algn="ctr">
+                      <a:solidFill>
+                        <a:schemeClr val="tx1"/>
+                      </a:solidFill>
+                      <a:prstDash val="solid"/>
+                      <a:round/>
+                      <a:headEnd type="none" w="med" len="med"/>
+                      <a:tailEnd type="none" w="med" len="med"/>
+                    </a:lnT>
+                    <a:lnB w="12700" cap="flat" cmpd="sng" algn="ctr">
+                      <a:solidFill>
+                        <a:schemeClr val="tx1"/>
+                      </a:solidFill>
+                      <a:prstDash val="solid"/>
+                      <a:round/>
+                      <a:headEnd type="none" w="med" len="med"/>
+                      <a:tailEnd type="none" w="med" len="med"/>
+                    </a:lnB>
+                    <a:solidFill>
+                      <a:schemeClr val="bg1">
+                        <a:lumMod val="95000"/>
+                      </a:schemeClr>
+                    </a:solidFill>
+                  </a:tcPr>
+                </a:tc>
+                <a:tc>
+                  <a:txBody>
+                    <a:bodyPr/>
+                    <a:lstStyle/>
+                    <a:p>
+                      <a:endParaRPr lang="it-IT" dirty="0"/>
+                    </a:p>
+                  </a:txBody>
+                  <a:tcPr>
+                    <a:lnL w="12700" cap="flat" cmpd="sng" algn="ctr">
+                      <a:solidFill>
+                        <a:schemeClr val="tx1"/>
+                      </a:solidFill>
+                      <a:prstDash val="solid"/>
+                      <a:round/>
+                      <a:headEnd type="none" w="med" len="med"/>
+                      <a:tailEnd type="none" w="med" len="med"/>
+                    </a:lnL>
+                    <a:lnR w="12700" cap="flat" cmpd="sng" algn="ctr">
+                      <a:solidFill>
+                        <a:schemeClr val="tx1"/>
+                      </a:solidFill>
+                      <a:prstDash val="solid"/>
+                      <a:round/>
+                      <a:headEnd type="none" w="med" len="med"/>
+                      <a:tailEnd type="none" w="med" len="med"/>
+                    </a:lnR>
+                    <a:lnT w="12700" cap="flat" cmpd="sng" algn="ctr">
+                      <a:solidFill>
+                        <a:schemeClr val="tx1"/>
+                      </a:solidFill>
+                      <a:prstDash val="solid"/>
+                      <a:round/>
+                      <a:headEnd type="none" w="med" len="med"/>
+                      <a:tailEnd type="none" w="med" len="med"/>
+                    </a:lnT>
+                    <a:lnB w="12700" cap="flat" cmpd="sng" algn="ctr">
+                      <a:solidFill>
+                        <a:schemeClr val="tx1"/>
+                      </a:solidFill>
+                      <a:prstDash val="solid"/>
+                      <a:round/>
+                      <a:headEnd type="none" w="med" len="med"/>
+                      <a:tailEnd type="none" w="med" len="med"/>
+                    </a:lnB>
+                    <a:solidFill>
+                      <a:schemeClr val="bg1">
+                        <a:lumMod val="95000"/>
+                      </a:schemeClr>
+                    </a:solidFill>
+                  </a:tcPr>
+                </a:tc>
+                <a:tc>
+                  <a:txBody>
+                    <a:bodyPr/>
+                    <a:lstStyle/>
+                    <a:p>
+                      <a:endParaRPr lang="it-IT" dirty="0"/>
+                    </a:p>
+                  </a:txBody>
+                  <a:tcPr>
+                    <a:lnL w="12700" cap="flat" cmpd="sng" algn="ctr">
+                      <a:solidFill>
+                        <a:schemeClr val="tx1"/>
+                      </a:solidFill>
+                      <a:prstDash val="solid"/>
+                      <a:round/>
+                      <a:headEnd type="none" w="med" len="med"/>
+                      <a:tailEnd type="none" w="med" len="med"/>
+                    </a:lnL>
+                    <a:lnR w="12700" cap="flat" cmpd="sng" algn="ctr">
+                      <a:solidFill>
+                        <a:schemeClr val="tx1"/>
+                      </a:solidFill>
+                      <a:prstDash val="solid"/>
+                      <a:round/>
+                      <a:headEnd type="none" w="med" len="med"/>
+                      <a:tailEnd type="none" w="med" len="med"/>
+                    </a:lnR>
+                    <a:lnT w="12700" cap="flat" cmpd="sng" algn="ctr">
+                      <a:solidFill>
+                        <a:schemeClr val="tx1"/>
+                      </a:solidFill>
+                      <a:prstDash val="solid"/>
+                      <a:round/>
+                      <a:headEnd type="none" w="med" len="med"/>
+                      <a:tailEnd type="none" w="med" len="med"/>
+                    </a:lnT>
+                    <a:lnB w="12700" cap="flat" cmpd="sng" algn="ctr">
+                      <a:solidFill>
+                        <a:schemeClr val="tx1"/>
+                      </a:solidFill>
+                      <a:prstDash val="solid"/>
+                      <a:round/>
+                      <a:headEnd type="none" w="med" len="med"/>
+                      <a:tailEnd type="none" w="med" len="med"/>
+                    </a:lnB>
+                    <a:solidFill>
+                      <a:schemeClr val="bg1">
+                        <a:lumMod val="95000"/>
+                      </a:schemeClr>
+                    </a:solidFill>
+                  </a:tcPr>
+                </a:tc>
+                <a:tc>
+                  <a:txBody>
+                    <a:bodyPr/>
+                    <a:lstStyle/>
+                    <a:p>
+                      <a:endParaRPr lang="it-IT" dirty="0"/>
+                    </a:p>
+                  </a:txBody>
+                  <a:tcPr>
+                    <a:lnL w="12700" cap="flat" cmpd="sng" algn="ctr">
+                      <a:solidFill>
+                        <a:schemeClr val="tx1"/>
+                      </a:solidFill>
+                      <a:prstDash val="solid"/>
+                      <a:round/>
+                      <a:headEnd type="none" w="med" len="med"/>
+                      <a:tailEnd type="none" w="med" len="med"/>
+                    </a:lnL>
+                    <a:lnR w="12700" cap="flat" cmpd="sng" algn="ctr">
+                      <a:solidFill>
+                        <a:schemeClr val="tx1"/>
+                      </a:solidFill>
+                      <a:prstDash val="solid"/>
+                      <a:round/>
+                      <a:headEnd type="none" w="med" len="med"/>
+                      <a:tailEnd type="none" w="med" len="med"/>
+                    </a:lnR>
+                    <a:lnT w="12700" cap="flat" cmpd="sng" algn="ctr">
+                      <a:solidFill>
+                        <a:schemeClr val="tx1"/>
+                      </a:solidFill>
+                      <a:prstDash val="solid"/>
+                      <a:round/>
+                      <a:headEnd type="none" w="med" len="med"/>
+                      <a:tailEnd type="none" w="med" len="med"/>
+                    </a:lnT>
+                    <a:lnB w="12700" cap="flat" cmpd="sng" algn="ctr">
+                      <a:solidFill>
+                        <a:schemeClr val="tx1"/>
+                      </a:solidFill>
+                      <a:prstDash val="solid"/>
+                      <a:round/>
+                      <a:headEnd type="none" w="med" len="med"/>
+                      <a:tailEnd type="none" w="med" len="med"/>
+                    </a:lnB>
+                    <a:solidFill>
+                      <a:schemeClr val="bg1">
+                        <a:lumMod val="95000"/>
+                      </a:schemeClr>
+                    </a:solidFill>
+                  </a:tcPr>
+                </a:tc>
+                <a:extLst>
+                  <a:ext uri="{0D108BD9-81ED-4DB2-BD59-A6C34878D82A}">
+                    <a16:rowId xmlns:a16="http://schemas.microsoft.com/office/drawing/2014/main" val="775609398"/>
+                  </a:ext>
+                </a:extLst>
+              </a:tr>
+            </a:tbl>
+          </a:graphicData>
+        </a:graphic>
+      </p:graphicFrame>
+      <p:pic>
+        <p:nvPicPr>
+          <p:cNvPr id="20" name="Picture 2" descr="Immagine che contiene schizzo, disegno, nero, bianco e nero&#10;&#10;Il contenuto generato dall&amp;#39;IA potrebbe non essere corretto.">
+            <a:extLst>
+              <a:ext uri="{FF2B5EF4-FFF2-40B4-BE49-F238E27FC236}">
+                <a16:creationId xmlns:a16="http://schemas.microsoft.com/office/drawing/2014/main" id="{CC2301D5-B7E9-8871-A60C-55529F1CEFD6}"/>
+              </a:ext>
+            </a:extLst>
+          </p:cNvPr>
+          <p:cNvPicPr>
+            <a:picLocks noChangeAspect="1" noChangeArrowheads="1"/>
+          </p:cNvPicPr>
+          <p:nvPr/>
+        </p:nvPicPr>
+        <p:blipFill>
+          <a:blip r:embed="rId2" cstate="print">
+            <a:extLst>
+              <a:ext uri="{28A0092B-C50C-407E-A947-70E740481C1C}">
+                <a14:useLocalDpi xmlns:a14="http://schemas.microsoft.com/office/drawing/2010/main" val="0"/>
+              </a:ext>
+            </a:extLst>
+          </a:blip>
+          <a:srcRect/>
+          <a:stretch>
+            <a:fillRect/>
+          </a:stretch>
+        </p:blipFill>
+        <p:spPr bwMode="auto">
+          <a:xfrm rot="15379497">
+            <a:off x="2398479" y="4320262"/>
+            <a:ext cx="282651" cy="282651"/>
+          </a:xfrm>
+          <a:prstGeom prst="rect">
+            <a:avLst/>
+          </a:prstGeom>
+          <a:noFill/>
+          <a:extLst>
+            <a:ext uri="{909E8E84-426E-40DD-AFC4-6F175D3DCCD1}">
+              <a14:hiddenFill xmlns:a14="http://schemas.microsoft.com/office/drawing/2010/main">
+                <a:solidFill>
+                  <a:srgbClr val="FFFFFF"/>
+                </a:solidFill>
+              </a14:hiddenFill>
+            </a:ext>
+          </a:extLst>
+        </p:spPr>
+      </p:pic>
+      <p:sp>
+        <p:nvSpPr>
+          <p:cNvPr id="21" name="CasellaDiTesto 20">
+            <a:extLst>
+              <a:ext uri="{FF2B5EF4-FFF2-40B4-BE49-F238E27FC236}">
+                <a16:creationId xmlns:a16="http://schemas.microsoft.com/office/drawing/2014/main" id="{377E6A8D-8FAE-AC47-87C1-64F72709401B}"/>
+              </a:ext>
+            </a:extLst>
+          </p:cNvPr>
+          <p:cNvSpPr txBox="1"/>
+          <p:nvPr/>
+        </p:nvSpPr>
+        <p:spPr>
+          <a:xfrm>
+            <a:off x="1030514" y="5732238"/>
+            <a:ext cx="10130971" cy="461665"/>
+          </a:xfrm>
+          <a:prstGeom prst="rect">
+            <a:avLst/>
+          </a:prstGeom>
+          <a:noFill/>
+        </p:spPr>
+        <p:txBody>
+          <a:bodyPr wrap="square" rtlCol="0">
+            <a:spAutoFit/>
+          </a:bodyPr>
+          <a:lstStyle/>
+          <a:p>
+            <a:pPr marL="285750" indent="-285750">
+              <a:buFont typeface="Arial" panose="020B0604020202020204" pitchFamily="34" charset="0"/>
+              <a:buChar char="•"/>
+            </a:pPr>
+            <a:r>
+              <a:rPr lang="it-IT" sz="2400" b="1" dirty="0"/>
+              <a:t>Il programma crede così di avere tutta la memoria disponibile</a:t>
+            </a:r>
+          </a:p>
+        </p:txBody>
+      </p:sp>
+    </p:spTree>
+    <p:extLst>
+      <p:ext uri="{BB962C8B-B14F-4D97-AF65-F5344CB8AC3E}">
+        <p14:creationId xmlns:p14="http://schemas.microsoft.com/office/powerpoint/2010/main" val="825017649"/>
+      </p:ext>
+    </p:extLst>
+  </p:cSld>
+  <p:clrMapOvr>
+    <a:masterClrMapping/>
+  </p:clrMapOvr>
+  <mc:AlternateContent xmlns:mc="http://schemas.openxmlformats.org/markup-compatibility/2006">
+    <mc:Choice xmlns:p159="http://schemas.microsoft.com/office/powerpoint/2015/09/main" Requires="p159">
+      <p:transition xmlns:p14="http://schemas.microsoft.com/office/powerpoint/2010/main" spd="slow" p14:dur="2000">
+        <p159:morph option="byObject"/>
+      </p:transition>
+    </mc:Choice>
+    <mc:Fallback>
+      <p:transition spd="slow">
+        <p:fade/>
+      </p:transition>
+    </mc:Fallback>
+  </mc:AlternateContent>
+  <p:timing>
+    <p:tnLst>
+      <p:par>
+        <p:cTn id="1" dur="indefinite" restart="never" nodeType="tmRoot">
+          <p:childTnLst>
+            <p:seq concurrent="1" nextAc="seek">
+              <p:cTn id="2" dur="indefinite" nodeType="mainSeq">
+                <p:childTnLst>
+                  <p:par>
+                    <p:cTn id="3" fill="hold">
+                      <p:stCondLst>
+                        <p:cond delay="indefinite"/>
+                      </p:stCondLst>
+                      <p:childTnLst>
+                        <p:par>
+                          <p:cTn id="4" fill="hold">
+                            <p:stCondLst>
+                              <p:cond delay="0"/>
+                            </p:stCondLst>
+                            <p:childTnLst>
+                              <p:par>
+                                <p:cTn id="5" presetID="10" presetClass="exit" presetSubtype="0" fill="hold" nodeType="clickEffect">
+                                  <p:stCondLst>
+                                    <p:cond delay="0"/>
+                                  </p:stCondLst>
+                                  <p:childTnLst>
+                                    <p:animEffect transition="out" filter="fade">
+                                      <p:cBhvr>
+                                        <p:cTn id="6" dur="500"/>
+                                        <p:tgtEl>
+                                          <p:spTgt spid="6"/>
+                                        </p:tgtEl>
+                                      </p:cBhvr>
+                                    </p:animEffect>
+                                    <p:set>
+                                      <p:cBhvr>
+                                        <p:cTn id="7" dur="1" fill="hold">
+                                          <p:stCondLst>
+                                            <p:cond delay="499"/>
+                                          </p:stCondLst>
+                                        </p:cTn>
+                                        <p:tgtEl>
+                                          <p:spTgt spid="6"/>
+                                        </p:tgtEl>
+                                        <p:attrNameLst>
+                                          <p:attrName>style.visibility</p:attrName>
+                                        </p:attrNameLst>
+                                      </p:cBhvr>
+                                      <p:to>
+                                        <p:strVal val="hidden"/>
+                                      </p:to>
+                                    </p:set>
+                                  </p:childTnLst>
+                                </p:cTn>
+                              </p:par>
+                              <p:par>
+                                <p:cTn id="8" presetID="10" presetClass="exit" presetSubtype="0" fill="hold" nodeType="withEffect">
+                                  <p:stCondLst>
+                                    <p:cond delay="0"/>
+                                  </p:stCondLst>
+                                  <p:childTnLst>
+                                    <p:animEffect transition="out" filter="fade">
+                                      <p:cBhvr>
+                                        <p:cTn id="9" dur="500"/>
+                                        <p:tgtEl>
+                                          <p:spTgt spid="7"/>
+                                        </p:tgtEl>
+                                      </p:cBhvr>
+                                    </p:animEffect>
+                                    <p:set>
+                                      <p:cBhvr>
+                                        <p:cTn id="10" dur="1" fill="hold">
+                                          <p:stCondLst>
+                                            <p:cond delay="499"/>
+                                          </p:stCondLst>
+                                        </p:cTn>
+                                        <p:tgtEl>
+                                          <p:spTgt spid="7"/>
+                                        </p:tgtEl>
+                                        <p:attrNameLst>
+                                          <p:attrName>style.visibility</p:attrName>
+                                        </p:attrNameLst>
+                                      </p:cBhvr>
+                                      <p:to>
+                                        <p:strVal val="hidden"/>
+                                      </p:to>
+                                    </p:set>
+                                  </p:childTnLst>
+                                </p:cTn>
+                              </p:par>
+                              <p:par>
+                                <p:cTn id="11" presetID="10" presetClass="exit" presetSubtype="0" fill="hold" nodeType="withEffect">
+                                  <p:stCondLst>
+                                    <p:cond delay="0"/>
+                                  </p:stCondLst>
+                                  <p:childTnLst>
+                                    <p:animEffect transition="out" filter="fade">
+                                      <p:cBhvr>
+                                        <p:cTn id="12" dur="500"/>
+                                        <p:tgtEl>
+                                          <p:spTgt spid="9"/>
+                                        </p:tgtEl>
+                                      </p:cBhvr>
+                                    </p:animEffect>
+                                    <p:set>
+                                      <p:cBhvr>
+                                        <p:cTn id="13" dur="1" fill="hold">
+                                          <p:stCondLst>
+                                            <p:cond delay="499"/>
+                                          </p:stCondLst>
+                                        </p:cTn>
+                                        <p:tgtEl>
+                                          <p:spTgt spid="9"/>
+                                        </p:tgtEl>
+                                        <p:attrNameLst>
+                                          <p:attrName>style.visibility</p:attrName>
+                                        </p:attrNameLst>
+                                      </p:cBhvr>
+                                      <p:to>
+                                        <p:strVal val="hidden"/>
+                                      </p:to>
+                                    </p:set>
+                                  </p:childTnLst>
+                                </p:cTn>
+                              </p:par>
+                              <p:par>
+                                <p:cTn id="14" presetID="10" presetClass="exit" presetSubtype="0" fill="hold" nodeType="withEffect">
+                                  <p:stCondLst>
+                                    <p:cond delay="0"/>
+                                  </p:stCondLst>
+                                  <p:childTnLst>
+                                    <p:animEffect transition="out" filter="fade">
+                                      <p:cBhvr>
+                                        <p:cTn id="15" dur="500"/>
+                                        <p:tgtEl>
+                                          <p:spTgt spid="13"/>
+                                        </p:tgtEl>
+                                      </p:cBhvr>
+                                    </p:animEffect>
+                                    <p:set>
+                                      <p:cBhvr>
+                                        <p:cTn id="16" dur="1" fill="hold">
+                                          <p:stCondLst>
+                                            <p:cond delay="499"/>
+                                          </p:stCondLst>
+                                        </p:cTn>
+                                        <p:tgtEl>
+                                          <p:spTgt spid="13"/>
+                                        </p:tgtEl>
+                                        <p:attrNameLst>
+                                          <p:attrName>style.visibility</p:attrName>
+                                        </p:attrNameLst>
+                                      </p:cBhvr>
+                                      <p:to>
+                                        <p:strVal val="hidden"/>
+                                      </p:to>
+                                    </p:set>
+                                  </p:childTnLst>
+                                </p:cTn>
+                              </p:par>
+                              <p:par>
+                                <p:cTn id="17" presetID="10" presetClass="entr" presetSubtype="0" fill="hold" nodeType="withEffect">
+                                  <p:stCondLst>
+                                    <p:cond delay="0"/>
+                                  </p:stCondLst>
+                                  <p:childTnLst>
+                                    <p:set>
+                                      <p:cBhvr>
+                                        <p:cTn id="18" dur="1" fill="hold">
+                                          <p:stCondLst>
+                                            <p:cond delay="0"/>
+                                          </p:stCondLst>
+                                        </p:cTn>
+                                        <p:tgtEl>
+                                          <p:spTgt spid="20"/>
+                                        </p:tgtEl>
+                                        <p:attrNameLst>
+                                          <p:attrName>style.visibility</p:attrName>
+                                        </p:attrNameLst>
+                                      </p:cBhvr>
+                                      <p:to>
+                                        <p:strVal val="visible"/>
+                                      </p:to>
+                                    </p:set>
+                                    <p:animEffect transition="in" filter="fade">
+                                      <p:cBhvr>
+                                        <p:cTn id="19" dur="500"/>
+                                        <p:tgtEl>
+                                          <p:spTgt spid="20"/>
+                                        </p:tgtEl>
+                                      </p:cBhvr>
+                                    </p:animEffect>
+                                  </p:childTnLst>
+                                </p:cTn>
+                              </p:par>
+                              <p:par>
+                                <p:cTn id="20" presetID="10" presetClass="entr" presetSubtype="0" fill="hold" nodeType="withEffect">
+                                  <p:stCondLst>
+                                    <p:cond delay="0"/>
+                                  </p:stCondLst>
+                                  <p:childTnLst>
+                                    <p:set>
+                                      <p:cBhvr>
+                                        <p:cTn id="21" dur="1" fill="hold">
+                                          <p:stCondLst>
+                                            <p:cond delay="0"/>
+                                          </p:stCondLst>
+                                        </p:cTn>
+                                        <p:tgtEl>
+                                          <p:spTgt spid="18"/>
+                                        </p:tgtEl>
+                                        <p:attrNameLst>
+                                          <p:attrName>style.visibility</p:attrName>
+                                        </p:attrNameLst>
+                                      </p:cBhvr>
+                                      <p:to>
+                                        <p:strVal val="visible"/>
+                                      </p:to>
+                                    </p:set>
+                                    <p:animEffect transition="in" filter="fade">
+                                      <p:cBhvr>
+                                        <p:cTn id="22" dur="500"/>
+                                        <p:tgtEl>
+                                          <p:spTgt spid="18"/>
+                                        </p:tgtEl>
+                                      </p:cBhvr>
+                                    </p:animEffect>
+                                  </p:childTnLst>
+                                </p:cTn>
+                              </p:par>
+                              <p:par>
+                                <p:cTn id="23" presetID="10" presetClass="entr" presetSubtype="0" fill="hold" nodeType="withEffect">
+                                  <p:stCondLst>
+                                    <p:cond delay="0"/>
+                                  </p:stCondLst>
+                                  <p:childTnLst>
+                                    <p:set>
+                                      <p:cBhvr>
+                                        <p:cTn id="24" dur="1" fill="hold">
+                                          <p:stCondLst>
+                                            <p:cond delay="0"/>
+                                          </p:stCondLst>
+                                        </p:cTn>
+                                        <p:tgtEl>
+                                          <p:spTgt spid="19"/>
+                                        </p:tgtEl>
+                                        <p:attrNameLst>
+                                          <p:attrName>style.visibility</p:attrName>
+                                        </p:attrNameLst>
+                                      </p:cBhvr>
+                                      <p:to>
+                                        <p:strVal val="visible"/>
+                                      </p:to>
+                                    </p:set>
+                                    <p:animEffect transition="in" filter="fade">
+                                      <p:cBhvr>
+                                        <p:cTn id="25" dur="500"/>
+                                        <p:tgtEl>
+                                          <p:spTgt spid="19"/>
+                                        </p:tgtEl>
+                                      </p:cBhvr>
+                                    </p:animEffect>
+                                  </p:childTnLst>
+                                </p:cTn>
+                              </p:par>
+                              <p:par>
+                                <p:cTn id="26" presetID="10" presetClass="entr" presetSubtype="0" fill="hold" nodeType="withEffect">
+                                  <p:stCondLst>
+                                    <p:cond delay="0"/>
+                                  </p:stCondLst>
+                                  <p:childTnLst>
+                                    <p:set>
+                                      <p:cBhvr>
+                                        <p:cTn id="27" dur="1" fill="hold">
+                                          <p:stCondLst>
+                                            <p:cond delay="0"/>
+                                          </p:stCondLst>
+                                        </p:cTn>
+                                        <p:tgtEl>
+                                          <p:spTgt spid="5"/>
+                                        </p:tgtEl>
+                                        <p:attrNameLst>
+                                          <p:attrName>style.visibility</p:attrName>
+                                        </p:attrNameLst>
+                                      </p:cBhvr>
+                                      <p:to>
+                                        <p:strVal val="visible"/>
+                                      </p:to>
+                                    </p:set>
+                                    <p:animEffect transition="in" filter="fade">
+                                      <p:cBhvr>
+                                        <p:cTn id="28" dur="500"/>
+                                        <p:tgtEl>
+                                          <p:spTgt spid="5"/>
+                                        </p:tgtEl>
+                                      </p:cBhvr>
+                                    </p:animEffect>
+                                  </p:childTnLst>
+                                </p:cTn>
+                              </p:par>
+                            </p:childTnLst>
+                          </p:cTn>
+                        </p:par>
+                      </p:childTnLst>
+                    </p:cTn>
+                  </p:par>
+                </p:childTnLst>
+              </p:cTn>
+              <p:prevCondLst>
+                <p:cond evt="onPrev" delay="0">
+                  <p:tgtEl>
+                    <p:sldTgt/>
+                  </p:tgtEl>
+                </p:cond>
+              </p:prevCondLst>
+              <p:nextCondLst>
+                <p:cond evt="onNext" delay="0">
+                  <p:tgtEl>
+                    <p:sldTgt/>
+                  </p:tgtEl>
+                </p:cond>
+              </p:nextCondLst>
+            </p:seq>
+          </p:childTnLst>
+        </p:cTn>
+      </p:par>
+    </p:tnLst>
+  </p:timing>
+</p:sld>
+</file>
+
+<file path=ppt/slides/slide15.xml><?xml version="1.0" encoding="utf-8"?>
+<p:sld xmlns:a="http://schemas.openxmlformats.org/drawingml/2006/main" xmlns:r="http://schemas.openxmlformats.org/officeDocument/2006/relationships" xmlns:p="http://schemas.openxmlformats.org/presentationml/2006/main">
+  <p:cSld>
+    <p:spTree>
+      <p:nvGrpSpPr>
+        <p:cNvPr id="1" name="">
+          <a:extLst>
+            <a:ext uri="{FF2B5EF4-FFF2-40B4-BE49-F238E27FC236}">
               <a16:creationId xmlns:a16="http://schemas.microsoft.com/office/drawing/2014/main" id="{7FEE132D-FCBF-AB0D-1853-C7810B6680F2}"/>
             </a:ext>
           </a:extLst>
@@ -5212,6 +11920,35 @@
             <a:endParaRPr lang="it-IT" sz="8000" b="1" dirty="0">
               <a:cs typeface="Posterama"/>
             </a:endParaRPr>
+          </a:p>
+        </p:txBody>
+      </p:sp>
+      <p:sp>
+        <p:nvSpPr>
+          <p:cNvPr id="3" name="Segnaposto data 2">
+            <a:extLst>
+              <a:ext uri="{FF2B5EF4-FFF2-40B4-BE49-F238E27FC236}">
+                <a16:creationId xmlns:a16="http://schemas.microsoft.com/office/drawing/2014/main" id="{71A643BA-5F94-C720-F759-BC005AB526B1}"/>
+              </a:ext>
+            </a:extLst>
+          </p:cNvPr>
+          <p:cNvSpPr>
+            <a:spLocks noGrp="1"/>
+          </p:cNvSpPr>
+          <p:nvPr>
+            <p:ph type="dt" sz="half" idx="10"/>
+          </p:nvPr>
+        </p:nvSpPr>
+        <p:spPr/>
+        <p:txBody>
+          <a:bodyPr/>
+          <a:lstStyle/>
+          <a:p>
+            <a:fld id="{BBE682DA-0DE7-4704-BBA6-56F1DF2C8487}" type="datetime1">
+              <a:rPr lang="it-IT" smtClean="0"/>
+              <a:t>12/04/2026</a:t>
+            </a:fld>
+            <a:endParaRPr lang="en-US"/>
           </a:p>
         </p:txBody>
       </p:sp>
@@ -5889,6 +12626,35 @@
           </a:custGeom>
         </p:spPr>
       </p:pic>
+      <p:sp>
+        <p:nvSpPr>
+          <p:cNvPr id="5" name="Segnaposto data 4">
+            <a:extLst>
+              <a:ext uri="{FF2B5EF4-FFF2-40B4-BE49-F238E27FC236}">
+                <a16:creationId xmlns:a16="http://schemas.microsoft.com/office/drawing/2014/main" id="{AAAD945B-5B82-25EB-3789-223A539E22F3}"/>
+              </a:ext>
+            </a:extLst>
+          </p:cNvPr>
+          <p:cNvSpPr>
+            <a:spLocks noGrp="1"/>
+          </p:cNvSpPr>
+          <p:nvPr>
+            <p:ph type="dt" sz="half" idx="10"/>
+          </p:nvPr>
+        </p:nvSpPr>
+        <p:spPr/>
+        <p:txBody>
+          <a:bodyPr/>
+          <a:lstStyle/>
+          <a:p>
+            <a:fld id="{68391CC2-EADB-47E7-B633-708926E6AA91}" type="datetime1">
+              <a:rPr lang="it-IT" smtClean="0"/>
+              <a:t>12/04/2026</a:t>
+            </a:fld>
+            <a:endParaRPr lang="en-US"/>
+          </a:p>
+        </p:txBody>
+      </p:sp>
     </p:spTree>
     <p:extLst>
       <p:ext uri="{BB962C8B-B14F-4D97-AF65-F5344CB8AC3E}">
@@ -5899,14 +12665,14 @@
   <p:clrMapOvr>
     <a:masterClrMapping/>
   </p:clrMapOvr>
-  <mc:AlternateContent xmlns:mc="http://schemas.openxmlformats.org/markup-compatibility/2006" xmlns:p159="http://schemas.microsoft.com/office/powerpoint/2015/09/main">
-    <mc:Choice Requires="p159">
-      <p:transition xmlns:p14="http://schemas.microsoft.com/office/powerpoint/2010/main" spd="slow" p14:dur="2500">
-        <p159:morph option="byObject"/>
+  <mc:AlternateContent xmlns:mc="http://schemas.openxmlformats.org/markup-compatibility/2006">
+    <mc:Choice xmlns:p14="http://schemas.microsoft.com/office/powerpoint/2010/main" Requires="p14">
+      <p:transition spd="med" p14:dur="700">
+        <p:fade/>
       </p:transition>
     </mc:Choice>
-    <mc:Fallback xmlns="">
-      <p:transition spd="slow">
+    <mc:Fallback>
+      <p:transition spd="med">
         <p:fade/>
       </p:transition>
     </mc:Fallback>
@@ -6738,6 +13504,35 @@
           </a:custGeom>
         </p:spPr>
       </p:pic>
+      <p:sp>
+        <p:nvSpPr>
+          <p:cNvPr id="4" name="Segnaposto data 3">
+            <a:extLst>
+              <a:ext uri="{FF2B5EF4-FFF2-40B4-BE49-F238E27FC236}">
+                <a16:creationId xmlns:a16="http://schemas.microsoft.com/office/drawing/2014/main" id="{18729481-3B67-CE2B-22D4-27655C22D611}"/>
+              </a:ext>
+            </a:extLst>
+          </p:cNvPr>
+          <p:cNvSpPr>
+            <a:spLocks noGrp="1"/>
+          </p:cNvSpPr>
+          <p:nvPr>
+            <p:ph type="dt" sz="half" idx="10"/>
+          </p:nvPr>
+        </p:nvSpPr>
+        <p:spPr/>
+        <p:txBody>
+          <a:bodyPr/>
+          <a:lstStyle/>
+          <a:p>
+            <a:fld id="{DCFF1E96-7AF7-41BB-ACC2-A09D9B8137F7}" type="datetime1">
+              <a:rPr lang="it-IT" smtClean="0"/>
+              <a:t>12/04/2026</a:t>
+            </a:fld>
+            <a:endParaRPr lang="en-US"/>
+          </a:p>
+        </p:txBody>
+      </p:sp>
     </p:spTree>
     <p:extLst>
       <p:ext uri="{BB962C8B-B14F-4D97-AF65-F5344CB8AC3E}">
@@ -6748,14 +13543,14 @@
   <p:clrMapOvr>
     <a:masterClrMapping/>
   </p:clrMapOvr>
-  <mc:AlternateContent xmlns:mc="http://schemas.openxmlformats.org/markup-compatibility/2006" xmlns:p159="http://schemas.microsoft.com/office/powerpoint/2015/09/main">
-    <mc:Choice Requires="p159">
-      <p:transition xmlns:p14="http://schemas.microsoft.com/office/powerpoint/2010/main" spd="slow" p14:dur="2000">
-        <p159:morph option="byObject"/>
+  <mc:AlternateContent xmlns:mc="http://schemas.openxmlformats.org/markup-compatibility/2006">
+    <mc:Choice xmlns:p14="http://schemas.microsoft.com/office/powerpoint/2010/main" Requires="p14">
+      <p:transition spd="med" p14:dur="700">
+        <p:fade/>
       </p:transition>
     </mc:Choice>
-    <mc:Fallback xmlns="">
-      <p:transition spd="slow">
+    <mc:Fallback>
+      <p:transition spd="med">
         <p:fade/>
       </p:transition>
     </mc:Fallback>
@@ -6947,6 +13742,35 @@
               <a:rPr lang="it-IT" sz="2000" b="1" dirty="0"/>
               <a:t>PROGRAMMA</a:t>
             </a:r>
+          </a:p>
+        </p:txBody>
+      </p:sp>
+      <p:sp>
+        <p:nvSpPr>
+          <p:cNvPr id="3" name="Segnaposto data 2">
+            <a:extLst>
+              <a:ext uri="{FF2B5EF4-FFF2-40B4-BE49-F238E27FC236}">
+                <a16:creationId xmlns:a16="http://schemas.microsoft.com/office/drawing/2014/main" id="{56AF56BB-8E94-A974-F8DA-4F36AE2E2FF1}"/>
+              </a:ext>
+            </a:extLst>
+          </p:cNvPr>
+          <p:cNvSpPr>
+            <a:spLocks noGrp="1"/>
+          </p:cNvSpPr>
+          <p:nvPr>
+            <p:ph type="dt" sz="half" idx="10"/>
+          </p:nvPr>
+        </p:nvSpPr>
+        <p:spPr/>
+        <p:txBody>
+          <a:bodyPr/>
+          <a:lstStyle/>
+          <a:p>
+            <a:fld id="{1C419E7D-CFB0-4B19-A891-2ECEF7C99B45}" type="datetime1">
+              <a:rPr lang="it-IT" smtClean="0"/>
+              <a:t>12/04/2026</a:t>
+            </a:fld>
+            <a:endParaRPr lang="en-US"/>
           </a:p>
         </p:txBody>
       </p:sp>
@@ -7657,6 +14481,35 @@
               <a:rPr lang="it-IT" dirty="0"/>
               <a:t>3</a:t>
             </a:r>
+          </a:p>
+        </p:txBody>
+      </p:sp>
+      <p:sp>
+        <p:nvSpPr>
+          <p:cNvPr id="3" name="Segnaposto data 2">
+            <a:extLst>
+              <a:ext uri="{FF2B5EF4-FFF2-40B4-BE49-F238E27FC236}">
+                <a16:creationId xmlns:a16="http://schemas.microsoft.com/office/drawing/2014/main" id="{82306413-7099-1F40-56AE-2CDE8A8BE2AA}"/>
+              </a:ext>
+            </a:extLst>
+          </p:cNvPr>
+          <p:cNvSpPr>
+            <a:spLocks noGrp="1"/>
+          </p:cNvSpPr>
+          <p:nvPr>
+            <p:ph type="dt" sz="half" idx="10"/>
+          </p:nvPr>
+        </p:nvSpPr>
+        <p:spPr/>
+        <p:txBody>
+          <a:bodyPr/>
+          <a:lstStyle/>
+          <a:p>
+            <a:fld id="{E129383A-CAA6-40B2-8F13-B4F67D7829BC}" type="datetime1">
+              <a:rPr lang="it-IT" smtClean="0"/>
+              <a:t>12/04/2026</a:t>
+            </a:fld>
+            <a:endParaRPr lang="en-US"/>
           </a:p>
         </p:txBody>
       </p:sp>
@@ -8818,6 +15671,179 @@
           <a:xfrm>
             <a:off x="8874683" y="4342489"/>
             <a:ext cx="610502" cy="361575"/>
+          </a:xfrm>
+          <a:prstGeom prst="rect">
+            <a:avLst/>
+          </a:prstGeom>
+        </p:spPr>
+      </p:pic>
+      <p:sp>
+        <p:nvSpPr>
+          <p:cNvPr id="4" name="Segnaposto data 3">
+            <a:extLst>
+              <a:ext uri="{FF2B5EF4-FFF2-40B4-BE49-F238E27FC236}">
+                <a16:creationId xmlns:a16="http://schemas.microsoft.com/office/drawing/2014/main" id="{AF572BD8-71FD-EF1B-458F-39E2ABC63E23}"/>
+              </a:ext>
+            </a:extLst>
+          </p:cNvPr>
+          <p:cNvSpPr>
+            <a:spLocks noGrp="1"/>
+          </p:cNvSpPr>
+          <p:nvPr>
+            <p:ph type="dt" sz="half" idx="10"/>
+          </p:nvPr>
+        </p:nvSpPr>
+        <p:spPr/>
+        <p:txBody>
+          <a:bodyPr/>
+          <a:lstStyle/>
+          <a:p>
+            <a:fld id="{27910C34-CF68-4BDA-AF73-0AAB4A470C1F}" type="datetime1">
+              <a:rPr lang="it-IT" smtClean="0"/>
+              <a:t>12/04/2026</a:t>
+            </a:fld>
+            <a:endParaRPr lang="en-US"/>
+          </a:p>
+        </p:txBody>
+      </p:sp>
+      <p:sp>
+        <p:nvSpPr>
+          <p:cNvPr id="6" name="CasellaDiTesto 5">
+            <a:extLst>
+              <a:ext uri="{FF2B5EF4-FFF2-40B4-BE49-F238E27FC236}">
+                <a16:creationId xmlns:a16="http://schemas.microsoft.com/office/drawing/2014/main" id="{B9AF670B-BD70-9A40-2348-FE3FE4756D63}"/>
+              </a:ext>
+            </a:extLst>
+          </p:cNvPr>
+          <p:cNvSpPr txBox="1"/>
+          <p:nvPr/>
+        </p:nvSpPr>
+        <p:spPr>
+          <a:xfrm>
+            <a:off x="9461322" y="3223854"/>
+            <a:ext cx="1672253" cy="369332"/>
+          </a:xfrm>
+          <a:prstGeom prst="rect">
+            <a:avLst/>
+          </a:prstGeom>
+          <a:noFill/>
+        </p:spPr>
+        <p:txBody>
+          <a:bodyPr wrap="none" rtlCol="0">
+            <a:spAutoFit/>
+          </a:bodyPr>
+          <a:lstStyle/>
+          <a:p>
+            <a:r>
+              <a:rPr lang="it-IT" dirty="0"/>
+              <a:t>Registro base </a:t>
+            </a:r>
+          </a:p>
+        </p:txBody>
+      </p:sp>
+      <p:sp>
+        <p:nvSpPr>
+          <p:cNvPr id="9" name="CasellaDiTesto 8">
+            <a:extLst>
+              <a:ext uri="{FF2B5EF4-FFF2-40B4-BE49-F238E27FC236}">
+                <a16:creationId xmlns:a16="http://schemas.microsoft.com/office/drawing/2014/main" id="{C30948CA-6859-316A-5158-F31E52C9935E}"/>
+              </a:ext>
+            </a:extLst>
+          </p:cNvPr>
+          <p:cNvSpPr txBox="1"/>
+          <p:nvPr/>
+        </p:nvSpPr>
+        <p:spPr>
+          <a:xfrm>
+            <a:off x="9485185" y="5098532"/>
+            <a:ext cx="1999226" cy="369332"/>
+          </a:xfrm>
+          <a:prstGeom prst="rect">
+            <a:avLst/>
+          </a:prstGeom>
+          <a:noFill/>
+        </p:spPr>
+        <p:txBody>
+          <a:bodyPr wrap="square">
+            <a:spAutoFit/>
+          </a:bodyPr>
+          <a:lstStyle/>
+          <a:p>
+            <a:r>
+              <a:rPr lang="it-IT" dirty="0"/>
+              <a:t>Registro limite </a:t>
+            </a:r>
+          </a:p>
+        </p:txBody>
+      </p:sp>
+      <p:pic>
+        <p:nvPicPr>
+          <p:cNvPr id="10" name="Immagine 9">
+            <a:extLst>
+              <a:ext uri="{FF2B5EF4-FFF2-40B4-BE49-F238E27FC236}">
+                <a16:creationId xmlns:a16="http://schemas.microsoft.com/office/drawing/2014/main" id="{0322F971-DC07-D4D8-AF08-C7D8449313C8}"/>
+              </a:ext>
+            </a:extLst>
+          </p:cNvPr>
+          <p:cNvPicPr>
+            <a:picLocks noChangeAspect="1"/>
+          </p:cNvPicPr>
+          <p:nvPr/>
+        </p:nvPicPr>
+        <p:blipFill>
+          <a:blip r:embed="rId6" cstate="print">
+            <a:extLst>
+              <a:ext uri="{28A0092B-C50C-407E-A947-70E740481C1C}">
+                <a14:useLocalDpi xmlns:a14="http://schemas.microsoft.com/office/drawing/2010/main" val="0"/>
+              </a:ext>
+            </a:extLst>
+          </a:blip>
+          <a:srcRect t="7034" b="19033"/>
+          <a:stretch>
+            <a:fillRect/>
+          </a:stretch>
+        </p:blipFill>
+        <p:spPr>
+          <a:xfrm rot="1283482">
+            <a:off x="10245635" y="5010809"/>
+            <a:ext cx="285489" cy="179697"/>
+          </a:xfrm>
+          <a:prstGeom prst="rect">
+            <a:avLst/>
+          </a:prstGeom>
+        </p:spPr>
+      </p:pic>
+      <p:pic>
+        <p:nvPicPr>
+          <p:cNvPr id="11" name="Immagine 10">
+            <a:extLst>
+              <a:ext uri="{FF2B5EF4-FFF2-40B4-BE49-F238E27FC236}">
+                <a16:creationId xmlns:a16="http://schemas.microsoft.com/office/drawing/2014/main" id="{8D152AF0-753F-9E0F-4BB2-C1247CFE49F3}"/>
+              </a:ext>
+            </a:extLst>
+          </p:cNvPr>
+          <p:cNvPicPr>
+            <a:picLocks noChangeAspect="1"/>
+          </p:cNvPicPr>
+          <p:nvPr/>
+        </p:nvPicPr>
+        <p:blipFill>
+          <a:blip r:embed="rId7" cstate="print">
+            <a:extLst>
+              <a:ext uri="{28A0092B-C50C-407E-A947-70E740481C1C}">
+                <a14:useLocalDpi xmlns:a14="http://schemas.microsoft.com/office/drawing/2010/main" val="0"/>
+              </a:ext>
+            </a:extLst>
+          </a:blip>
+          <a:srcRect t="7034" b="19033"/>
+          <a:stretch>
+            <a:fillRect/>
+          </a:stretch>
+        </p:blipFill>
+        <p:spPr>
+          <a:xfrm rot="9113441" flipH="1">
+            <a:off x="10167960" y="3574243"/>
+            <a:ext cx="362636" cy="201687"/>
           </a:xfrm>
           <a:prstGeom prst="rect">
             <a:avLst/>
@@ -9328,7 +16354,7 @@
         <p:spPr>
           <a:xfrm>
             <a:off x="715992" y="2303253"/>
-            <a:ext cx="9294783" cy="2308324"/>
+            <a:ext cx="9294783" cy="3293209"/>
           </a:xfrm>
           <a:prstGeom prst="rect">
             <a:avLst/>
@@ -9391,8 +16417,14 @@
             </a:r>
             <a:r>
               <a:rPr lang="it-IT" sz="2800" dirty="0"/>
-              <a:t>Calcolo degli indirizzi Logici</a:t>
-            </a:r>
+              <a:t>Aggiunge al programma compilato le librerie </a:t>
+            </a:r>
+          </a:p>
+          <a:p>
+            <a:pPr marL="285750" indent="-285750">
+              <a:buFont typeface="Arial" panose="020B0604020202020204" pitchFamily="34" charset="0"/>
+              <a:buChar char="•"/>
+            </a:pPr>
             <a:endParaRPr lang="it-IT" sz="3600" dirty="0"/>
           </a:p>
         </p:txBody>
@@ -9471,6 +16503,35 @@
           </a:prstGeom>
         </p:spPr>
       </p:pic>
+      <p:sp>
+        <p:nvSpPr>
+          <p:cNvPr id="3" name="Segnaposto data 2">
+            <a:extLst>
+              <a:ext uri="{FF2B5EF4-FFF2-40B4-BE49-F238E27FC236}">
+                <a16:creationId xmlns:a16="http://schemas.microsoft.com/office/drawing/2014/main" id="{112EB79E-CA7A-93AF-0DC1-22A7CD0D0FD1}"/>
+              </a:ext>
+            </a:extLst>
+          </p:cNvPr>
+          <p:cNvSpPr>
+            <a:spLocks noGrp="1"/>
+          </p:cNvSpPr>
+          <p:nvPr>
+            <p:ph type="dt" sz="half" idx="10"/>
+          </p:nvPr>
+        </p:nvSpPr>
+        <p:spPr/>
+        <p:txBody>
+          <a:bodyPr/>
+          <a:lstStyle/>
+          <a:p>
+            <a:fld id="{1E3B08F3-56F4-4EA0-8272-7E9C1F0B1327}" type="datetime1">
+              <a:rPr lang="it-IT" smtClean="0"/>
+              <a:t>12/04/2026</a:t>
+            </a:fld>
+            <a:endParaRPr lang="en-US"/>
+          </a:p>
+        </p:txBody>
+      </p:sp>
     </p:spTree>
     <p:extLst>
       <p:ext uri="{BB962C8B-B14F-4D97-AF65-F5344CB8AC3E}">
@@ -9481,13 +16542,13 @@
   <p:clrMapOvr>
     <a:masterClrMapping/>
   </p:clrMapOvr>
-  <mc:AlternateContent xmlns:mc="http://schemas.openxmlformats.org/markup-compatibility/2006">
-    <mc:Choice xmlns:p159="http://schemas.microsoft.com/office/powerpoint/2015/09/main" Requires="p159">
+  <mc:AlternateContent xmlns:mc="http://schemas.openxmlformats.org/markup-compatibility/2006" xmlns:p159="http://schemas.microsoft.com/office/powerpoint/2015/09/main">
+    <mc:Choice Requires="p159">
       <p:transition xmlns:p14="http://schemas.microsoft.com/office/powerpoint/2010/main" spd="slow" p14:dur="2000">
         <p159:morph option="byObject"/>
       </p:transition>
     </mc:Choice>
-    <mc:Fallback>
+    <mc:Fallback xmlns="">
       <p:transition spd="slow">
         <p:fade/>
       </p:transition>
@@ -9861,6 +16922,35 @@
           </a:p>
         </p:txBody>
       </p:sp>
+      <p:sp>
+        <p:nvSpPr>
+          <p:cNvPr id="4" name="Segnaposto data 3">
+            <a:extLst>
+              <a:ext uri="{FF2B5EF4-FFF2-40B4-BE49-F238E27FC236}">
+                <a16:creationId xmlns:a16="http://schemas.microsoft.com/office/drawing/2014/main" id="{7E5446D4-2A50-B0AD-AC43-1A7AD20507E4}"/>
+              </a:ext>
+            </a:extLst>
+          </p:cNvPr>
+          <p:cNvSpPr>
+            <a:spLocks noGrp="1"/>
+          </p:cNvSpPr>
+          <p:nvPr>
+            <p:ph type="dt" sz="half" idx="10"/>
+          </p:nvPr>
+        </p:nvSpPr>
+        <p:spPr/>
+        <p:txBody>
+          <a:bodyPr/>
+          <a:lstStyle/>
+          <a:p>
+            <a:fld id="{AE9558E3-D429-48E3-834C-882648955D5B}" type="datetime1">
+              <a:rPr lang="it-IT" smtClean="0"/>
+              <a:t>12/04/2026</a:t>
+            </a:fld>
+            <a:endParaRPr lang="en-US"/>
+          </a:p>
+        </p:txBody>
+      </p:sp>
     </p:spTree>
     <p:extLst>
       <p:ext uri="{BB962C8B-B14F-4D97-AF65-F5344CB8AC3E}">
@@ -9871,13 +16961,13 @@
   <p:clrMapOvr>
     <a:masterClrMapping/>
   </p:clrMapOvr>
-  <mc:AlternateContent xmlns:mc="http://schemas.openxmlformats.org/markup-compatibility/2006">
-    <mc:Choice xmlns:p159="http://schemas.microsoft.com/office/powerpoint/2015/09/main" Requires="p159">
+  <mc:AlternateContent xmlns:mc="http://schemas.openxmlformats.org/markup-compatibility/2006" xmlns:p159="http://schemas.microsoft.com/office/powerpoint/2015/09/main">
+    <mc:Choice Requires="p159">
       <p:transition xmlns:p14="http://schemas.microsoft.com/office/powerpoint/2010/main" spd="slow" p14:dur="2000">
         <p159:morph option="byObject"/>
       </p:transition>
     </mc:Choice>
-    <mc:Fallback>
+    <mc:Fallback xmlns="">
       <p:transition spd="slow">
         <p:fade/>
       </p:transition>
@@ -10201,6 +17291,35 @@
           </a:extLst>
         </p:spPr>
       </p:pic>
+      <p:sp>
+        <p:nvSpPr>
+          <p:cNvPr id="2" name="Segnaposto data 1">
+            <a:extLst>
+              <a:ext uri="{FF2B5EF4-FFF2-40B4-BE49-F238E27FC236}">
+                <a16:creationId xmlns:a16="http://schemas.microsoft.com/office/drawing/2014/main" id="{1A276CF7-5A9E-A9DA-B083-151C2B489621}"/>
+              </a:ext>
+            </a:extLst>
+          </p:cNvPr>
+          <p:cNvSpPr>
+            <a:spLocks noGrp="1"/>
+          </p:cNvSpPr>
+          <p:nvPr>
+            <p:ph type="dt" sz="half" idx="10"/>
+          </p:nvPr>
+        </p:nvSpPr>
+        <p:spPr/>
+        <p:txBody>
+          <a:bodyPr/>
+          <a:lstStyle/>
+          <a:p>
+            <a:fld id="{0A58B854-0826-4A8D-AE2F-3DC5E0F029A1}" type="datetime1">
+              <a:rPr lang="it-IT" smtClean="0"/>
+              <a:t>12/04/2026</a:t>
+            </a:fld>
+            <a:endParaRPr lang="en-US"/>
+          </a:p>
+        </p:txBody>
+      </p:sp>
     </p:spTree>
     <p:extLst>
       <p:ext uri="{BB962C8B-B14F-4D97-AF65-F5344CB8AC3E}">
@@ -10211,13 +17330,13 @@
   <p:clrMapOvr>
     <a:masterClrMapping/>
   </p:clrMapOvr>
-  <mc:AlternateContent xmlns:mc="http://schemas.openxmlformats.org/markup-compatibility/2006">
-    <mc:Choice xmlns:p159="http://schemas.microsoft.com/office/powerpoint/2015/09/main" Requires="p159">
+  <mc:AlternateContent xmlns:mc="http://schemas.openxmlformats.org/markup-compatibility/2006" xmlns:p159="http://schemas.microsoft.com/office/powerpoint/2015/09/main">
+    <mc:Choice Requires="p159">
       <p:transition xmlns:p14="http://schemas.microsoft.com/office/powerpoint/2010/main" spd="slow" p14:dur="2000">
         <p159:morph option="byObject"/>
       </p:transition>
     </mc:Choice>
-    <mc:Fallback>
+    <mc:Fallback xmlns="">
       <p:transition spd="slow">
         <p:fade/>
       </p:transition>
@@ -10427,6 +17546,301 @@
 </a:theme>
 </file>
 
+<file path=ppt/theme/theme2.xml><?xml version="1.0" encoding="utf-8"?>
+<a:theme xmlns:a="http://schemas.openxmlformats.org/drawingml/2006/main" name="Tema di Office">
+  <a:themeElements>
+    <a:clrScheme name="Office">
+      <a:dk1>
+        <a:sysClr val="windowText" lastClr="000000"/>
+      </a:dk1>
+      <a:lt1>
+        <a:sysClr val="window" lastClr="FFFFFF"/>
+      </a:lt1>
+      <a:dk2>
+        <a:srgbClr val="44546A"/>
+      </a:dk2>
+      <a:lt2>
+        <a:srgbClr val="E7E6E6"/>
+      </a:lt2>
+      <a:accent1>
+        <a:srgbClr val="4472C4"/>
+      </a:accent1>
+      <a:accent2>
+        <a:srgbClr val="ED7D31"/>
+      </a:accent2>
+      <a:accent3>
+        <a:srgbClr val="A5A5A5"/>
+      </a:accent3>
+      <a:accent4>
+        <a:srgbClr val="FFC000"/>
+      </a:accent4>
+      <a:accent5>
+        <a:srgbClr val="5B9BD5"/>
+      </a:accent5>
+      <a:accent6>
+        <a:srgbClr val="70AD47"/>
+      </a:accent6>
+      <a:hlink>
+        <a:srgbClr val="0563C1"/>
+      </a:hlink>
+      <a:folHlink>
+        <a:srgbClr val="954F72"/>
+      </a:folHlink>
+    </a:clrScheme>
+    <a:fontScheme name="Office">
+      <a:majorFont>
+        <a:latin typeface="Calibri Light" panose="020F0302020204030204"/>
+        <a:ea typeface=""/>
+        <a:cs typeface=""/>
+        <a:font script="Jpan" typeface="游ゴシック Light"/>
+        <a:font script="Hang" typeface="맑은 고딕"/>
+        <a:font script="Hans" typeface="等线 Light"/>
+        <a:font script="Hant" typeface="新細明體"/>
+        <a:font script="Arab" typeface="Times New Roman"/>
+        <a:font script="Hebr" typeface="Times New Roman"/>
+        <a:font script="Thai" typeface="Angsana New"/>
+        <a:font script="Ethi" typeface="Nyala"/>
+        <a:font script="Beng" typeface="Vrinda"/>
+        <a:font script="Gujr" typeface="Shruti"/>
+        <a:font script="Khmr" typeface="MoolBoran"/>
+        <a:font script="Knda" typeface="Tunga"/>
+        <a:font script="Guru" typeface="Raavi"/>
+        <a:font script="Cans" typeface="Euphemia"/>
+        <a:font script="Cher" typeface="Plantagenet Cherokee"/>
+        <a:font script="Yiii" typeface="Microsoft Yi Baiti"/>
+        <a:font script="Tibt" typeface="Microsoft Himalaya"/>
+        <a:font script="Thaa" typeface="MV Boli"/>
+        <a:font script="Deva" typeface="Mangal"/>
+        <a:font script="Telu" typeface="Gautami"/>
+        <a:font script="Taml" typeface="Latha"/>
+        <a:font script="Syrc" typeface="Estrangelo Edessa"/>
+        <a:font script="Orya" typeface="Kalinga"/>
+        <a:font script="Mlym" typeface="Kartika"/>
+        <a:font script="Laoo" typeface="DokChampa"/>
+        <a:font script="Sinh" typeface="Iskoola Pota"/>
+        <a:font script="Mong" typeface="Mongolian Baiti"/>
+        <a:font script="Viet" typeface="Times New Roman"/>
+        <a:font script="Uigh" typeface="Microsoft Uighur"/>
+        <a:font script="Geor" typeface="Sylfaen"/>
+        <a:font script="Armn" typeface="Arial"/>
+        <a:font script="Bugi" typeface="Leelawadee UI"/>
+        <a:font script="Bopo" typeface="Microsoft JhengHei"/>
+        <a:font script="Java" typeface="Javanese Text"/>
+        <a:font script="Lisu" typeface="Segoe UI"/>
+        <a:font script="Mymr" typeface="Myanmar Text"/>
+        <a:font script="Nkoo" typeface="Ebrima"/>
+        <a:font script="Olck" typeface="Nirmala UI"/>
+        <a:font script="Osma" typeface="Ebrima"/>
+        <a:font script="Phag" typeface="Phagspa"/>
+        <a:font script="Syrn" typeface="Estrangelo Edessa"/>
+        <a:font script="Syrj" typeface="Estrangelo Edessa"/>
+        <a:font script="Syre" typeface="Estrangelo Edessa"/>
+        <a:font script="Sora" typeface="Nirmala UI"/>
+        <a:font script="Tale" typeface="Microsoft Tai Le"/>
+        <a:font script="Talu" typeface="Microsoft New Tai Lue"/>
+        <a:font script="Tfng" typeface="Ebrima"/>
+      </a:majorFont>
+      <a:minorFont>
+        <a:latin typeface="Calibri" panose="020F0502020204030204"/>
+        <a:ea typeface=""/>
+        <a:cs typeface=""/>
+        <a:font script="Jpan" typeface="游ゴシック"/>
+        <a:font script="Hang" typeface="맑은 고딕"/>
+        <a:font script="Hans" typeface="等线"/>
+        <a:font script="Hant" typeface="新細明體"/>
+        <a:font script="Arab" typeface="Arial"/>
+        <a:font script="Hebr" typeface="Arial"/>
+        <a:font script="Thai" typeface="Cordia New"/>
+        <a:font script="Ethi" typeface="Nyala"/>
+        <a:font script="Beng" typeface="Vrinda"/>
+        <a:font script="Gujr" typeface="Shruti"/>
+        <a:font script="Khmr" typeface="DaunPenh"/>
+        <a:font script="Knda" typeface="Tunga"/>
+        <a:font script="Guru" typeface="Raavi"/>
+        <a:font script="Cans" typeface="Euphemia"/>
+        <a:font script="Cher" typeface="Plantagenet Cherokee"/>
+        <a:font script="Yiii" typeface="Microsoft Yi Baiti"/>
+        <a:font script="Tibt" typeface="Microsoft Himalaya"/>
+        <a:font script="Thaa" typeface="MV Boli"/>
+        <a:font script="Deva" typeface="Mangal"/>
+        <a:font script="Telu" typeface="Gautami"/>
+        <a:font script="Taml" typeface="Latha"/>
+        <a:font script="Syrc" typeface="Estrangelo Edessa"/>
+        <a:font script="Orya" typeface="Kalinga"/>
+        <a:font script="Mlym" typeface="Kartika"/>
+        <a:font script="Laoo" typeface="DokChampa"/>
+        <a:font script="Sinh" typeface="Iskoola Pota"/>
+        <a:font script="Mong" typeface="Mongolian Baiti"/>
+        <a:font script="Viet" typeface="Arial"/>
+        <a:font script="Uigh" typeface="Microsoft Uighur"/>
+        <a:font script="Geor" typeface="Sylfaen"/>
+        <a:font script="Armn" typeface="Arial"/>
+        <a:font script="Bugi" typeface="Leelawadee UI"/>
+        <a:font script="Bopo" typeface="Microsoft JhengHei"/>
+        <a:font script="Java" typeface="Javanese Text"/>
+        <a:font script="Lisu" typeface="Segoe UI"/>
+        <a:font script="Mymr" typeface="Myanmar Text"/>
+        <a:font script="Nkoo" typeface="Ebrima"/>
+        <a:font script="Olck" typeface="Nirmala UI"/>
+        <a:font script="Osma" typeface="Ebrima"/>
+        <a:font script="Phag" typeface="Phagspa"/>
+        <a:font script="Syrn" typeface="Estrangelo Edessa"/>
+        <a:font script="Syrj" typeface="Estrangelo Edessa"/>
+        <a:font script="Syre" typeface="Estrangelo Edessa"/>
+        <a:font script="Sora" typeface="Nirmala UI"/>
+        <a:font script="Tale" typeface="Microsoft Tai Le"/>
+        <a:font script="Talu" typeface="Microsoft New Tai Lue"/>
+        <a:font script="Tfng" typeface="Ebrima"/>
+      </a:minorFont>
+    </a:fontScheme>
+    <a:fmtScheme name="Office">
+      <a:fillStyleLst>
+        <a:solidFill>
+          <a:schemeClr val="phClr"/>
+        </a:solidFill>
+        <a:gradFill rotWithShape="1">
+          <a:gsLst>
+            <a:gs pos="0">
+              <a:schemeClr val="phClr">
+                <a:lumMod val="110000"/>
+                <a:satMod val="105000"/>
+                <a:tint val="67000"/>
+              </a:schemeClr>
+            </a:gs>
+            <a:gs pos="50000">
+              <a:schemeClr val="phClr">
+                <a:lumMod val="105000"/>
+                <a:satMod val="103000"/>
+                <a:tint val="73000"/>
+              </a:schemeClr>
+            </a:gs>
+            <a:gs pos="100000">
+              <a:schemeClr val="phClr">
+                <a:lumMod val="105000"/>
+                <a:satMod val="109000"/>
+                <a:tint val="81000"/>
+              </a:schemeClr>
+            </a:gs>
+          </a:gsLst>
+          <a:lin ang="5400000" scaled="0"/>
+        </a:gradFill>
+        <a:gradFill rotWithShape="1">
+          <a:gsLst>
+            <a:gs pos="0">
+              <a:schemeClr val="phClr">
+                <a:satMod val="103000"/>
+                <a:lumMod val="102000"/>
+                <a:tint val="94000"/>
+              </a:schemeClr>
+            </a:gs>
+            <a:gs pos="50000">
+              <a:schemeClr val="phClr">
+                <a:satMod val="110000"/>
+                <a:lumMod val="100000"/>
+                <a:shade val="100000"/>
+              </a:schemeClr>
+            </a:gs>
+            <a:gs pos="100000">
+              <a:schemeClr val="phClr">
+                <a:lumMod val="99000"/>
+                <a:satMod val="120000"/>
+                <a:shade val="78000"/>
+              </a:schemeClr>
+            </a:gs>
+          </a:gsLst>
+          <a:lin ang="5400000" scaled="0"/>
+        </a:gradFill>
+      </a:fillStyleLst>
+      <a:lnStyleLst>
+        <a:ln w="6350" cap="flat" cmpd="sng" algn="ctr">
+          <a:solidFill>
+            <a:schemeClr val="phClr"/>
+          </a:solidFill>
+          <a:prstDash val="solid"/>
+          <a:miter lim="800000"/>
+        </a:ln>
+        <a:ln w="12700" cap="flat" cmpd="sng" algn="ctr">
+          <a:solidFill>
+            <a:schemeClr val="phClr"/>
+          </a:solidFill>
+          <a:prstDash val="solid"/>
+          <a:miter lim="800000"/>
+        </a:ln>
+        <a:ln w="19050" cap="flat" cmpd="sng" algn="ctr">
+          <a:solidFill>
+            <a:schemeClr val="phClr"/>
+          </a:solidFill>
+          <a:prstDash val="solid"/>
+          <a:miter lim="800000"/>
+        </a:ln>
+      </a:lnStyleLst>
+      <a:effectStyleLst>
+        <a:effectStyle>
+          <a:effectLst/>
+        </a:effectStyle>
+        <a:effectStyle>
+          <a:effectLst/>
+        </a:effectStyle>
+        <a:effectStyle>
+          <a:effectLst>
+            <a:outerShdw blurRad="57150" dist="19050" dir="5400000" algn="ctr" rotWithShape="0">
+              <a:srgbClr val="000000">
+                <a:alpha val="63000"/>
+              </a:srgbClr>
+            </a:outerShdw>
+          </a:effectLst>
+        </a:effectStyle>
+      </a:effectStyleLst>
+      <a:bgFillStyleLst>
+        <a:solidFill>
+          <a:schemeClr val="phClr"/>
+        </a:solidFill>
+        <a:solidFill>
+          <a:schemeClr val="phClr">
+            <a:tint val="95000"/>
+            <a:satMod val="170000"/>
+          </a:schemeClr>
+        </a:solidFill>
+        <a:gradFill rotWithShape="1">
+          <a:gsLst>
+            <a:gs pos="0">
+              <a:schemeClr val="phClr">
+                <a:tint val="93000"/>
+                <a:satMod val="150000"/>
+                <a:shade val="98000"/>
+                <a:lumMod val="102000"/>
+              </a:schemeClr>
+            </a:gs>
+            <a:gs pos="50000">
+              <a:schemeClr val="phClr">
+                <a:tint val="98000"/>
+                <a:satMod val="130000"/>
+                <a:shade val="90000"/>
+                <a:lumMod val="103000"/>
+              </a:schemeClr>
+            </a:gs>
+            <a:gs pos="100000">
+              <a:schemeClr val="phClr">
+                <a:shade val="63000"/>
+                <a:satMod val="120000"/>
+              </a:schemeClr>
+            </a:gs>
+          </a:gsLst>
+          <a:lin ang="5400000" scaled="0"/>
+        </a:gradFill>
+      </a:bgFillStyleLst>
+    </a:fmtScheme>
+  </a:themeElements>
+  <a:objectDefaults/>
+  <a:extraClrSchemeLst/>
+  <a:extLst>
+    <a:ext uri="{05A4C25C-085E-4340-85A3-A5531E510DB2}">
+      <thm15:themeFamily xmlns:thm15="http://schemas.microsoft.com/office/thememl/2012/main" name="Office Theme" id="{62F939B6-93AF-4DB8-9C6B-D6C7DFDC589F}" vid="{4A3C46E8-61CC-4603-A589-7422A47A8E4A}"/>
+    </a:ext>
+  </a:extLst>
+</a:theme>
+</file>
+
 <file path=ppt/webextensions/taskpanes.xml><?xml version="1.0" encoding="utf-8"?>
 <wetp:taskpanes xmlns:wetp="http://schemas.microsoft.com/office/webextensions/taskpanes/2010/11">
   <wetp:taskpane dockstate="right" visibility="0" width="350" row="2">
